--- a/_implementation-notes/evening-series/FotH Evening Session 15 Slides DRAFT v1.pptx
+++ b/_implementation-notes/evening-series/FotH Evening Session 15 Slides DRAFT v1.pptx
@@ -10,6 +10,7 @@
   <p:sldIdLst>
     <p:sldId id="256" r:id="rId2"/>
     <p:sldId id="303" r:id="rId186"/>
+    <p:sldId id="539" r:id="rId23"/>
     <p:sldId id="304" r:id="rId187"/>
     <p:sldId id="451" r:id="rId188"/>
     <p:sldId id="452" r:id="rId189"/>
@@ -21,7 +22,8 @@
     <p:sldId id="457" r:id="rId195"/>
     <p:sldId id="458" r:id="rId196"/>
     <p:sldId id="459" r:id="rId197"/>
-    <p:sldId id="538" r:id="rId198"/>
+    <p:sldId id="540" r:id="rId24"/>
+    <p:sldId id="541" r:id="rId25"/>
   </p:sldIdLst>
   <p:sldSz cx="12192000" cy="6858000"/>
   <p:notesSz cx="6858000" cy="9144000"/>
@@ -751,6 +753,214 @@
 </p:notes>
 </file>
 
+<file path=ppt/notesSlides/notesSlide15.xml><?xml version="1.0" encoding="utf-8"?>
+<p:notes xmlns:a="http://schemas.openxmlformats.org/drawingml/2006/main" xmlns:p="http://schemas.openxmlformats.org/presentationml/2006/main" xmlns:r="http://schemas.openxmlformats.org/officeDocument/2006/relationships">
+  <p:cSld>
+    <p:spTree>
+      <p:nvGrpSpPr>
+        <p:cNvPr id="1" name=""/>
+        <p:cNvGrpSpPr/>
+        <p:nvPr/>
+      </p:nvGrpSpPr>
+      <p:grpSpPr>
+        <a:xfrm>
+          <a:off x="0" y="0"/>
+          <a:ext cx="0" cy="0"/>
+          <a:chOff x="0" y="0"/>
+          <a:chExt cx="0" cy="0"/>
+        </a:xfrm>
+      </p:grpSpPr>
+      <p:sp>
+        <p:nvSpPr>
+          <p:cNvPr id="2" name="Notes Placeholder 1"/>
+          <p:cNvSpPr>
+            <a:spLocks noGrp="1"/>
+          </p:cNvSpPr>
+          <p:nvPr>
+            <p:ph type="body" idx="1"/>
+          </p:nvPr>
+        </p:nvSpPr>
+        <p:spPr/>
+        <p:txBody>
+          <a:bodyPr/>
+          <a:lstStyle/>
+          <a:p>
+            <a:r>
+              <a:t>S15 · WELCOME · LEAD: CONTAINER HOLDER · GROUNDING — every session opens on this map</a:t>
+            </a:r>
+          </a:p>
+          <a:p>
+            <a:r>
+              <a:t>BEATS:</a:t>
+            </a:r>
+          </a:p>
+          <a:p>
+            <a:r>
+              <a:t>1. Locate tonight on the map, plainly: Session 15 gathers the whole map into a rhythm — all four Connects, sustained. Each connection makes the next one real (Matt. 22:37–40).</a:t>
+            </a:r>
+          </a:p>
+          <a:p>
+            <a:r>
+              <a:t>2. The four boxes are one journey — each connection makes the next one real — rooted in the two great commandments: love God, love neighbor (Matt 22:37–40).</a:t>
+            </a:r>
+          </a:p>
+          <a:p>
+            <a:r>
+              <a:t>3. This is also the 'where we are on the map' minute the welcome owes any newcomer.</a:t>
+            </a:r>
+          </a:p>
+          <a:p>
+            <a:r>
+              <a:t>CUES: Two minutes at most; then tonight's road.</a:t>
+            </a:r>
+          </a:p>
+        </p:txBody>
+      </p:sp>
+    </p:spTree>
+  </p:cSld>
+  <p:clrMapOvr>
+    <a:masterClrMapping/>
+  </p:clrMapOvr>
+</p:notes>
+</file>
+
+<file path=ppt/notesSlides/notesSlide16.xml><?xml version="1.0" encoding="utf-8"?>
+<p:notes xmlns:a="http://schemas.openxmlformats.org/drawingml/2006/main" xmlns:p="http://schemas.openxmlformats.org/presentationml/2006/main" xmlns:r="http://schemas.openxmlformats.org/officeDocument/2006/relationships">
+  <p:cSld>
+    <p:spTree>
+      <p:nvGrpSpPr>
+        <p:cNvPr id="1" name=""/>
+        <p:cNvGrpSpPr/>
+        <p:nvPr/>
+      </p:nvGrpSpPr>
+      <p:grpSpPr>
+        <a:xfrm>
+          <a:off x="0" y="0"/>
+          <a:ext cx="0" cy="0"/>
+          <a:chOff x="0" y="0"/>
+          <a:chExt cx="0" cy="0"/>
+        </a:xfrm>
+      </p:grpSpPr>
+      <p:sp>
+        <p:nvSpPr>
+          <p:cNvPr id="2" name="Notes Placeholder 1"/>
+          <p:cNvSpPr>
+            <a:spLocks noGrp="1"/>
+          </p:cNvSpPr>
+          <p:nvPr>
+            <p:ph type="body" idx="1"/>
+          </p:nvPr>
+        </p:nvSpPr>
+        <p:spPr/>
+        <p:txBody>
+          <a:bodyPr/>
+          <a:lstStyle/>
+          <a:p>
+            <a:r>
+              <a:t>S15 · COMMISSIONING · LEAD: CONTENT PRESENTER</a:t>
+            </a:r>
+          </a:p>
+          <a:p>
+            <a:r>
+              <a:t>BEATS:</a:t>
+            </a:r>
+          </a:p>
+          <a:p>
+            <a:r>
+              <a:t>1. The sheet on the screen is the sheet in their hands — walk it, don't read it.</a:t>
+            </a:r>
+          </a:p>
+          <a:p>
+            <a:r>
+              <a:t>2. The standing rhythm first: the morning question, the evening journal line — one box per day on the week-grids.</a:t>
+            </a:r>
+          </a:p>
+          <a:p>
+            <a:r>
+              <a:t>3. A missed box is never a failure — it is an invitation to return.</a:t>
+            </a:r>
+          </a:p>
+          <a:p>
+            <a:r>
+              <a:t>CUES: The four parts are the next slide.</a:t>
+            </a:r>
+          </a:p>
+        </p:txBody>
+      </p:sp>
+    </p:spTree>
+  </p:cSld>
+  <p:clrMapOvr>
+    <a:masterClrMapping/>
+  </p:clrMapOvr>
+</p:notes>
+</file>
+
+<file path=ppt/notesSlides/notesSlide17.xml><?xml version="1.0" encoding="utf-8"?>
+<p:notes xmlns:a="http://schemas.openxmlformats.org/drawingml/2006/main" xmlns:p="http://schemas.openxmlformats.org/presentationml/2006/main" xmlns:r="http://schemas.openxmlformats.org/officeDocument/2006/relationships">
+  <p:cSld>
+    <p:spTree>
+      <p:nvGrpSpPr>
+        <p:cNvPr id="1" name=""/>
+        <p:cNvGrpSpPr/>
+        <p:nvPr/>
+      </p:nvGrpSpPr>
+      <p:grpSpPr>
+        <a:xfrm>
+          <a:off x="0" y="0"/>
+          <a:ext cx="0" cy="0"/>
+          <a:chOff x="0" y="0"/>
+          <a:chExt cx="0" cy="0"/>
+        </a:xfrm>
+      </p:grpSpPr>
+      <p:sp>
+        <p:nvSpPr>
+          <p:cNvPr id="2" name="Notes Placeholder 1"/>
+          <p:cNvSpPr>
+            <a:spLocks noGrp="1"/>
+          </p:cNvSpPr>
+          <p:nvPr>
+            <p:ph type="body" idx="1"/>
+          </p:nvPr>
+        </p:nvSpPr>
+        <p:spPr/>
+        <p:txBody>
+          <a:bodyPr/>
+          <a:lstStyle/>
+          <a:p>
+            <a:r>
+              <a:t>S15 · COMMISSIONING · LEAD: CONTENT PRESENTER</a:t>
+            </a:r>
+          </a:p>
+          <a:p>
+            <a:r>
+              <a:t>BEATS:</a:t>
+            </a:r>
+          </a:p>
+          <a:p>
+            <a:r>
+              <a:t>1. The four parts, in order: the homework practice, week one; the end-of-week-one check-in; the homework practice, week two; one sentence of preparation.</a:t>
+            </a:r>
+          </a:p>
+          <a:p>
+            <a:r>
+              <a:t>2. Check-in partners are named aloud before leaving this slide — the sheet has the line to write the name.</a:t>
+            </a:r>
+          </a:p>
+          <a:p>
+            <a:r>
+              <a:t>GUARD: The sheet-walk, not a re-teach.</a:t>
+            </a:r>
+          </a:p>
+        </p:txBody>
+      </p:sp>
+    </p:spTree>
+  </p:cSld>
+  <p:clrMapOvr>
+    <a:masterClrMapping/>
+  </p:clrMapOvr>
+</p:notes>
+</file>
+
 <file path=ppt/notesSlides/notesSlide183.xml><?xml version="1.0" encoding="utf-8"?>
 <p:notes xmlns:a="http://schemas.openxmlformats.org/drawingml/2006/main" xmlns:r="http://schemas.openxmlformats.org/officeDocument/2006/relationships" xmlns:p="http://schemas.openxmlformats.org/presentationml/2006/main">
   <p:cSld>
@@ -896,20 +1106,22 @@
           <a:lstStyle/>
           <a:p>
             <a:r>
-              <a:rPr lang="en-US" sz="1200"/>
               <a:t>S15 · 7:00–7:08 · LEAD: CONTAINER HOLDER · TEEN-LED (CiF, from memory)</a:t>
             </a:r>
           </a:p>
           <a:p>
             <a:r>
-              <a:rPr lang="en-US" sz="1200"/>
               <a:t>BEATS: 1. The senior opens from memory: blessing first, then the container — Safe, Present, Clear, Intentional, same as every week. 2. Two things today: your rhythm, your handwriting; then four questions for the parents. 3. Unhurried — this is their ninth or tenth container rep, and Week 22 will ask for it in public.</a:t>
             </a:r>
           </a:p>
           <a:p>
             <a:r>
-              <a:rPr lang="en-US" sz="1200"/>
               <a:t>CUES: Lead Companion in the senior's eyeline. Anything heavy is the adults' to hold — the senior never carries it.</a:t>
+            </a:r>
+          </a:p>
+          <a:p>
+            <a:r>
+              <a:t>PAIR LEAD: name the leading pair in the welcome — two leaders hold tonight, and the room will see the evening handed back and forth between them; that is the design. The pair practices the session together beforehand.</a:t>
             </a:r>
           </a:p>
         </p:txBody>
@@ -1441,59 +1653,6 @@
             <a:r>
               <a:rPr lang="en-US" sz="1200"/>
               <a:t>GUARD: 'Not yet' is a full answer for everyone, and next week's check-in audits nothing.</a:t>
-            </a:r>
-          </a:p>
-        </p:txBody>
-      </p:sp>
-    </p:spTree>
-  </p:cSld>
-  <p:clrMapOvr>
-    <a:masterClrMapping/>
-  </p:clrMapOvr>
-</p:notes>
-</file>
-
-<file path=ppt/notesSlides/notesSlide195.xml><?xml version="1.0" encoding="utf-8"?>
-<p:notes xmlns:a="http://schemas.openxmlformats.org/drawingml/2006/main" xmlns:r="http://schemas.openxmlformats.org/officeDocument/2006/relationships" xmlns:p="http://schemas.openxmlformats.org/presentationml/2006/main">
-  <p:cSld>
-    <p:spTree>
-      <p:nvGrpSpPr>
-        <p:cNvPr id="1" name=""/>
-        <p:cNvGrpSpPr/>
-        <p:nvPr/>
-      </p:nvGrpSpPr>
-      <p:grpSpPr>
-        <a:xfrm>
-          <a:off x="0" y="0"/>
-          <a:ext cx="0" cy="0"/>
-          <a:chOff x="0" y="0"/>
-          <a:chExt cx="0" cy="0"/>
-        </a:xfrm>
-      </p:grpSpPr>
-      <p:sp>
-        <p:nvSpPr>
-          <p:cNvPr id="2" name="Notes Placeholder 1"/>
-          <p:cNvSpPr>
-            <a:spLocks noGrp="1"/>
-          </p:cNvSpPr>
-          <p:nvPr>
-            <p:ph type="body" idx="1"/>
-          </p:nvPr>
-        </p:nvSpPr>
-        <p:spPr/>
-        <p:txBody>
-          <a:bodyPr/>
-          <a:lstStyle/>
-          <a:p>
-            <a:r>
-              <a:rPr lang="en-US" sz="1200"/>
-              <a:t>S15 · 8:28–8:30 · LEAD: CONTAINER HOLDER</a:t>
-            </a:r>
-          </a:p>
-          <a:p>
-            <a:r>
-              <a:rPr lang="en-US" sz="1200"/>
-              <a:t>BEATS: 1. The check card rows: your own Rhythm Card dailies, plus one journal line on holds and slips. 2. The one-time boxes are willing-only: the four questions asked of your teen, and separately of your spouse — only if both willing; 'not yet' counts. 3. A missed box is never failure — an invitation to return; come back evenings either way.</a:t>
             </a:r>
           </a:p>
         </p:txBody>
@@ -4705,7 +4864,7 @@
 </p:sld>
 </file>
 
-<file path=ppt/slides/slide185.xml><?xml version="1.0" encoding="utf-8"?>
+<file path=ppt/slides/slide10.xml><?xml version="1.0" encoding="utf-8"?>
 <p:sld xmlns:a="http://schemas.openxmlformats.org/drawingml/2006/main" xmlns:r="http://schemas.openxmlformats.org/officeDocument/2006/relationships" xmlns:p="http://schemas.openxmlformats.org/presentationml/2006/main">
   <p:cSld>
     <p:spTree>
@@ -4742,41 +4901,25 @@
           <a:ln>
             <a:noFill/>
           </a:ln>
-          <a:effectLst/>
-        </p:spPr>
-        <p:style>
-          <a:lnRef idx="1">
-            <a:schemeClr val="accent1"/>
-          </a:lnRef>
-          <a:fillRef idx="3">
-            <a:schemeClr val="accent1"/>
-          </a:fillRef>
-          <a:effectRef idx="2">
-            <a:schemeClr val="accent1"/>
-          </a:effectRef>
-          <a:fontRef idx="minor">
-            <a:schemeClr val="lt1"/>
-          </a:fontRef>
-        </p:style>
-        <p:txBody>
-          <a:bodyPr rtlCol="0" anchor="ctr"/>
-          <a:lstStyle/>
-          <a:p>
-            <a:pPr algn="ctr"/>
+        </p:spPr>
+        <p:txBody>
+          <a:bodyPr/>
+          <a:lstStyle/>
+          <a:p>
             <a:endParaRPr/>
           </a:p>
         </p:txBody>
       </p:sp>
       <p:sp>
         <p:nvSpPr>
-          <p:cNvPr id="4" name="TextBox 3"/>
+          <p:cNvPr id="3" name="TextBox 2"/>
           <p:cNvSpPr txBox="1"/>
           <p:nvPr/>
         </p:nvSpPr>
         <p:spPr>
           <a:xfrm>
-            <a:off x="822960" y="1828800"/>
-            <a:ext cx="5212080" cy="3291840"/>
+            <a:off x="822960" y="502920"/>
+            <a:ext cx="10515600" cy="822960"/>
           </a:xfrm>
           <a:prstGeom prst="rect">
             <a:avLst/>
@@ -4795,59 +4938,269 @@
               </a:spcAft>
             </a:pPr>
             <a:r>
-              <a:rPr sz="1800" b="1" i="0">
-                <a:solidFill>
-                  <a:srgbClr val="97BC62"/>
-                </a:solidFill>
-                <a:latin typeface="Calibri"/>
-              </a:rPr>
-              <a:t>SESSION 15</a:t>
-            </a:r>
-          </a:p>
-          <a:p>
-            <a:pPr algn="l">
+              <a:rPr sz="2800" b="1" i="0">
+                <a:solidFill>
+                  <a:srgbClr val="2C5F2D"/>
+                </a:solidFill>
+                <a:latin typeface="Cambria"/>
+              </a:rPr>
+              <a:t>The Four Questions</a:t>
+            </a:r>
+          </a:p>
+        </p:txBody>
+      </p:sp>
+      <p:sp>
+        <p:nvSpPr>
+          <p:cNvPr id="4" name="TextBox 4"/>
+          <p:cNvSpPr txBox="1"/>
+          <p:nvPr/>
+        </p:nvSpPr>
+        <p:spPr>
+          <a:xfrm>
+            <a:off x="822960" y="1600200"/>
+            <a:ext cx="5669280" cy="4572000"/>
+          </a:xfrm>
+          <a:prstGeom prst="rect">
+            <a:avLst/>
+          </a:prstGeom>
+          <a:noFill/>
+        </p:spPr>
+        <p:txBody>
+          <a:bodyPr wrap="square" lIns="91440" tIns="91440" rIns="91440" bIns="91440"/>
+          <a:lstStyle/>
+          <a:p>
+            <a:pPr marL="274320" indent="-274320">
               <a:spcAft>
-                <a:spcPts val="1000"/>
+                <a:spcPts val="650"/>
               </a:spcAft>
             </a:pPr>
             <a:r>
-              <a:rPr sz="3300" b="1" i="0">
-                <a:solidFill>
-                  <a:srgbClr val="2C5F2D"/>
-                </a:solidFill>
-                <a:latin typeface="Cambria"/>
-              </a:rPr>
-              <a:t>The Rhythm and the Four Questions</a:t>
-            </a:r>
-          </a:p>
-          <a:p>
-            <a:pPr algn="l">
+              <a:rPr sz="1800" b="1" i="0">
+                <a:solidFill>
+                  <a:srgbClr val="97BC62"/>
+                </a:solidFill>
+                <a:latin typeface="Calibri"/>
+              </a:rPr>
+              <a:t>•  </a:t>
+            </a:r>
+            <a:r>
+              <a:rPr sz="1800" b="0" i="0">
+                <a:solidFill>
+                  <a:srgbClr val="222B22"/>
+                </a:solidFill>
+                <a:latin typeface="Calibri"/>
+              </a:rPr>
+              <a:t>Parents, this next part is for you — nobody answers tonight. This week, at home, for the willing: unhurried, no audience, phone away, yours first</a:t>
+            </a:r>
+          </a:p>
+          <a:p>
+            <a:pPr marL="342900" indent="-342900">
+              <a:spcAft>
+                <a:spcPts val="650"/>
+              </a:spcAft>
+            </a:pPr>
+            <a:r>
+              <a:rPr sz="1800" b="1" i="0">
+                <a:solidFill>
+                  <a:srgbClr val="97BC62"/>
+                </a:solidFill>
+                <a:latin typeface="Calibri"/>
+              </a:rPr>
+              <a:t>1   </a:t>
+            </a:r>
+            <a:r>
+              <a:rPr sz="1800" b="0" i="0">
+                <a:solidFill>
+                  <a:srgbClr val="222B22"/>
+                </a:solidFill>
+                <a:latin typeface="Calibri"/>
+              </a:rPr>
+              <a:t>What has it been like to live with me all these years?</a:t>
+            </a:r>
+          </a:p>
+          <a:p>
+            <a:pPr marL="342900" indent="-342900">
+              <a:spcAft>
+                <a:spcPts val="650"/>
+              </a:spcAft>
+            </a:pPr>
+            <a:r>
+              <a:rPr sz="1800" b="1" i="0">
+                <a:solidFill>
+                  <a:srgbClr val="97BC62"/>
+                </a:solidFill>
+                <a:latin typeface="Calibri"/>
+              </a:rPr>
+              <a:t>2   </a:t>
+            </a:r>
+            <a:r>
+              <a:rPr sz="1800" b="0" i="0">
+                <a:solidFill>
+                  <a:srgbClr val="222B22"/>
+                </a:solidFill>
+                <a:latin typeface="Calibri"/>
+              </a:rPr>
+              <a:t>What have been my messages to you?</a:t>
+            </a:r>
+          </a:p>
+          <a:p>
+            <a:pPr marL="342900" indent="-342900">
+              <a:spcAft>
+                <a:spcPts val="650"/>
+              </a:spcAft>
+            </a:pPr>
+            <a:r>
+              <a:rPr sz="1800" b="1" i="0">
+                <a:solidFill>
+                  <a:srgbClr val="97BC62"/>
+                </a:solidFill>
+                <a:latin typeface="Calibri"/>
+              </a:rPr>
+              <a:t>3   </a:t>
+            </a:r>
+            <a:r>
+              <a:rPr sz="1800" b="0" i="0">
+                <a:solidFill>
+                  <a:srgbClr val="222B22"/>
+                </a:solidFill>
+                <a:latin typeface="Calibri"/>
+              </a:rPr>
+              <a:t>How have I wounded you?</a:t>
+            </a:r>
+          </a:p>
+          <a:p>
+            <a:pPr marL="342900" indent="-342900">
+              <a:spcAft>
+                <a:spcPts val="650"/>
+              </a:spcAft>
+            </a:pPr>
+            <a:r>
+              <a:rPr sz="1800" b="1" i="0">
+                <a:solidFill>
+                  <a:srgbClr val="97BC62"/>
+                </a:solidFill>
+                <a:latin typeface="Calibri"/>
+              </a:rPr>
+              <a:t>4   </a:t>
+            </a:r>
+            <a:r>
+              <a:rPr sz="1800" b="0" i="0">
+                <a:solidFill>
+                  <a:srgbClr val="222B22"/>
+                </a:solidFill>
+                <a:latin typeface="Calibri"/>
+              </a:rPr>
+              <a:t>What would you like from me going forward?</a:t>
+            </a:r>
+          </a:p>
+          <a:p>
+            <a:pPr marL="274320" indent="-274320">
+              <a:spcAft>
+                <a:spcPts val="650"/>
+              </a:spcAft>
+            </a:pPr>
+            <a:r>
+              <a:rPr sz="1800" b="1" i="0">
+                <a:solidFill>
+                  <a:srgbClr val="97BC62"/>
+                </a:solidFill>
+                <a:latin typeface="Calibri"/>
+              </a:rPr>
+              <a:t>•  </a:t>
+            </a:r>
+            <a:r>
+              <a:rPr sz="1800" b="0" i="0">
+                <a:solidFill>
+                  <a:srgbClr val="222B22"/>
+                </a:solidFill>
+                <a:latin typeface="Calibri"/>
+              </a:rPr>
+              <a:t>The guards — willing only, both directions; receive without defending (listening questions and “thank you” only); invisible by default; a letter counts; the Section 6 boundary</a:t>
+            </a:r>
+          </a:p>
+        </p:txBody>
+      </p:sp>
+      <p:sp>
+        <p:nvSpPr>
+          <p:cNvPr id="6" name="TextBox 6"/>
+          <p:cNvSpPr txBox="1"/>
+          <p:nvPr/>
+        </p:nvSpPr>
+        <p:spPr>
+          <a:xfrm>
+            <a:off x="6766560" y="1737360"/>
+            <a:ext cx="4663440" cy="2194560"/>
+          </a:xfrm>
+          <a:prstGeom prst="rect">
+            <a:avLst/>
+          </a:prstGeom>
+          <a:solidFill>
+            <a:srgbClr val="F1F6EC"/>
+          </a:solidFill>
+        </p:spPr>
+        <p:txBody>
+          <a:bodyPr wrap="square" lIns="91440" tIns="91440" rIns="91440" bIns="91440" anchor="ctr"/>
+          <a:lstStyle/>
+          <a:p>
+            <a:pPr>
+              <a:spcAft>
+                <a:spcPts val="900"/>
+              </a:spcAft>
+            </a:pPr>
+            <a:r>
+              <a:rPr sz="1200" b="1" i="0">
+                <a:solidFill>
+                  <a:srgbClr val="97BC62"/>
+                </a:solidFill>
+                <a:latin typeface="Calibri"/>
+              </a:rPr>
+              <a:t>PSALM 139:23–24</a:t>
+            </a:r>
+          </a:p>
+          <a:p>
+            <a:pPr>
               <a:spcAft>
                 <a:spcPts val="600"/>
               </a:spcAft>
             </a:pPr>
             <a:r>
-              <a:rPr sz="1800" b="0" i="1">
-                <a:solidFill>
-                  <a:srgbClr val="595959"/>
-                </a:solidFill>
-                <a:latin typeface="Calibri"/>
-              </a:rPr>
-              <a:t>The long walk installed before the sending — and four questions a parent dares to ask at their own kitchen table</a:t>
-            </a:r>
-          </a:p>
-        </p:txBody>
-      </p:sp>
-      <p:sp>
-        <p:nvSpPr>
-          <p:cNvPr id="5" name="TextBox 4"/>
+              <a:rPr sz="2400" b="0" i="1">
+                <a:solidFill>
+                  <a:srgbClr val="222B22"/>
+                </a:solidFill>
+                <a:latin typeface="Cambria"/>
+              </a:rPr>
+              <a:t>Asked of God, it is worship. Asked of your family, it is the bravest form of the same prayer.</a:t>
+            </a:r>
+          </a:p>
+          <a:p>
+            <a:pPr>
+              <a:spcAft>
+                <a:spcPts val="600"/>
+              </a:spcAft>
+            </a:pPr>
+            <a:r>
+              <a:rPr sz="2400" b="0" i="1">
+                <a:solidFill>
+                  <a:srgbClr val="222B22"/>
+                </a:solidFill>
+                <a:latin typeface="Cambria"/>
+              </a:rPr>
+              <a:t>James 1:19 — quick to hear, slow to speak.</a:t>
+            </a:r>
+          </a:p>
+        </p:txBody>
+      </p:sp>
+      <p:sp>
+        <p:nvSpPr>
+          <p:cNvPr id="90" name="SlideNum"/>
           <p:cNvSpPr txBox="1"/>
           <p:nvPr/>
         </p:nvSpPr>
         <p:spPr>
           <a:xfrm>
-            <a:off x="822960" y="6126480"/>
-            <a:ext cx="7315200" cy="457200"/>
+            <a:off x="11384280" y="6446520"/>
+            <a:ext cx="640080" cy="292608"/>
           </a:xfrm>
           <a:prstGeom prst="rect">
             <a:avLst/>
@@ -4855,51 +5208,12 @@
           <a:noFill/>
         </p:spPr>
         <p:txBody>
-          <a:bodyPr wrap="square">
-            <a:spAutoFit/>
-          </a:bodyPr>
-          <a:lstStyle/>
-          <a:p>
-            <a:pPr algn="l">
-              <a:spcAft>
-                <a:spcPts val="600"/>
-              </a:spcAft>
-            </a:pPr>
-            <a:r>
-              <a:rPr sz="1800" b="0" i="0">
-                <a:solidFill>
-                  <a:srgbClr val="595959"/>
-                </a:solidFill>
-                <a:latin typeface="Calibri"/>
-              </a:rPr>
-              <a:t>Quarter 3: Mission &amp; Rhythm</a:t>
-            </a:r>
-          </a:p>
-        </p:txBody>
-      </p:sp>
-      <p:sp>
-        <p:nvSpPr>
-          <p:cNvPr id="90" name="SlideNum"/>
-          <p:cNvSpPr txBox="1"/>
-          <p:nvPr/>
-        </p:nvSpPr>
-        <p:spPr>
-          <a:xfrm>
-            <a:off x="11384280" y="6446520"/>
-            <a:ext cx="640080" cy="292608"/>
-          </a:xfrm>
-          <a:prstGeom prst="rect">
-            <a:avLst/>
-          </a:prstGeom>
-          <a:noFill/>
-        </p:spPr>
-        <p:txBody>
           <a:bodyPr wrap="none" lIns="0" tIns="0" rIns="45720" bIns="0" anchor="ctr"/>
           <a:lstStyle/>
           <a:p>
             <a:pPr algn="r"/>
             <a:r>
-              <a:t>185</a:t>
+              <a:t>193</a:t>
             </a:r>
             <a:endParaRPr sz="1000" b="1">
               <a:solidFill>
@@ -4910,42 +5224,6 @@
           </a:p>
         </p:txBody>
       </p:sp>
-      <p:pic>
-        <p:nvPicPr>
-          <p:cNvPr id="91" name="Picture 91" descr="a long open road running to the horizon in early morning light"/>
-          <p:cNvPicPr>
-            <a:picLocks noChangeAspect="1"/>
-          </p:cNvPicPr>
-          <p:nvPr/>
-        </p:nvPicPr>
-        <p:blipFill>
-          <a:blip r:embed="rId3"/>
-          <a:stretch>
-            <a:fillRect/>
-          </a:stretch>
-        </p:blipFill>
-        <p:spPr>
-          <a:xfrm>
-            <a:off x="6309360" y="1630118"/>
-            <a:ext cx="5394960" cy="3597763"/>
-          </a:xfrm>
-          <a:prstGeom prst="rect">
-            <a:avLst/>
-          </a:prstGeom>
-          <a:ln w="76200">
-            <a:solidFill>
-              <a:srgbClr val="FFFFFF"/>
-            </a:solidFill>
-          </a:ln>
-          <a:effectLst>
-            <a:outerShdw blurRad="63500" dist="25400" dir="5400000" rotWithShape="0">
-              <a:srgbClr val="000000">
-                <a:alpha val="35000"/>
-              </a:srgbClr>
-            </a:outerShdw>
-          </a:effectLst>
-        </p:spPr>
-      </p:pic>
     </p:spTree>
   </p:cSld>
   <p:clrMapOvr>
@@ -4954,7 +5232,7 @@
 </p:sld>
 </file>
 
-<file path=ppt/slides/slide186.xml><?xml version="1.0" encoding="utf-8"?>
+<file path=ppt/slides/slide11.xml><?xml version="1.0" encoding="utf-8"?>
 <p:sld xmlns:a="http://schemas.openxmlformats.org/drawingml/2006/main" xmlns:r="http://schemas.openxmlformats.org/officeDocument/2006/relationships" xmlns:p="http://schemas.openxmlformats.org/presentationml/2006/main">
   <p:cSld>
     <p:spTree>
@@ -4991,27 +5269,11 @@
           <a:ln>
             <a:noFill/>
           </a:ln>
-          <a:effectLst/>
-        </p:spPr>
-        <p:style>
-          <a:lnRef idx="1">
-            <a:schemeClr val="accent1"/>
-          </a:lnRef>
-          <a:fillRef idx="3">
-            <a:schemeClr val="accent1"/>
-          </a:fillRef>
-          <a:effectRef idx="2">
-            <a:schemeClr val="accent1"/>
-          </a:effectRef>
-          <a:fontRef idx="minor">
-            <a:schemeClr val="lt1"/>
-          </a:fontRef>
-        </p:style>
-        <p:txBody>
-          <a:bodyPr rtlCol="0" anchor="ctr"/>
-          <a:lstStyle/>
-          <a:p>
-            <a:pPr algn="ctr"/>
+        </p:spPr>
+        <p:txBody>
+          <a:bodyPr/>
+          <a:lstStyle/>
+          <a:p>
             <a:endParaRPr/>
           </a:p>
         </p:txBody>
@@ -5050,21 +5312,21 @@
                 </a:solidFill>
                 <a:latin typeface="Cambria"/>
               </a:rPr>
-              <a:t>Session 15 — Tonight’s Road</a:t>
-            </a:r>
-          </a:p>
-        </p:txBody>
-      </p:sp>
-      <p:sp>
-        <p:nvSpPr>
-          <p:cNvPr id="4" name="TextBox 3"/>
+              <a:t>The Leader Feedback Round</a:t>
+            </a:r>
+          </a:p>
+        </p:txBody>
+      </p:sp>
+      <p:sp>
+        <p:nvSpPr>
+          <p:cNvPr id="4" name="TextBox 4"/>
           <p:cNvSpPr txBox="1"/>
           <p:nvPr/>
         </p:nvSpPr>
         <p:spPr>
           <a:xfrm>
-            <a:off x="822960" y="1508760"/>
-            <a:ext cx="7040880" cy="4754880"/>
+            <a:off x="822960" y="1554480"/>
+            <a:ext cx="6675120" cy="4892040"/>
           </a:xfrm>
           <a:prstGeom prst="rect">
             <a:avLst/>
@@ -5072,233 +5334,156 @@
           <a:noFill/>
         </p:spPr>
         <p:txBody>
-          <a:bodyPr wrap="square">
-            <a:spAutoFit/>
-          </a:bodyPr>
-          <a:lstStyle/>
-          <a:p>
-            <a:pPr>
+          <a:bodyPr wrap="square" lIns="91440" tIns="91440" rIns="91440" bIns="91440"/>
+          <a:lstStyle/>
+          <a:p>
+            <a:pPr marL="274320" indent="-274320">
               <a:spcAft>
-                <a:spcPts val="500"/>
+                <a:spcPts val="900"/>
               </a:spcAft>
             </a:pPr>
             <a:r>
-              <a:rPr sz="2800" b="1">
+              <a:rPr sz="2800" b="1" i="0">
                 <a:solidFill>
                   <a:srgbClr val="97BC62"/>
                 </a:solidFill>
                 <a:latin typeface="Calibri"/>
               </a:rPr>
-              <a:t>1   </a:t>
-            </a:r>
-            <a:r>
-              <a:rPr sz="2800">
+              <a:t>•  </a:t>
+            </a:r>
+            <a:r>
+              <a:rPr sz="2800" b="0" i="0">
                 <a:solidFill>
                   <a:srgbClr val="222B22"/>
                 </a:solidFill>
                 <a:latin typeface="Calibri"/>
               </a:rPr>
-              <a:t>Welcome and centering</a:t>
-            </a:r>
-          </a:p>
-          <a:p>
-            <a:pPr>
+              <a:t>Two rounds, same as every session — the container holder first, then the content presenter: three things each</a:t>
+            </a:r>
+          </a:p>
+          <a:p>
+            <a:pPr marL="685800" indent="-274320">
               <a:spcAft>
-                <a:spcPts val="500"/>
+                <a:spcPts val="700"/>
               </a:spcAft>
             </a:pPr>
             <a:r>
-              <a:rPr sz="2800" b="1">
+              <a:rPr sz="2000" b="1" i="0">
                 <a:solidFill>
                   <a:srgbClr val="97BC62"/>
                 </a:solidFill>
                 <a:latin typeface="Calibri"/>
               </a:rPr>
-              <a:t>2   </a:t>
-            </a:r>
-            <a:r>
-              <a:rPr sz="2800">
+              <a:t>–  </a:t>
+            </a:r>
+            <a:r>
+              <a:rPr sz="2000" b="0" i="1">
                 <a:solidFill>
                   <a:srgbClr val="222B22"/>
                 </a:solidFill>
                 <a:latin typeface="Calibri"/>
               </a:rPr>
-              <a:t>Week 13 completion</a:t>
-            </a:r>
-          </a:p>
-          <a:p>
-            <a:pPr>
+              <a:t>“What I think went well tonight: ______”</a:t>
+            </a:r>
+          </a:p>
+          <a:p>
+            <a:pPr marL="685800" indent="-274320">
               <a:spcAft>
-                <a:spcPts val="500"/>
+                <a:spcPts val="700"/>
               </a:spcAft>
             </a:pPr>
             <a:r>
-              <a:rPr sz="2800" b="1">
+              <a:rPr sz="2000" b="1" i="0">
                 <a:solidFill>
                   <a:srgbClr val="97BC62"/>
                 </a:solidFill>
                 <a:latin typeface="Calibri"/>
               </a:rPr>
-              <a:t>3   </a:t>
-            </a:r>
-            <a:r>
-              <a:rPr sz="2800">
+              <a:t>–  </a:t>
+            </a:r>
+            <a:r>
+              <a:rPr sz="2000" b="0" i="1">
                 <a:solidFill>
                   <a:srgbClr val="222B22"/>
                 </a:solidFill>
                 <a:latin typeface="Calibri"/>
               </a:rPr>
-              <a:t>The long walk — Gal. 6:9</a:t>
-            </a:r>
-          </a:p>
-          <a:p>
-            <a:pPr>
+              <a:t>“What I’d do differently next time: ______”</a:t>
+            </a:r>
+          </a:p>
+          <a:p>
+            <a:pPr marL="685800" indent="-274320">
               <a:spcAft>
-                <a:spcPts val="500"/>
+                <a:spcPts val="700"/>
               </a:spcAft>
             </a:pPr>
             <a:r>
-              <a:rPr sz="2800" b="1">
+              <a:rPr sz="2000" b="1" i="0">
                 <a:solidFill>
                   <a:srgbClr val="97BC62"/>
                 </a:solidFill>
                 <a:latin typeface="Calibri"/>
               </a:rPr>
-              <a:t>4   </a:t>
-            </a:r>
-            <a:r>
-              <a:rPr sz="2800">
+              <a:t>–  </a:t>
+            </a:r>
+            <a:r>
+              <a:rPr sz="2000" b="0" i="1">
                 <a:solidFill>
                   <a:srgbClr val="222B22"/>
                 </a:solidFill>
                 <a:latin typeface="Calibri"/>
               </a:rPr>
-              <a:t>The Rhythm Card introduced</a:t>
-            </a:r>
-          </a:p>
-          <a:p>
-            <a:pPr>
+              <a:t>“If I were to teach tonight’s process to someone, I would tell them: ______”</a:t>
+            </a:r>
+          </a:p>
+          <a:p>
+            <a:pPr marL="274320" indent="-274320">
               <a:spcAft>
-                <a:spcPts val="500"/>
+                <a:spcPts val="900"/>
               </a:spcAft>
             </a:pPr>
             <a:r>
-              <a:rPr sz="2800" b="1">
+              <a:rPr sz="2800" b="1" i="0">
                 <a:solidFill>
                   <a:srgbClr val="97BC62"/>
                 </a:solidFill>
                 <a:latin typeface="Calibri"/>
               </a:rPr>
-              <a:t>5   </a:t>
-            </a:r>
-            <a:r>
-              <a:rPr sz="2800">
+              <a:t>•  </a:t>
+            </a:r>
+            <a:r>
+              <a:rPr sz="2800" b="0" i="0">
                 <a:solidFill>
                   <a:srgbClr val="222B22"/>
                 </a:solidFill>
                 <a:latin typeface="Calibri"/>
               </a:rPr>
-              <a:t>Building your Rhythm Card</a:t>
-            </a:r>
-          </a:p>
-          <a:p>
-            <a:pPr>
+              <a:t>Then the room — the same two questions about tonight</a:t>
+            </a:r>
+          </a:p>
+          <a:p>
+            <a:pPr marL="274320" indent="-274320">
               <a:spcAft>
-                <a:spcPts val="500"/>
+                <a:spcPts val="900"/>
               </a:spcAft>
             </a:pPr>
             <a:r>
-              <a:rPr sz="2800" b="1">
+              <a:rPr sz="2800" b="1" i="0">
                 <a:solidFill>
                   <a:srgbClr val="97BC62"/>
                 </a:solidFill>
                 <a:latin typeface="Calibri"/>
               </a:rPr>
-              <a:t>6   </a:t>
-            </a:r>
-            <a:r>
-              <a:rPr sz="2800">
+              <a:t>•  </a:t>
+            </a:r>
+            <a:r>
+              <a:rPr sz="2800" b="0" i="0">
                 <a:solidFill>
                   <a:srgbClr val="222B22"/>
                 </a:solidFill>
                 <a:latin typeface="Calibri"/>
               </a:rPr>
-              <a:t>The Four Questions</a:t>
-            </a:r>
-          </a:p>
-          <a:p>
-            <a:pPr>
-              <a:spcAft>
-                <a:spcPts val="500"/>
-              </a:spcAft>
-            </a:pPr>
-            <a:r>
-              <a:rPr sz="2800" b="1">
-                <a:solidFill>
-                  <a:srgbClr val="97BC62"/>
-                </a:solidFill>
-                <a:latin typeface="Calibri"/>
-              </a:rPr>
-              <a:t>7   </a:t>
-            </a:r>
-            <a:r>
-              <a:rPr sz="2800">
-                <a:solidFill>
-                  <a:srgbClr val="222B22"/>
-                </a:solidFill>
-                <a:latin typeface="Calibri"/>
-              </a:rPr>
-              <a:t>The Leader Feedback Round — both leaders</a:t>
-            </a:r>
-          </a:p>
-          <a:p>
-            <a:pPr>
-              <a:spcAft>
-                <a:spcPts val="500"/>
-              </a:spcAft>
-            </a:pPr>
-            <a:r>
-              <a:rPr sz="2800" b="1">
-                <a:solidFill>
-                  <a:srgbClr val="97BC62"/>
-                </a:solidFill>
-                <a:latin typeface="Calibri"/>
-              </a:rPr>
-              <a:t>8   </a:t>
-            </a:r>
-            <a:r>
-              <a:rPr sz="2800">
-                <a:solidFill>
-                  <a:srgbClr val="222B22"/>
-                </a:solidFill>
-                <a:latin typeface="Calibri"/>
-              </a:rPr>
-              <a:t>Between-week practice — the Rhythm Card begins; the Four Questions go home</a:t>
-            </a:r>
-          </a:p>
-          <a:p>
-            <a:pPr>
-              <a:spcAft>
-                <a:spcPts val="500"/>
-              </a:spcAft>
-            </a:pPr>
-            <a:r>
-              <a:rPr sz="2800" b="1">
-                <a:solidFill>
-                  <a:srgbClr val="97BC62"/>
-                </a:solidFill>
-                <a:latin typeface="Calibri"/>
-              </a:rPr>
-              <a:t>9   </a:t>
-            </a:r>
-            <a:r>
-              <a:rPr sz="2800">
-                <a:solidFill>
-                  <a:srgbClr val="222B22"/>
-                </a:solidFill>
-                <a:latin typeface="Calibri"/>
-              </a:rPr>
-              <a:t>Closing container + Aaronic blessing</a:t>
+              <a:t>The leaders receive without defending — “thank you” is the whole response</a:t>
             </a:r>
           </a:p>
         </p:txBody>
@@ -5325,7 +5510,7 @@
           <a:p>
             <a:pPr algn="r"/>
             <a:r>
-              <a:t>186</a:t>
+              <a:t>194</a:t>
             </a:r>
             <a:endParaRPr sz="1000" b="1">
               <a:solidFill>
@@ -5338,7 +5523,7 @@
       </p:sp>
       <p:pic>
         <p:nvPicPr>
-          <p:cNvPr id="31" name="Picture 31" descr="the open container bowl"/>
+          <p:cNvPr id="33" name="Picture 33" descr="compass on the trail - the weekly bearing check"/>
           <p:cNvPicPr>
             <a:picLocks noChangeAspect="1"/>
           </p:cNvPicPr>
@@ -5352,8 +5537,8 @@
         </p:blipFill>
         <p:spPr>
           <a:xfrm>
-            <a:off x="8001000" y="1554480"/>
-            <a:ext cx="3017520" cy="4526280"/>
+            <a:off x="8106160" y="1463040"/>
+            <a:ext cx="3259831" cy="4892040"/>
           </a:xfrm>
           <a:prstGeom prst="rect">
             <a:avLst/>
@@ -5380,7 +5565,7 @@
 </p:sld>
 </file>
 
-<file path=ppt/slides/slide187.xml><?xml version="1.0" encoding="utf-8"?>
+<file path=ppt/slides/slide12.xml><?xml version="1.0" encoding="utf-8"?>
 <p:sld xmlns:a="http://schemas.openxmlformats.org/drawingml/2006/main" xmlns:r="http://schemas.openxmlformats.org/officeDocument/2006/relationships" xmlns:p="http://schemas.openxmlformats.org/presentationml/2006/main">
   <p:cSld>
     <p:spTree>
@@ -5460,7 +5645,7 @@
                 </a:solidFill>
                 <a:latin typeface="Cambria"/>
               </a:rPr>
-              <a:t>Opening Container — the Eight Steps</a:t>
+              <a:t>Closing the Container + Aaronic Blessing</a:t>
             </a:r>
           </a:p>
         </p:txBody>
@@ -5473,8 +5658,8 @@
         </p:nvSpPr>
         <p:spPr>
           <a:xfrm>
-            <a:off x="822960" y="1554480"/>
-            <a:ext cx="10515600" cy="4892040"/>
+            <a:off x="822960" y="1600200"/>
+            <a:ext cx="5669280" cy="4572000"/>
           </a:xfrm>
           <a:prstGeom prst="rect">
             <a:avLst/>
@@ -5485,203 +5670,265 @@
           <a:bodyPr wrap="square" lIns="91440" tIns="91440" rIns="91440" bIns="91440"/>
           <a:lstStyle/>
           <a:p>
-            <a:pPr marL="342900" indent="-342900">
+            <a:pPr marL="274320" indent="-274320">
               <a:spcAft>
-                <a:spcPts val="650"/>
+                <a:spcPts val="900"/>
               </a:spcAft>
             </a:pPr>
             <a:r>
-              <a:rPr sz="2400" b="1" i="0">
+              <a:rPr sz="2200" b="1" i="0">
                 <a:solidFill>
                   <a:srgbClr val="97BC62"/>
                 </a:solidFill>
                 <a:latin typeface="Calibri"/>
               </a:rPr>
-              <a:t>1   </a:t>
-            </a:r>
-            <a:r>
-              <a:rPr sz="2400" b="0" i="0">
+              <a:t>•  </a:t>
+            </a:r>
+            <a:r>
+              <a:rPr sz="2200" b="0" i="0">
                 <a:solidFill>
                   <a:srgbClr val="222B22"/>
                 </a:solidFill>
                 <a:latin typeface="Calibri"/>
               </a:rPr>
-              <a:t>Welcome — five minutes to open the container</a:t>
-            </a:r>
-          </a:p>
-          <a:p>
-            <a:pPr marL="342900" indent="-342900">
+              <a:t>We close the way we opened — the container, six steps:</a:t>
+            </a:r>
+          </a:p>
+          <a:p>
+            <a:pPr marL="685800" indent="-274320">
               <a:spcAft>
-                <a:spcPts val="650"/>
+                <a:spcPts val="700"/>
               </a:spcAft>
             </a:pPr>
             <a:r>
-              <a:rPr sz="2400" b="1" i="0">
+              <a:rPr sz="2000" b="1" i="0">
                 <a:solidFill>
                   <a:srgbClr val="97BC62"/>
                 </a:solidFill>
                 <a:latin typeface="Calibri"/>
               </a:rPr>
-              <a:t>2   </a:t>
-            </a:r>
-            <a:r>
-              <a:rPr sz="2400" b="0" i="0">
+              <a:t>1   </a:t>
+            </a:r>
+            <a:r>
+              <a:rPr sz="2000" b="0" i="0">
                 <a:solidFill>
                   <a:srgbClr val="222B22"/>
                 </a:solidFill>
                 <a:latin typeface="Calibri"/>
               </a:rPr>
-              <a:t>Phones silenced and put away</a:t>
-            </a:r>
-          </a:p>
-          <a:p>
-            <a:pPr marL="342900" indent="-342900">
+              <a:t>Stand again — same circle, same posture as the open</a:t>
+            </a:r>
+          </a:p>
+          <a:p>
+            <a:pPr marL="685800" indent="-274320">
               <a:spcAft>
-                <a:spcPts val="650"/>
+                <a:spcPts val="700"/>
               </a:spcAft>
             </a:pPr>
             <a:r>
-              <a:rPr sz="2400" b="1" i="0">
+              <a:rPr sz="2000" b="1" i="0">
                 <a:solidFill>
                   <a:srgbClr val="97BC62"/>
                 </a:solidFill>
                 <a:latin typeface="Calibri"/>
               </a:rPr>
-              <a:t>3   </a:t>
-            </a:r>
-            <a:r>
-              <a:rPr sz="2400" b="0" i="0">
+              <a:t>2   </a:t>
+            </a:r>
+            <a:r>
+              <a:rPr sz="2000" b="0" i="0">
                 <a:solidFill>
                   <a:srgbClr val="222B22"/>
                 </a:solidFill>
                 <a:latin typeface="Calibri"/>
               </a:rPr>
-              <a:t>Stand in a circle</a:t>
-            </a:r>
-          </a:p>
-          <a:p>
-            <a:pPr marL="342900" indent="-342900">
+              <a:t>One-word landing — compare it to your opening word</a:t>
+            </a:r>
+          </a:p>
+          <a:p>
+            <a:pPr marL="685800" indent="-274320">
               <a:spcAft>
-                <a:spcPts val="650"/>
+                <a:spcPts val="700"/>
               </a:spcAft>
             </a:pPr>
             <a:r>
-              <a:rPr sz="2400" b="1" i="0">
+              <a:rPr sz="2000" b="1" i="0">
                 <a:solidFill>
                   <a:srgbClr val="97BC62"/>
                 </a:solidFill>
                 <a:latin typeface="Calibri"/>
               </a:rPr>
-              <a:t>4   </a:t>
-            </a:r>
-            <a:r>
-              <a:rPr sz="2400" b="0" i="0">
+              <a:t>3   </a:t>
+            </a:r>
+            <a:r>
+              <a:rPr sz="2000" b="0" i="0">
                 <a:solidFill>
                   <a:srgbClr val="222B22"/>
                 </a:solidFill>
                 <a:latin typeface="Calibri"/>
               </a:rPr>
-              <a:t>One-word check-in — how you actually are, right now</a:t>
-            </a:r>
-          </a:p>
-          <a:p>
-            <a:pPr marL="342900" indent="-342900">
+              <a:t>The one thing you are taking from tonight</a:t>
+            </a:r>
+          </a:p>
+          <a:p>
+            <a:pPr marL="685800" indent="-274320">
               <a:spcAft>
-                <a:spcPts val="650"/>
+                <a:spcPts val="700"/>
               </a:spcAft>
             </a:pPr>
             <a:r>
-              <a:rPr sz="2400" b="1" i="0">
+              <a:rPr sz="2000" b="1" i="0">
                 <a:solidFill>
                   <a:srgbClr val="97BC62"/>
                 </a:solidFill>
                 <a:latin typeface="Calibri"/>
               </a:rPr>
-              <a:t>5   </a:t>
-            </a:r>
-            <a:r>
-              <a:rPr sz="2400" b="0" i="0">
+              <a:t>4   </a:t>
+            </a:r>
+            <a:r>
+              <a:rPr sz="2000" b="0" i="0">
                 <a:solidFill>
                   <a:srgbClr val="222B22"/>
                 </a:solidFill>
                 <a:latin typeface="Calibri"/>
               </a:rPr>
-              <a:t>Put out / bring in — set something down; bring a blessing in</a:t>
-            </a:r>
-          </a:p>
-          <a:p>
-            <a:pPr marL="342900" indent="-342900">
+              <a:t>The one practice — committed aloud, or modified to one you will actually keep</a:t>
+            </a:r>
+          </a:p>
+          <a:p>
+            <a:pPr marL="685800" indent="-274320">
               <a:spcAft>
-                <a:spcPts val="650"/>
+                <a:spcPts val="700"/>
               </a:spcAft>
             </a:pPr>
             <a:r>
-              <a:rPr sz="2400" b="1" i="0">
+              <a:rPr sz="2000" b="1" i="0">
                 <a:solidFill>
                   <a:srgbClr val="97BC62"/>
                 </a:solidFill>
                 <a:latin typeface="Calibri"/>
               </a:rPr>
-              <a:t>6   </a:t>
-            </a:r>
-            <a:r>
-              <a:rPr sz="2400" b="0" i="0">
+              <a:t>5   </a:t>
+            </a:r>
+            <a:r>
+              <a:rPr sz="2000" b="0" i="0">
                 <a:solidFill>
                   <a:srgbClr val="222B22"/>
                 </a:solidFill>
                 <a:latin typeface="Calibri"/>
               </a:rPr>
-              <a:t>Spoken commitment: “I am here. I am paying attention. I am willing to be moved.”</a:t>
-            </a:r>
-          </a:p>
-          <a:p>
-            <a:pPr marL="342900" indent="-342900">
+              <a:t>Blessings — specific, witnessed, short</a:t>
+            </a:r>
+          </a:p>
+          <a:p>
+            <a:pPr marL="685800" indent="-274320">
               <a:spcAft>
-                <a:spcPts val="650"/>
+                <a:spcPts val="700"/>
               </a:spcAft>
             </a:pPr>
             <a:r>
-              <a:rPr sz="2400" b="1" i="0">
+              <a:rPr sz="2000" b="1" i="0">
                 <a:solidFill>
                   <a:srgbClr val="97BC62"/>
                 </a:solidFill>
                 <a:latin typeface="Calibri"/>
               </a:rPr>
-              <a:t>7   </a:t>
-            </a:r>
-            <a:r>
-              <a:rPr sz="2400" b="0" i="0">
+              <a:t>6   </a:t>
+            </a:r>
+            <a:r>
+              <a:rPr sz="2000" b="0" i="0">
                 <a:solidFill>
                   <a:srgbClr val="222B22"/>
                 </a:solidFill>
                 <a:latin typeface="Calibri"/>
               </a:rPr>
-              <a:t>Opening prayer — “Holy Spirit, you are welcome here. Speak. We are listening.”</a:t>
-            </a:r>
-          </a:p>
-          <a:p>
-            <a:pPr marL="342900" indent="-342900">
+              <a:t>Closing prayer — and the Aaronic blessing, spoken over each other, face to face</a:t>
+            </a:r>
+          </a:p>
+        </p:txBody>
+      </p:sp>
+      <p:sp>
+        <p:nvSpPr>
+          <p:cNvPr id="6" name="TextBox 6"/>
+          <p:cNvSpPr txBox="1"/>
+          <p:nvPr/>
+        </p:nvSpPr>
+        <p:spPr>
+          <a:xfrm>
+            <a:off x="6766560" y="1737360"/>
+            <a:ext cx="4663440" cy="2926080"/>
+          </a:xfrm>
+          <a:prstGeom prst="rect">
+            <a:avLst/>
+          </a:prstGeom>
+          <a:solidFill>
+            <a:srgbClr val="F1F6EC"/>
+          </a:solidFill>
+        </p:spPr>
+        <p:txBody>
+          <a:bodyPr wrap="square" lIns="91440" tIns="91440" rIns="91440" bIns="91440" anchor="ctr"/>
+          <a:lstStyle/>
+          <a:p>
+            <a:pPr>
               <a:spcAft>
-                <a:spcPts val="650"/>
+                <a:spcPts val="900"/>
               </a:spcAft>
             </a:pPr>
             <a:r>
-              <a:rPr sz="2400" b="1" i="0">
+              <a:rPr sz="1200" b="1" i="0">
                 <a:solidFill>
                   <a:srgbClr val="97BC62"/>
                 </a:solidFill>
                 <a:latin typeface="Calibri"/>
               </a:rPr>
-              <a:t>8   </a:t>
-            </a:r>
-            <a:r>
-              <a:rPr sz="2400" b="0" i="0">
+              <a:t>THE AARONIC BLESSING — NUMBERS 6:24–26</a:t>
+            </a:r>
+          </a:p>
+          <a:p>
+            <a:pPr>
+              <a:spcAft>
+                <a:spcPts val="600"/>
+              </a:spcAft>
+            </a:pPr>
+            <a:r>
+              <a:rPr sz="2400" b="0" i="1">
                 <a:solidFill>
                   <a:srgbClr val="222B22"/>
                 </a:solidFill>
-                <a:latin typeface="Calibri"/>
-              </a:rPr>
-              <a:t>Sit. Begin.</a:t>
+                <a:latin typeface="Cambria"/>
+              </a:rPr>
+              <a:t>“The Lord bless you and keep you;</a:t>
+            </a:r>
+          </a:p>
+          <a:p>
+            <a:pPr>
+              <a:spcAft>
+                <a:spcPts val="600"/>
+              </a:spcAft>
+            </a:pPr>
+            <a:r>
+              <a:rPr sz="2400" b="0" i="1">
+                <a:solidFill>
+                  <a:srgbClr val="222B22"/>
+                </a:solidFill>
+                <a:latin typeface="Cambria"/>
+              </a:rPr>
+              <a:t>the Lord make his face to shine upon you, and be gracious to you;</a:t>
+            </a:r>
+          </a:p>
+          <a:p>
+            <a:pPr>
+              <a:spcAft>
+                <a:spcPts val="600"/>
+              </a:spcAft>
+            </a:pPr>
+            <a:r>
+              <a:rPr sz="2400" b="0" i="1">
+                <a:solidFill>
+                  <a:srgbClr val="222B22"/>
+                </a:solidFill>
+                <a:latin typeface="Cambria"/>
+              </a:rPr>
+              <a:t>the Lord lift up his countenance upon you, and give you peace.”</a:t>
             </a:r>
           </a:p>
         </p:txBody>
@@ -5708,7 +5955,7 @@
           <a:p>
             <a:pPr algn="r"/>
             <a:r>
-              <a:t>187</a:t>
+              <a:t>195</a:t>
             </a:r>
             <a:endParaRPr sz="1000" b="1">
               <a:solidFill>
@@ -5727,7 +5974,7 @@
 </p:sld>
 </file>
 
-<file path=ppt/slides/slide188.xml><?xml version="1.0" encoding="utf-8"?>
+<file path=ppt/slides/slide13.xml><?xml version="1.0" encoding="utf-8"?>
 <p:sld xmlns:a="http://schemas.openxmlformats.org/drawingml/2006/main" xmlns:r="http://schemas.openxmlformats.org/officeDocument/2006/relationships" xmlns:p="http://schemas.openxmlformats.org/presentationml/2006/main">
   <p:cSld>
     <p:spTree>
@@ -5807,7 +6054,7 @@
                 </a:solidFill>
                 <a:latin typeface="Cambria"/>
               </a:rPr>
-              <a:t>Week 13 Completion — Finishing the Mission Week</a:t>
+              <a:t>Homework — Two Weeks, Four Parts — This Week and Across the Break</a:t>
             </a:r>
           </a:p>
         </p:txBody>
@@ -5821,7 +6068,7 @@
         <p:spPr>
           <a:xfrm>
             <a:off x="822960" y="1554480"/>
-            <a:ext cx="10515600" cy="4892040"/>
+            <a:ext cx="6675120" cy="4892040"/>
           </a:xfrm>
           <a:prstGeom prst="rect">
             <a:avLst/>
@@ -5838,7 +6085,7 @@
               </a:spcAft>
             </a:pPr>
             <a:r>
-              <a:rPr sz="2800" b="1" i="0">
+              <a:rPr sz="2200" b="1" i="0">
                 <a:solidFill>
                   <a:srgbClr val="97BC62"/>
                 </a:solidFill>
@@ -5847,13 +6094,13 @@
               <a:t>•  </a:t>
             </a:r>
             <a:r>
-              <a:rPr sz="2800" b="0" i="0">
+              <a:rPr sz="2200" b="0" i="0">
                 <a:solidFill>
                   <a:srgbClr val="222B22"/>
                 </a:solidFill>
                 <a:latin typeface="Calibri"/>
               </a:rPr>
-              <a:t>“Before we walk forward, we finish the Mission week” — unfinished downhill answers finish here</a:t>
+              <a:t>The Four Questions (for the willing) — the parent asks their teen at home; married parents also ask their spouse, separately. “Not yet” is a full answer for everyone</a:t>
             </a:r>
           </a:p>
           <a:p>
@@ -5863,7 +6110,7 @@
               </a:spcAft>
             </a:pPr>
             <a:r>
-              <a:rPr sz="2800" b="1" i="0">
+              <a:rPr sz="2200" b="1" i="0">
                 <a:solidFill>
                   <a:srgbClr val="97BC62"/>
                 </a:solidFill>
@@ -5872,13 +6119,13 @@
               <a:t>•  </a:t>
             </a:r>
             <a:r>
-              <a:rPr sz="2800" b="0" i="0">
+              <a:rPr sz="2200" b="0" i="0">
                 <a:solidFill>
                   <a:srgbClr val="222B22"/>
                 </a:solidFill>
                 <a:latin typeface="Calibri"/>
               </a:rPr>
-              <a:t>Two weeks of living with the question usually deepens it — one sentence, now, to the room</a:t>
+              <a:t>Run the Rhythm Card as built — for real, at the times and places written on it; the break is its first field test</a:t>
             </a:r>
           </a:p>
           <a:p>
@@ -5888,7 +6135,7 @@
               </a:spcAft>
             </a:pPr>
             <a:r>
-              <a:rPr sz="2800" b="1" i="0">
+              <a:rPr sz="2200" b="1" i="0">
                 <a:solidFill>
                   <a:srgbClr val="97BC62"/>
                 </a:solidFill>
@@ -5897,13 +6144,13 @@
               <a:t>•  </a:t>
             </a:r>
             <a:r>
-              <a:rPr sz="2800" b="0" i="0">
+              <a:rPr sz="2200" b="0" i="0">
                 <a:solidFill>
                   <a:srgbClr val="222B22"/>
                 </a:solidFill>
                 <a:latin typeface="Calibri"/>
               </a:rPr>
-              <a:t>A parent opens the round; teens choose their own depth after — pass-anytime holds</a:t>
+              <a:t>Journal the holds and the slips — one line a day; no fixing, no guilt-engine. The slips are data, not verdicts</a:t>
             </a:r>
           </a:p>
           <a:p>
@@ -5913,7 +6160,7 @@
               </a:spcAft>
             </a:pPr>
             <a:r>
-              <a:rPr sz="2800" b="1" i="0">
+              <a:rPr sz="2200" b="1" i="0">
                 <a:solidFill>
                   <a:srgbClr val="97BC62"/>
                 </a:solidFill>
@@ -5922,13 +6169,13 @@
               <a:t>•  </a:t>
             </a:r>
             <a:r>
-              <a:rPr sz="2800" b="0" i="0">
+              <a:rPr sz="2200" b="0" i="0">
                 <a:solidFill>
                   <a:srgbClr val="222B22"/>
                 </a:solidFill>
                 <a:latin typeface="Calibri"/>
               </a:rPr>
-              <a:t>The answers carry forward to the Week 21 commissioning</a:t>
+              <a:t>The returning rule — miss a day: begin again on the next available day. Do not start over; do not double up. Returning is the goal</a:t>
             </a:r>
           </a:p>
           <a:p>
@@ -5938,7 +6185,7 @@
               </a:spcAft>
             </a:pPr>
             <a:r>
-              <a:rPr sz="2800" b="1" i="0">
+              <a:rPr sz="2200" b="1" i="0">
                 <a:solidFill>
                   <a:srgbClr val="97BC62"/>
                 </a:solidFill>
@@ -5947,13 +6194,13 @@
               <a:t>•  </a:t>
             </a:r>
             <a:r>
-              <a:rPr sz="2800" b="0" i="0">
+              <a:rPr sz="2200" b="0" i="0">
                 <a:solidFill>
                   <a:srgbClr val="222B22"/>
                 </a:solidFill>
                 <a:latin typeface="Calibri"/>
               </a:rPr>
-              <a:t>Practice check: one small action aligned with your downhill mission — ninety seconds, one sentence on what happened</a:t>
+              <a:t>The morning question and evening note continue inside the rhythm — the practices have stopped being assignments and become a life</a:t>
             </a:r>
           </a:p>
         </p:txBody>
@@ -5980,7 +6227,7 @@
           <a:p>
             <a:pPr algn="r"/>
             <a:r>
-              <a:t>188</a:t>
+              <a:t>196</a:t>
             </a:r>
             <a:endParaRPr sz="1000" b="1">
               <a:solidFill>
@@ -5991,6 +6238,42 @@
           </a:p>
         </p:txBody>
       </p:sp>
+      <p:pic>
+        <p:nvPicPr>
+          <p:cNvPr id="33" name="Picture 33" descr="seedling - what grows between Wednesdays"/>
+          <p:cNvPicPr>
+            <a:picLocks noChangeAspect="1"/>
+          </p:cNvPicPr>
+          <p:nvPr/>
+        </p:nvPicPr>
+        <p:blipFill>
+          <a:blip r:embed="rId3"/>
+          <a:stretch>
+            <a:fillRect/>
+          </a:stretch>
+        </p:blipFill>
+        <p:spPr>
+          <a:xfrm>
+            <a:off x="8103612" y="1463040"/>
+            <a:ext cx="3262379" cy="4892040"/>
+          </a:xfrm>
+          <a:prstGeom prst="rect">
+            <a:avLst/>
+          </a:prstGeom>
+          <a:ln w="76200">
+            <a:solidFill>
+              <a:srgbClr val="FFFFFF"/>
+            </a:solidFill>
+          </a:ln>
+          <a:effectLst>
+            <a:outerShdw blurRad="63500" dist="25400" dir="5400000" rotWithShape="0">
+              <a:srgbClr val="000000">
+                <a:alpha val="35000"/>
+              </a:srgbClr>
+            </a:outerShdw>
+          </a:effectLst>
+        </p:spPr>
+      </p:pic>
     </p:spTree>
   </p:cSld>
   <p:clrMapOvr>
@@ -5999,7 +6282,596 @@
 </p:sld>
 </file>
 
-<file path=ppt/slides/slide189.xml><?xml version="1.0" encoding="utf-8"?>
+<file path=ppt/slides/slide15.xml><?xml version="1.0" encoding="utf-8"?>
+<p:sld xmlns:a="http://schemas.openxmlformats.org/drawingml/2006/main" xmlns:p="http://schemas.openxmlformats.org/presentationml/2006/main" xmlns:r="http://schemas.openxmlformats.org/officeDocument/2006/relationships">
+  <p:cSld>
+    <p:spTree>
+      <p:nvGrpSpPr>
+        <p:cNvPr id="1" name=""/>
+        <p:cNvGrpSpPr/>
+        <p:nvPr/>
+      </p:nvGrpSpPr>
+      <p:grpSpPr/>
+      <p:sp>
+        <p:nvSpPr>
+          <p:cNvPr id="2" name="Rectangle 1"/>
+          <p:cNvSpPr/>
+          <p:nvPr/>
+        </p:nvSpPr>
+        <p:spPr>
+          <a:xfrm>
+            <a:off x="0" y="0"/>
+            <a:ext cx="12192000" cy="6858000"/>
+          </a:xfrm>
+          <a:prstGeom prst="rect">
+            <a:avLst/>
+          </a:prstGeom>
+          <a:solidFill>
+            <a:srgbClr val="FFFFFF"/>
+          </a:solidFill>
+          <a:ln>
+            <a:noFill/>
+          </a:ln>
+          <a:effectLst/>
+        </p:spPr>
+        <p:style>
+          <a:lnRef idx="1">
+            <a:schemeClr val="accent1"/>
+          </a:lnRef>
+          <a:fillRef idx="3">
+            <a:schemeClr val="accent1"/>
+          </a:fillRef>
+          <a:effectRef idx="2">
+            <a:schemeClr val="accent1"/>
+          </a:effectRef>
+          <a:fontRef idx="minor">
+            <a:schemeClr val="lt1"/>
+          </a:fontRef>
+        </p:style>
+        <p:txBody>
+          <a:bodyPr rtlCol="0" anchor="ctr"/>
+          <a:lstStyle/>
+          <a:p>
+            <a:pPr algn="ctr"/>
+          </a:p>
+        </p:txBody>
+      </p:sp>
+      <p:sp>
+        <p:nvSpPr>
+          <p:cNvPr id="3" name="TextBox 2"/>
+          <p:cNvSpPr txBox="1"/>
+          <p:nvPr/>
+        </p:nvSpPr>
+        <p:spPr>
+          <a:xfrm>
+            <a:off x="822960" y="502920"/>
+            <a:ext cx="10515600" cy="822960"/>
+          </a:xfrm>
+          <a:prstGeom prst="rect">
+            <a:avLst/>
+          </a:prstGeom>
+          <a:noFill/>
+        </p:spPr>
+        <p:txBody>
+          <a:bodyPr wrap="square">
+            <a:spAutoFit/>
+          </a:bodyPr>
+          <a:lstStyle/>
+          <a:p>
+            <a:r>
+              <a:rPr sz="2800" b="1">
+                <a:solidFill>
+                  <a:srgbClr val="2C5F2D"/>
+                </a:solidFill>
+                <a:latin typeface="Cambria"/>
+              </a:rPr>
+              <a:t>Where We Are — the Four Connects</a:t>
+            </a:r>
+          </a:p>
+        </p:txBody>
+      </p:sp>
+      <p:pic>
+        <p:nvPicPr>
+          <p:cNvPr id="4" name="Picture 3" descr="four-connects.png"/>
+          <p:cNvPicPr>
+            <a:picLocks noChangeAspect="1"/>
+          </p:cNvPicPr>
+          <p:nvPr/>
+        </p:nvPicPr>
+        <p:blipFill>
+          <a:blip r:embed="rId2"/>
+          <a:stretch>
+            <a:fillRect/>
+          </a:stretch>
+        </p:blipFill>
+        <p:spPr>
+          <a:xfrm>
+            <a:off x="932688" y="1645920"/>
+            <a:ext cx="10332720" cy="3708663"/>
+          </a:xfrm>
+          <a:prstGeom prst="rect">
+            <a:avLst/>
+          </a:prstGeom>
+        </p:spPr>
+      </p:pic>
+      <p:sp>
+        <p:nvSpPr>
+          <p:cNvPr id="5" name="TextBox 4"/>
+          <p:cNvSpPr txBox="1"/>
+          <p:nvPr/>
+        </p:nvSpPr>
+        <p:spPr>
+          <a:xfrm>
+            <a:off x="822960" y="5623560"/>
+            <a:ext cx="10515600" cy="914400"/>
+          </a:xfrm>
+          <a:prstGeom prst="rect">
+            <a:avLst/>
+          </a:prstGeom>
+          <a:noFill/>
+        </p:spPr>
+        <p:txBody>
+          <a:bodyPr wrap="square">
+            <a:spAutoFit/>
+          </a:bodyPr>
+          <a:lstStyle/>
+          <a:p>
+            <a:r>
+              <a:rPr sz="1800" b="0">
+                <a:solidFill>
+                  <a:srgbClr val="222B22"/>
+                </a:solidFill>
+                <a:latin typeface="Calibri"/>
+              </a:rPr>
+              <a:t>Session 15 gathers the whole map into a rhythm — </a:t>
+            </a:r>
+            <a:r>
+              <a:rPr sz="1800" b="1">
+                <a:solidFill>
+                  <a:srgbClr val="2C5F2D"/>
+                </a:solidFill>
+                <a:latin typeface="Calibri"/>
+              </a:rPr>
+              <a:t>all four Connects</a:t>
+            </a:r>
+            <a:r>
+              <a:rPr sz="1800" b="0">
+                <a:solidFill>
+                  <a:srgbClr val="222B22"/>
+                </a:solidFill>
+                <a:latin typeface="Calibri"/>
+              </a:rPr>
+              <a:t>, sustained. Each connection makes the next one real (Matt. 22:37–40).</a:t>
+            </a:r>
+          </a:p>
+        </p:txBody>
+      </p:sp>
+      <p:sp>
+        <p:nvSpPr>
+          <p:cNvPr id="90" name="SlideNum"/>
+          <p:cNvSpPr txBox="1"/>
+          <p:nvPr/>
+        </p:nvSpPr>
+        <p:spPr>
+          <a:xfrm>
+            <a:off x="11384280" y="6446520"/>
+            <a:ext cx="640080" cy="292608"/>
+          </a:xfrm>
+          <a:prstGeom prst="rect">
+            <a:avLst/>
+          </a:prstGeom>
+          <a:noFill/>
+        </p:spPr>
+        <p:txBody>
+          <a:bodyPr wrap="none" lIns="0" tIns="0" rIns="45720" bIns="0" anchor="ctr"/>
+          <a:lstStyle/>
+          <a:p>
+            <a:pPr algn="r"/>
+            <a:r>
+              <a:t>185a</a:t>
+            </a:r>
+            <a:endParaRPr sz="1000" b="1">
+              <a:solidFill>
+                <a:srgbClr val="7A8A6E"/>
+              </a:solidFill>
+              <a:latin typeface="Calibri"/>
+            </a:endParaRPr>
+          </a:p>
+        </p:txBody>
+      </p:sp>
+    </p:spTree>
+  </p:cSld>
+  <p:clrMapOvr>
+    <a:masterClrMapping/>
+  </p:clrMapOvr>
+</p:sld>
+</file>
+
+<file path=ppt/slides/slide16.xml><?xml version="1.0" encoding="utf-8"?>
+<p:sld xmlns:a="http://schemas.openxmlformats.org/drawingml/2006/main" xmlns:p="http://schemas.openxmlformats.org/presentationml/2006/main" xmlns:r="http://schemas.openxmlformats.org/officeDocument/2006/relationships">
+  <p:cSld>
+    <p:spTree>
+      <p:nvGrpSpPr>
+        <p:cNvPr id="1" name=""/>
+        <p:cNvGrpSpPr/>
+        <p:nvPr/>
+      </p:nvGrpSpPr>
+      <p:grpSpPr/>
+      <p:sp>
+        <p:nvSpPr>
+          <p:cNvPr id="2" name="Rectangle 1"/>
+          <p:cNvSpPr/>
+          <p:nvPr/>
+        </p:nvSpPr>
+        <p:spPr>
+          <a:xfrm>
+            <a:off x="0" y="0"/>
+            <a:ext cx="12192000" cy="6858000"/>
+          </a:xfrm>
+          <a:prstGeom prst="rect">
+            <a:avLst/>
+          </a:prstGeom>
+          <a:solidFill>
+            <a:srgbClr val="FFFFFF"/>
+          </a:solidFill>
+          <a:ln>
+            <a:noFill/>
+          </a:ln>
+          <a:effectLst/>
+        </p:spPr>
+        <p:style>
+          <a:lnRef idx="1">
+            <a:schemeClr val="accent1"/>
+          </a:lnRef>
+          <a:fillRef idx="3">
+            <a:schemeClr val="accent1"/>
+          </a:fillRef>
+          <a:effectRef idx="2">
+            <a:schemeClr val="accent1"/>
+          </a:effectRef>
+          <a:fontRef idx="minor">
+            <a:schemeClr val="lt1"/>
+          </a:fontRef>
+        </p:style>
+        <p:txBody>
+          <a:bodyPr rtlCol="0" anchor="ctr"/>
+          <a:lstStyle/>
+          <a:p>
+            <a:pPr algn="ctr"/>
+          </a:p>
+        </p:txBody>
+      </p:sp>
+      <p:sp>
+        <p:nvSpPr>
+          <p:cNvPr id="3" name="TextBox 2"/>
+          <p:cNvSpPr txBox="1"/>
+          <p:nvPr/>
+        </p:nvSpPr>
+        <p:spPr>
+          <a:xfrm>
+            <a:off x="822960" y="502920"/>
+            <a:ext cx="10515600" cy="822960"/>
+          </a:xfrm>
+          <a:prstGeom prst="rect">
+            <a:avLst/>
+          </a:prstGeom>
+          <a:noFill/>
+        </p:spPr>
+        <p:txBody>
+          <a:bodyPr wrap="square">
+            <a:spAutoFit/>
+          </a:bodyPr>
+          <a:lstStyle/>
+          <a:p>
+            <a:r>
+              <a:rPr sz="2800" b="1">
+                <a:solidFill>
+                  <a:srgbClr val="2C5F2D"/>
+                </a:solidFill>
+                <a:latin typeface="Cambria"/>
+              </a:rPr>
+              <a:t>The Take-Home Sheet — the Daily Rhythm</a:t>
+            </a:r>
+          </a:p>
+        </p:txBody>
+      </p:sp>
+      <p:pic>
+        <p:nvPicPr>
+          <p:cNvPr id="4" name="Picture 3" descr="s15_part1.png"/>
+          <p:cNvPicPr>
+            <a:picLocks noChangeAspect="1"/>
+          </p:cNvPicPr>
+          <p:nvPr/>
+        </p:nvPicPr>
+        <p:blipFill>
+          <a:blip r:embed="rId2"/>
+          <a:stretch>
+            <a:fillRect/>
+          </a:stretch>
+        </p:blipFill>
+        <p:spPr>
+          <a:xfrm>
+            <a:off x="1798167" y="1463040"/>
+            <a:ext cx="8595360" cy="4457308"/>
+          </a:xfrm>
+          <a:prstGeom prst="rect">
+            <a:avLst/>
+          </a:prstGeom>
+          <a:ln w="12700">
+            <a:solidFill>
+              <a:srgbClr val="C8C8C8"/>
+            </a:solidFill>
+          </a:ln>
+        </p:spPr>
+      </p:pic>
+      <p:sp>
+        <p:nvSpPr>
+          <p:cNvPr id="5" name="TextBox 4"/>
+          <p:cNvSpPr txBox="1"/>
+          <p:nvPr/>
+        </p:nvSpPr>
+        <p:spPr>
+          <a:xfrm>
+            <a:off x="822960" y="6355080"/>
+            <a:ext cx="10515600" cy="411480"/>
+          </a:xfrm>
+          <a:prstGeom prst="rect">
+            <a:avLst/>
+          </a:prstGeom>
+          <a:noFill/>
+        </p:spPr>
+        <p:txBody>
+          <a:bodyPr wrap="square">
+            <a:spAutoFit/>
+          </a:bodyPr>
+          <a:lstStyle/>
+          <a:p>
+            <a:r>
+              <a:rPr sz="1400" i="1">
+                <a:solidFill>
+                  <a:srgbClr val="595959"/>
+                </a:solidFill>
+                <a:latin typeface="Calibri"/>
+              </a:rPr>
+              <a:t>Handed out now — this is the sheet in your hands.</a:t>
+            </a:r>
+          </a:p>
+        </p:txBody>
+      </p:sp>
+      <p:sp>
+        <p:nvSpPr>
+          <p:cNvPr id="90" name="SlideNum"/>
+          <p:cNvSpPr txBox="1"/>
+          <p:nvPr/>
+        </p:nvSpPr>
+        <p:spPr>
+          <a:xfrm>
+            <a:off x="11384280" y="6446520"/>
+            <a:ext cx="640080" cy="292608"/>
+          </a:xfrm>
+          <a:prstGeom prst="rect">
+            <a:avLst/>
+          </a:prstGeom>
+          <a:noFill/>
+        </p:spPr>
+        <p:txBody>
+          <a:bodyPr wrap="none" lIns="0" tIns="0" rIns="45720" bIns="0" anchor="ctr"/>
+          <a:lstStyle/>
+          <a:p>
+            <a:pPr algn="r"/>
+            <a:r>
+              <a:t>197</a:t>
+            </a:r>
+            <a:endParaRPr sz="1000" b="1">
+              <a:solidFill>
+                <a:srgbClr val="7A8A6E"/>
+              </a:solidFill>
+              <a:latin typeface="Calibri"/>
+            </a:endParaRPr>
+          </a:p>
+        </p:txBody>
+      </p:sp>
+    </p:spTree>
+  </p:cSld>
+  <p:clrMapOvr>
+    <a:masterClrMapping/>
+  </p:clrMapOvr>
+</p:sld>
+</file>
+
+<file path=ppt/slides/slide17.xml><?xml version="1.0" encoding="utf-8"?>
+<p:sld xmlns:a="http://schemas.openxmlformats.org/drawingml/2006/main" xmlns:p="http://schemas.openxmlformats.org/presentationml/2006/main" xmlns:r="http://schemas.openxmlformats.org/officeDocument/2006/relationships">
+  <p:cSld>
+    <p:spTree>
+      <p:nvGrpSpPr>
+        <p:cNvPr id="1" name=""/>
+        <p:cNvGrpSpPr/>
+        <p:nvPr/>
+      </p:nvGrpSpPr>
+      <p:grpSpPr/>
+      <p:sp>
+        <p:nvSpPr>
+          <p:cNvPr id="2" name="Rectangle 1"/>
+          <p:cNvSpPr/>
+          <p:nvPr/>
+        </p:nvSpPr>
+        <p:spPr>
+          <a:xfrm>
+            <a:off x="0" y="0"/>
+            <a:ext cx="12192000" cy="6858000"/>
+          </a:xfrm>
+          <a:prstGeom prst="rect">
+            <a:avLst/>
+          </a:prstGeom>
+          <a:solidFill>
+            <a:srgbClr val="FFFFFF"/>
+          </a:solidFill>
+          <a:ln>
+            <a:noFill/>
+          </a:ln>
+          <a:effectLst/>
+        </p:spPr>
+        <p:style>
+          <a:lnRef idx="1">
+            <a:schemeClr val="accent1"/>
+          </a:lnRef>
+          <a:fillRef idx="3">
+            <a:schemeClr val="accent1"/>
+          </a:fillRef>
+          <a:effectRef idx="2">
+            <a:schemeClr val="accent1"/>
+          </a:effectRef>
+          <a:fontRef idx="minor">
+            <a:schemeClr val="lt1"/>
+          </a:fontRef>
+        </p:style>
+        <p:txBody>
+          <a:bodyPr rtlCol="0" anchor="ctr"/>
+          <a:lstStyle/>
+          <a:p>
+            <a:pPr algn="ctr"/>
+          </a:p>
+        </p:txBody>
+      </p:sp>
+      <p:sp>
+        <p:nvSpPr>
+          <p:cNvPr id="3" name="TextBox 2"/>
+          <p:cNvSpPr txBox="1"/>
+          <p:nvPr/>
+        </p:nvSpPr>
+        <p:spPr>
+          <a:xfrm>
+            <a:off x="822960" y="502920"/>
+            <a:ext cx="10515600" cy="822960"/>
+          </a:xfrm>
+          <a:prstGeom prst="rect">
+            <a:avLst/>
+          </a:prstGeom>
+          <a:noFill/>
+        </p:spPr>
+        <p:txBody>
+          <a:bodyPr wrap="square">
+            <a:spAutoFit/>
+          </a:bodyPr>
+          <a:lstStyle/>
+          <a:p>
+            <a:r>
+              <a:rPr sz="2800" b="1">
+                <a:solidFill>
+                  <a:srgbClr val="2C5F2D"/>
+                </a:solidFill>
+                <a:latin typeface="Cambria"/>
+              </a:rPr>
+              <a:t>The Take-Home Sheet — the Four Parts</a:t>
+            </a:r>
+          </a:p>
+        </p:txBody>
+      </p:sp>
+      <p:pic>
+        <p:nvPicPr>
+          <p:cNvPr id="4" name="Picture 3" descr="s15_part2.png"/>
+          <p:cNvPicPr>
+            <a:picLocks noChangeAspect="1"/>
+          </p:cNvPicPr>
+          <p:nvPr/>
+        </p:nvPicPr>
+        <p:blipFill>
+          <a:blip r:embed="rId2"/>
+          <a:stretch>
+            <a:fillRect/>
+          </a:stretch>
+        </p:blipFill>
+        <p:spPr>
+          <a:xfrm>
+            <a:off x="2437232" y="1463040"/>
+            <a:ext cx="7317229" cy="4709160"/>
+          </a:xfrm>
+          <a:prstGeom prst="rect">
+            <a:avLst/>
+          </a:prstGeom>
+          <a:ln w="12700">
+            <a:solidFill>
+              <a:srgbClr val="C8C8C8"/>
+            </a:solidFill>
+          </a:ln>
+        </p:spPr>
+      </p:pic>
+      <p:sp>
+        <p:nvSpPr>
+          <p:cNvPr id="5" name="TextBox 4"/>
+          <p:cNvSpPr txBox="1"/>
+          <p:nvPr/>
+        </p:nvSpPr>
+        <p:spPr>
+          <a:xfrm>
+            <a:off x="822960" y="6355080"/>
+            <a:ext cx="10515600" cy="411480"/>
+          </a:xfrm>
+          <a:prstGeom prst="rect">
+            <a:avLst/>
+          </a:prstGeom>
+          <a:noFill/>
+        </p:spPr>
+        <p:txBody>
+          <a:bodyPr wrap="square">
+            <a:spAutoFit/>
+          </a:bodyPr>
+          <a:lstStyle/>
+          <a:p>
+            <a:r>
+              <a:rPr sz="1400" i="1">
+                <a:solidFill>
+                  <a:srgbClr val="595959"/>
+                </a:solidFill>
+                <a:latin typeface="Calibri"/>
+              </a:rPr>
+              <a:t>One practice at a time — and a partner expecting you at the end of week one.</a:t>
+            </a:r>
+          </a:p>
+        </p:txBody>
+      </p:sp>
+      <p:sp>
+        <p:nvSpPr>
+          <p:cNvPr id="90" name="SlideNum"/>
+          <p:cNvSpPr txBox="1"/>
+          <p:nvPr/>
+        </p:nvSpPr>
+        <p:spPr>
+          <a:xfrm>
+            <a:off x="11384280" y="6446520"/>
+            <a:ext cx="640080" cy="292608"/>
+          </a:xfrm>
+          <a:prstGeom prst="rect">
+            <a:avLst/>
+          </a:prstGeom>
+          <a:noFill/>
+        </p:spPr>
+        <p:txBody>
+          <a:bodyPr wrap="none" lIns="0" tIns="0" rIns="45720" bIns="0" anchor="ctr"/>
+          <a:lstStyle/>
+          <a:p>
+            <a:pPr algn="r"/>
+            <a:r>
+              <a:t>197a</a:t>
+            </a:r>
+            <a:endParaRPr sz="1000" b="1">
+              <a:solidFill>
+                <a:srgbClr val="7A8A6E"/>
+              </a:solidFill>
+              <a:latin typeface="Calibri"/>
+            </a:endParaRPr>
+          </a:p>
+        </p:txBody>
+      </p:sp>
+    </p:spTree>
+  </p:cSld>
+  <p:clrMapOvr>
+    <a:masterClrMapping/>
+  </p:clrMapOvr>
+</p:sld>
+</file>
+
+<file path=ppt/slides/slide2.xml><?xml version="1.0" encoding="utf-8"?>
 <p:sld xmlns:a="http://schemas.openxmlformats.org/drawingml/2006/main" xmlns:r="http://schemas.openxmlformats.org/officeDocument/2006/relationships" xmlns:p="http://schemas.openxmlformats.org/presentationml/2006/main">
   <p:cSld>
     <p:spTree>
@@ -6036,25 +6908,41 @@
           <a:ln>
             <a:noFill/>
           </a:ln>
-        </p:spPr>
-        <p:txBody>
-          <a:bodyPr/>
-          <a:lstStyle/>
-          <a:p>
+          <a:effectLst/>
+        </p:spPr>
+        <p:style>
+          <a:lnRef idx="1">
+            <a:schemeClr val="accent1"/>
+          </a:lnRef>
+          <a:fillRef idx="3">
+            <a:schemeClr val="accent1"/>
+          </a:fillRef>
+          <a:effectRef idx="2">
+            <a:schemeClr val="accent1"/>
+          </a:effectRef>
+          <a:fontRef idx="minor">
+            <a:schemeClr val="lt1"/>
+          </a:fontRef>
+        </p:style>
+        <p:txBody>
+          <a:bodyPr rtlCol="0" anchor="ctr"/>
+          <a:lstStyle/>
+          <a:p>
+            <a:pPr algn="ctr"/>
             <a:endParaRPr/>
           </a:p>
         </p:txBody>
       </p:sp>
       <p:sp>
         <p:nvSpPr>
-          <p:cNvPr id="3" name="TextBox 2"/>
+          <p:cNvPr id="4" name="TextBox 3"/>
           <p:cNvSpPr txBox="1"/>
           <p:nvPr/>
         </p:nvSpPr>
         <p:spPr>
           <a:xfrm>
-            <a:off x="822960" y="502920"/>
-            <a:ext cx="10515600" cy="822960"/>
+            <a:off x="822960" y="1828800"/>
+            <a:ext cx="5212080" cy="3291840"/>
           </a:xfrm>
           <a:prstGeom prst="rect">
             <a:avLst/>
@@ -6073,27 +6961,59 @@
               </a:spcAft>
             </a:pPr>
             <a:r>
-              <a:rPr sz="2800" b="1" i="0">
+              <a:rPr sz="1800" b="1" i="0">
+                <a:solidFill>
+                  <a:srgbClr val="97BC62"/>
+                </a:solidFill>
+                <a:latin typeface="Calibri"/>
+              </a:rPr>
+              <a:t>SESSION 15</a:t>
+            </a:r>
+          </a:p>
+          <a:p>
+            <a:pPr algn="l">
+              <a:spcAft>
+                <a:spcPts val="1000"/>
+              </a:spcAft>
+            </a:pPr>
+            <a:r>
+              <a:rPr sz="3300" b="1" i="0">
                 <a:solidFill>
                   <a:srgbClr val="2C5F2D"/>
                 </a:solidFill>
                 <a:latin typeface="Cambria"/>
               </a:rPr>
-              <a:t>The Long Walk — Galatians 6:9</a:t>
-            </a:r>
-          </a:p>
-        </p:txBody>
-      </p:sp>
-      <p:sp>
-        <p:nvSpPr>
-          <p:cNvPr id="4" name="TextBox 4"/>
+              <a:t>The Rhythm and the Four Questions</a:t>
+            </a:r>
+          </a:p>
+          <a:p>
+            <a:pPr algn="l">
+              <a:spcAft>
+                <a:spcPts val="600"/>
+              </a:spcAft>
+            </a:pPr>
+            <a:r>
+              <a:rPr sz="1800" b="0" i="1">
+                <a:solidFill>
+                  <a:srgbClr val="595959"/>
+                </a:solidFill>
+                <a:latin typeface="Calibri"/>
+              </a:rPr>
+              <a:t>The long walk installed before the sending — and four questions a parent dares to ask at their own kitchen table</a:t>
+            </a:r>
+          </a:p>
+        </p:txBody>
+      </p:sp>
+      <p:sp>
+        <p:nvSpPr>
+          <p:cNvPr id="5" name="TextBox 4"/>
           <p:cNvSpPr txBox="1"/>
           <p:nvPr/>
         </p:nvSpPr>
         <p:spPr>
           <a:xfrm>
-            <a:off x="822960" y="1600200"/>
-            <a:ext cx="5669280" cy="4572000"/>
+            <a:off x="822960" y="6126480"/>
+            <a:ext cx="7315200" cy="457200"/>
           </a:xfrm>
           <a:prstGeom prst="rect">
             <a:avLst/>
@@ -6101,186 +7021,24 @@
           <a:noFill/>
         </p:spPr>
         <p:txBody>
-          <a:bodyPr wrap="square" lIns="91440" tIns="91440" rIns="91440" bIns="91440"/>
-          <a:lstStyle/>
-          <a:p>
-            <a:pPr marL="274320" indent="-274320">
-              <a:spcAft>
-                <a:spcPts val="800"/>
-              </a:spcAft>
-            </a:pPr>
-            <a:r>
-              <a:rPr sz="2000" b="1" i="0">
-                <a:solidFill>
-                  <a:srgbClr val="97BC62"/>
-                </a:solidFill>
-                <a:latin typeface="Calibri"/>
-              </a:rPr>
-              <a:t>•  </a:t>
-            </a:r>
-            <a:r>
-              <a:rPr sz="2000" b="0" i="0">
-                <a:solidFill>
-                  <a:srgbClr val="222B22"/>
-                </a:solidFill>
-                <a:latin typeface="Calibri"/>
-              </a:rPr>
-              <a:t>The condition is not “if we feel it.” It is “if we do not give up” — Paul assumes the weariness</a:t>
-            </a:r>
-          </a:p>
-          <a:p>
-            <a:pPr marL="274320" indent="-274320">
-              <a:spcAft>
-                <a:spcPts val="800"/>
-              </a:spcAft>
-            </a:pPr>
-            <a:r>
-              <a:rPr sz="2000" b="1" i="0">
-                <a:solidFill>
-                  <a:srgbClr val="97BC62"/>
-                </a:solidFill>
-                <a:latin typeface="Calibri"/>
-              </a:rPr>
-              <a:t>•  </a:t>
-            </a:r>
-            <a:r>
-              <a:rPr sz="2000" b="0" i="0">
-                <a:solidFill>
-                  <a:srgbClr val="222B22"/>
-                </a:solidFill>
-                <a:latin typeface="Calibri"/>
-              </a:rPr>
-              <a:t>The reaping is tied to the season, and the season is God's — our part is the not-giving-up</a:t>
-            </a:r>
-          </a:p>
-          <a:p>
-            <a:pPr marL="274320" indent="-274320">
-              <a:spcAft>
-                <a:spcPts val="800"/>
-              </a:spcAft>
-            </a:pPr>
-            <a:r>
-              <a:rPr sz="2000" b="1" i="0">
-                <a:solidFill>
-                  <a:srgbClr val="97BC62"/>
-                </a:solidFill>
-                <a:latin typeface="Calibri"/>
-              </a:rPr>
-              <a:t>•  </a:t>
-            </a:r>
-            <a:r>
-              <a:rPr sz="2000" b="0" i="0">
-                <a:solidFill>
-                  <a:srgbClr val="222B22"/>
-                </a:solidFill>
-                <a:latin typeface="Calibri"/>
-              </a:rPr>
-              <a:t>Nobody white-knuckles their way through years; people with a rhythm walk through years</a:t>
-            </a:r>
-          </a:p>
-          <a:p>
-            <a:pPr marL="274320" indent="-274320">
-              <a:spcAft>
-                <a:spcPts val="800"/>
-              </a:spcAft>
-            </a:pPr>
-            <a:r>
-              <a:rPr sz="2000" b="1" i="0">
-                <a:solidFill>
-                  <a:srgbClr val="97BC62"/>
-                </a:solidFill>
-                <a:latin typeface="Calibri"/>
-              </a:rPr>
-              <a:t>•  </a:t>
-            </a:r>
-            <a:r>
-              <a:rPr sz="2000" b="0" i="0">
-                <a:solidFill>
-                  <a:srgbClr val="222B22"/>
-                </a:solidFill>
-                <a:latin typeface="Calibri"/>
-              </a:rPr>
-              <a:t>The break is coming — what carries the practices across a gap is not momentum; it is a rhythm you built on purpose</a:t>
-            </a:r>
-          </a:p>
-          <a:p>
-            <a:pPr marL="274320" indent="-274320">
-              <a:spcAft>
-                <a:spcPts val="800"/>
-              </a:spcAft>
-            </a:pPr>
-            <a:r>
-              <a:rPr sz="2000" b="1" i="0">
-                <a:solidFill>
-                  <a:srgbClr val="97BC62"/>
-                </a:solidFill>
-                <a:latin typeface="Calibri"/>
-              </a:rPr>
-              <a:t>•  </a:t>
-            </a:r>
-            <a:r>
-              <a:rPr sz="2000" b="0" i="0">
-                <a:solidFill>
-                  <a:srgbClr val="222B22"/>
-                </a:solidFill>
-                <a:latin typeface="Calibri"/>
-              </a:rPr>
-              <a:t>So we build it tonight, before the gap, not after it</a:t>
-            </a:r>
-          </a:p>
-        </p:txBody>
-      </p:sp>
-      <p:sp>
-        <p:nvSpPr>
-          <p:cNvPr id="6" name="TextBox 6"/>
-          <p:cNvSpPr txBox="1"/>
-          <p:nvPr/>
-        </p:nvSpPr>
-        <p:spPr>
-          <a:xfrm>
-            <a:off x="6766560" y="1737360"/>
-            <a:ext cx="4663440" cy="2194560"/>
-          </a:xfrm>
-          <a:prstGeom prst="rect">
-            <a:avLst/>
-          </a:prstGeom>
-          <a:solidFill>
-            <a:srgbClr val="F1F6EC"/>
-          </a:solidFill>
-        </p:spPr>
-        <p:txBody>
-          <a:bodyPr wrap="square" lIns="91440" tIns="91440" rIns="91440" bIns="91440" anchor="ctr"/>
-          <a:lstStyle/>
-          <a:p>
-            <a:pPr>
-              <a:spcAft>
-                <a:spcPts val="900"/>
-              </a:spcAft>
-            </a:pPr>
-            <a:r>
-              <a:rPr sz="1200" b="1" i="0">
-                <a:solidFill>
-                  <a:srgbClr val="97BC62"/>
-                </a:solidFill>
-                <a:latin typeface="Calibri"/>
-              </a:rPr>
-              <a:t>GALATIANS 6:9 (ESV)</a:t>
-            </a:r>
-          </a:p>
-          <a:p>
-            <a:pPr>
+          <a:bodyPr wrap="square">
+            <a:spAutoFit/>
+          </a:bodyPr>
+          <a:lstStyle/>
+          <a:p>
+            <a:pPr algn="l">
               <a:spcAft>
                 <a:spcPts val="600"/>
               </a:spcAft>
             </a:pPr>
             <a:r>
-              <a:rPr sz="2400" b="0" i="1">
-                <a:solidFill>
-                  <a:srgbClr val="222B22"/>
-                </a:solidFill>
-                <a:latin typeface="Cambria"/>
-              </a:rPr>
-              <a:t>“And let us not grow weary of doing good, for in due season we will reap, if we do not give up.”</a:t>
+              <a:rPr sz="1800" b="0" i="0">
+                <a:solidFill>
+                  <a:srgbClr val="595959"/>
+                </a:solidFill>
+                <a:latin typeface="Calibri"/>
+              </a:rPr>
+              <a:t>Quarter 3: Mission &amp; Rhythm</a:t>
             </a:r>
           </a:p>
         </p:txBody>
@@ -6307,7 +7065,7 @@
           <a:p>
             <a:pPr algn="r"/>
             <a:r>
-              <a:t>189</a:t>
+              <a:t>185</a:t>
             </a:r>
             <a:endParaRPr sz="1000" b="1">
               <a:solidFill>
@@ -6318,6 +7076,42 @@
           </a:p>
         </p:txBody>
       </p:sp>
+      <p:pic>
+        <p:nvPicPr>
+          <p:cNvPr id="91" name="Picture 91" descr="a long open road running to the horizon in early morning light"/>
+          <p:cNvPicPr>
+            <a:picLocks noChangeAspect="1"/>
+          </p:cNvPicPr>
+          <p:nvPr/>
+        </p:nvPicPr>
+        <p:blipFill>
+          <a:blip r:embed="rId3"/>
+          <a:stretch>
+            <a:fillRect/>
+          </a:stretch>
+        </p:blipFill>
+        <p:spPr>
+          <a:xfrm>
+            <a:off x="6309360" y="1630118"/>
+            <a:ext cx="5394960" cy="3597763"/>
+          </a:xfrm>
+          <a:prstGeom prst="rect">
+            <a:avLst/>
+          </a:prstGeom>
+          <a:ln w="76200">
+            <a:solidFill>
+              <a:srgbClr val="FFFFFF"/>
+            </a:solidFill>
+          </a:ln>
+          <a:effectLst>
+            <a:outerShdw blurRad="63500" dist="25400" dir="5400000" rotWithShape="0">
+              <a:srgbClr val="000000">
+                <a:alpha val="35000"/>
+              </a:srgbClr>
+            </a:outerShdw>
+          </a:effectLst>
+        </p:spPr>
+      </p:pic>
     </p:spTree>
   </p:cSld>
   <p:clrMapOvr>
@@ -6326,7 +7120,7 @@
 </p:sld>
 </file>
 
-<file path=ppt/slides/slide190.xml><?xml version="1.0" encoding="utf-8"?>
+<file path=ppt/slides/slide3.xml><?xml version="1.0" encoding="utf-8"?>
 <p:sld xmlns:a="http://schemas.openxmlformats.org/drawingml/2006/main" xmlns:r="http://schemas.openxmlformats.org/officeDocument/2006/relationships" xmlns:p="http://schemas.openxmlformats.org/presentationml/2006/main">
   <p:cSld>
     <p:spTree>
@@ -6363,11 +7157,27 @@
           <a:ln>
             <a:noFill/>
           </a:ln>
-        </p:spPr>
-        <p:txBody>
-          <a:bodyPr/>
-          <a:lstStyle/>
-          <a:p>
+          <a:effectLst/>
+        </p:spPr>
+        <p:style>
+          <a:lnRef idx="1">
+            <a:schemeClr val="accent1"/>
+          </a:lnRef>
+          <a:fillRef idx="3">
+            <a:schemeClr val="accent1"/>
+          </a:fillRef>
+          <a:effectRef idx="2">
+            <a:schemeClr val="accent1"/>
+          </a:effectRef>
+          <a:fontRef idx="minor">
+            <a:schemeClr val="lt1"/>
+          </a:fontRef>
+        </p:style>
+        <p:txBody>
+          <a:bodyPr rtlCol="0" anchor="ctr"/>
+          <a:lstStyle/>
+          <a:p>
+            <a:pPr algn="ctr"/>
             <a:endParaRPr/>
           </a:p>
         </p:txBody>
@@ -6406,21 +7216,21 @@
                 </a:solidFill>
                 <a:latin typeface="Cambria"/>
               </a:rPr>
-              <a:t>The Rhythm Card Introduced</a:t>
-            </a:r>
-          </a:p>
-        </p:txBody>
-      </p:sp>
-      <p:sp>
-        <p:nvSpPr>
-          <p:cNvPr id="4" name="TextBox 4"/>
+              <a:t>Session 15 — Tonight’s Road</a:t>
+            </a:r>
+          </a:p>
+        </p:txBody>
+      </p:sp>
+      <p:sp>
+        <p:nvSpPr>
+          <p:cNvPr id="4" name="TextBox 3"/>
           <p:cNvSpPr txBox="1"/>
           <p:nvPr/>
         </p:nvSpPr>
         <p:spPr>
           <a:xfrm>
-            <a:off x="822960" y="1554480"/>
-            <a:ext cx="10515600" cy="4892040"/>
+            <a:off x="822960" y="1508760"/>
+            <a:ext cx="7040880" cy="4754880"/>
           </a:xfrm>
           <a:prstGeom prst="rect">
             <a:avLst/>
@@ -6428,156 +7238,233 @@
           <a:noFill/>
         </p:spPr>
         <p:txBody>
-          <a:bodyPr wrap="square" lIns="91440" tIns="91440" rIns="91440" bIns="91440"/>
-          <a:lstStyle/>
-          <a:p>
-            <a:pPr marL="274320" indent="-274320">
+          <a:bodyPr wrap="square">
+            <a:spAutoFit/>
+          </a:bodyPr>
+          <a:lstStyle/>
+          <a:p>
+            <a:pPr>
               <a:spcAft>
-                <a:spcPts val="750"/>
+                <a:spcPts val="500"/>
               </a:spcAft>
             </a:pPr>
             <a:r>
-              <a:rPr sz="2200" b="1" i="0">
+              <a:rPr sz="2800" b="1">
                 <a:solidFill>
                   <a:srgbClr val="97BC62"/>
                 </a:solidFill>
                 <a:latin typeface="Calibri"/>
               </a:rPr>
-              <a:t>•  </a:t>
-            </a:r>
-            <a:r>
-              <a:rPr sz="2200" b="0" i="0">
+              <a:t>1   </a:t>
+            </a:r>
+            <a:r>
+              <a:rPr sz="2800">
                 <a:solidFill>
                   <a:srgbClr val="222B22"/>
                 </a:solidFill>
                 <a:latin typeface="Calibri"/>
               </a:rPr>
-              <a:t>The whole series folded into one page — you have already received every practice on this card</a:t>
-            </a:r>
-          </a:p>
-          <a:p>
-            <a:pPr marL="274320" indent="-274320">
+              <a:t>Welcome and centering</a:t>
+            </a:r>
+          </a:p>
+          <a:p>
+            <a:pPr>
               <a:spcAft>
-                <a:spcPts val="750"/>
+                <a:spcPts val="500"/>
               </a:spcAft>
             </a:pPr>
             <a:r>
-              <a:rPr sz="2200" b="1" i="0">
+              <a:rPr sz="2800" b="1">
                 <a:solidFill>
                   <a:srgbClr val="97BC62"/>
                 </a:solidFill>
                 <a:latin typeface="Calibri"/>
               </a:rPr>
-              <a:t>•  </a:t>
-            </a:r>
-            <a:r>
-              <a:rPr sz="2200" b="0" i="0">
+              <a:t>2   </a:t>
+            </a:r>
+            <a:r>
+              <a:rPr sz="2800">
                 <a:solidFill>
                   <a:srgbClr val="222B22"/>
                 </a:solidFill>
                 <a:latin typeface="Calibri"/>
               </a:rPr>
-              <a:t>Daily — the morning question, the evening journal note, PROAPT if the season allows</a:t>
-            </a:r>
-          </a:p>
-          <a:p>
-            <a:pPr marL="274320" indent="-274320">
+              <a:t>Week 13 completion</a:t>
+            </a:r>
+          </a:p>
+          <a:p>
+            <a:pPr>
               <a:spcAft>
-                <a:spcPts val="750"/>
+                <a:spcPts val="500"/>
               </a:spcAft>
             </a:pPr>
             <a:r>
-              <a:rPr sz="2200" b="1" i="0">
+              <a:rPr sz="2800" b="1">
                 <a:solidFill>
                   <a:srgbClr val="97BC62"/>
                 </a:solidFill>
                 <a:latin typeface="Calibri"/>
               </a:rPr>
-              <a:t>•  </a:t>
-            </a:r>
-            <a:r>
-              <a:rPr sz="2200" b="0" i="0">
+              <a:t>3   </a:t>
+            </a:r>
+            <a:r>
+              <a:rPr sz="2800">
                 <a:solidFill>
                   <a:srgbClr val="222B22"/>
                 </a:solidFill>
                 <a:latin typeface="Calibri"/>
               </a:rPr>
-              <a:t>Weekly — one specific person who knows what you are working on, and a sabbath rhythm</a:t>
-            </a:r>
-          </a:p>
-          <a:p>
-            <a:pPr marL="274320" indent="-274320">
+              <a:t>The long walk — Gal. 6:9</a:t>
+            </a:r>
+          </a:p>
+          <a:p>
+            <a:pPr>
               <a:spcAft>
-                <a:spcPts val="750"/>
+                <a:spcPts val="500"/>
               </a:spcAft>
             </a:pPr>
             <a:r>
-              <a:rPr sz="2200" b="1" i="0">
+              <a:rPr sz="2800" b="1">
                 <a:solidFill>
                   <a:srgbClr val="97BC62"/>
                 </a:solidFill>
                 <a:latin typeface="Calibri"/>
               </a:rPr>
-              <a:t>•  </a:t>
-            </a:r>
-            <a:r>
-              <a:rPr sz="2200" b="0" i="0">
+              <a:t>4   </a:t>
+            </a:r>
+            <a:r>
+              <a:rPr sz="2800">
                 <a:solidFill>
                   <a:srgbClr val="222B22"/>
                 </a:solidFill>
                 <a:latin typeface="Calibri"/>
               </a:rPr>
-              <a:t>Monthly — a clearing time and a Four-Connects review. Seasonally — the deeper work</a:t>
-            </a:r>
-          </a:p>
-          <a:p>
-            <a:pPr marL="274320" indent="-274320">
+              <a:t>The Rhythm Card introduced</a:t>
+            </a:r>
+          </a:p>
+          <a:p>
+            <a:pPr>
               <a:spcAft>
-                <a:spcPts val="750"/>
+                <a:spcPts val="500"/>
               </a:spcAft>
             </a:pPr>
             <a:r>
-              <a:rPr sz="2200" b="1" i="0">
+              <a:rPr sz="2800" b="1">
                 <a:solidFill>
                   <a:srgbClr val="97BC62"/>
                 </a:solidFill>
                 <a:latin typeface="Calibri"/>
               </a:rPr>
-              <a:t>•  </a:t>
-            </a:r>
-            <a:r>
-              <a:rPr sz="2200" b="0" i="0">
+              <a:t>5   </a:t>
+            </a:r>
+            <a:r>
+              <a:rPr sz="2800">
                 <a:solidFill>
                   <a:srgbClr val="222B22"/>
                 </a:solidFill>
                 <a:latin typeface="Calibri"/>
               </a:rPr>
-              <a:t>One rule for the build: “write the rhythm you will actually keep, not the one that impresses you”</a:t>
-            </a:r>
-          </a:p>
-          <a:p>
-            <a:pPr marL="274320" indent="-274320">
+              <a:t>Building your Rhythm Card</a:t>
+            </a:r>
+          </a:p>
+          <a:p>
+            <a:pPr>
               <a:spcAft>
-                <a:spcPts val="750"/>
+                <a:spcPts val="500"/>
               </a:spcAft>
             </a:pPr>
             <a:r>
-              <a:rPr sz="2200" b="1" i="0">
+              <a:rPr sz="2800" b="1">
                 <a:solidFill>
                   <a:srgbClr val="97BC62"/>
                 </a:solidFill>
                 <a:latin typeface="Calibri"/>
               </a:rPr>
-              <a:t>•  </a:t>
-            </a:r>
-            <a:r>
-              <a:rPr sz="2200" b="0" i="0">
+              <a:t>6   </a:t>
+            </a:r>
+            <a:r>
+              <a:rPr sz="2800">
                 <a:solidFill>
                   <a:srgbClr val="222B22"/>
                 </a:solidFill>
                 <a:latin typeface="Calibri"/>
               </a:rPr>
-              <a:t>The starter plan begins with two practices totaling six minutes a day — six honest minutes is a real rhythm</a:t>
+              <a:t>The Four Questions</a:t>
+            </a:r>
+          </a:p>
+          <a:p>
+            <a:pPr>
+              <a:spcAft>
+                <a:spcPts val="500"/>
+              </a:spcAft>
+            </a:pPr>
+            <a:r>
+              <a:rPr sz="2800" b="1">
+                <a:solidFill>
+                  <a:srgbClr val="97BC62"/>
+                </a:solidFill>
+                <a:latin typeface="Calibri"/>
+              </a:rPr>
+              <a:t>7   </a:t>
+            </a:r>
+            <a:r>
+              <a:rPr sz="2800">
+                <a:solidFill>
+                  <a:srgbClr val="222B22"/>
+                </a:solidFill>
+                <a:latin typeface="Calibri"/>
+              </a:rPr>
+              <a:t>The Leader Feedback Round — both leaders</a:t>
+            </a:r>
+          </a:p>
+          <a:p>
+            <a:pPr>
+              <a:spcAft>
+                <a:spcPts val="500"/>
+              </a:spcAft>
+            </a:pPr>
+            <a:r>
+              <a:rPr sz="2800" b="1">
+                <a:solidFill>
+                  <a:srgbClr val="97BC62"/>
+                </a:solidFill>
+                <a:latin typeface="Calibri"/>
+              </a:rPr>
+              <a:t>8   </a:t>
+            </a:r>
+            <a:r>
+              <a:rPr sz="2800">
+                <a:solidFill>
+                  <a:srgbClr val="222B22"/>
+                </a:solidFill>
+                <a:latin typeface="Calibri"/>
+              </a:rPr>
+              <a:t>Between-week practice — the Rhythm Card begins; the Four Questions go home</a:t>
+            </a:r>
+          </a:p>
+          <a:p>
+            <a:pPr>
+              <a:spcAft>
+                <a:spcPts val="500"/>
+              </a:spcAft>
+            </a:pPr>
+            <a:r>
+              <a:rPr sz="2800" b="1">
+                <a:solidFill>
+                  <a:srgbClr val="97BC62"/>
+                </a:solidFill>
+                <a:latin typeface="Calibri"/>
+              </a:rPr>
+              <a:t>9   </a:t>
+            </a:r>
+            <a:r>
+              <a:rPr sz="2800">
+                <a:solidFill>
+                  <a:srgbClr val="222B22"/>
+                </a:solidFill>
+                <a:latin typeface="Calibri"/>
+              </a:rPr>
+              <a:t>Closing container + Aaronic blessing</a:t>
             </a:r>
           </a:p>
         </p:txBody>
@@ -6604,7 +7491,7 @@
           <a:p>
             <a:pPr algn="r"/>
             <a:r>
-              <a:t>190</a:t>
+              <a:t>186</a:t>
             </a:r>
             <a:endParaRPr sz="1000" b="1">
               <a:solidFill>
@@ -6615,6 +7502,42 @@
           </a:p>
         </p:txBody>
       </p:sp>
+      <p:pic>
+        <p:nvPicPr>
+          <p:cNvPr id="31" name="Picture 31" descr="the open container bowl"/>
+          <p:cNvPicPr>
+            <a:picLocks noChangeAspect="1"/>
+          </p:cNvPicPr>
+          <p:nvPr/>
+        </p:nvPicPr>
+        <p:blipFill>
+          <a:blip r:embed="rId3"/>
+          <a:stretch>
+            <a:fillRect/>
+          </a:stretch>
+        </p:blipFill>
+        <p:spPr>
+          <a:xfrm>
+            <a:off x="8001000" y="1554480"/>
+            <a:ext cx="3017520" cy="4526280"/>
+          </a:xfrm>
+          <a:prstGeom prst="rect">
+            <a:avLst/>
+          </a:prstGeom>
+          <a:ln w="76200">
+            <a:solidFill>
+              <a:srgbClr val="FFFFFF"/>
+            </a:solidFill>
+          </a:ln>
+          <a:effectLst>
+            <a:outerShdw blurRad="63500" dist="25400" dir="5400000" rotWithShape="0">
+              <a:srgbClr val="000000">
+                <a:alpha val="35000"/>
+              </a:srgbClr>
+            </a:outerShdw>
+          </a:effectLst>
+        </p:spPr>
+      </p:pic>
     </p:spTree>
   </p:cSld>
   <p:clrMapOvr>
@@ -6623,7 +7546,7 @@
 </p:sld>
 </file>
 
-<file path=ppt/slides/slide191.xml><?xml version="1.0" encoding="utf-8"?>
+<file path=ppt/slides/slide4.xml><?xml version="1.0" encoding="utf-8"?>
 <p:sld xmlns:a="http://schemas.openxmlformats.org/drawingml/2006/main" xmlns:r="http://schemas.openxmlformats.org/officeDocument/2006/relationships" xmlns:p="http://schemas.openxmlformats.org/presentationml/2006/main">
   <p:cSld>
     <p:spTree>
@@ -6703,21 +7626,21 @@
                 </a:solidFill>
                 <a:latin typeface="Cambria"/>
               </a:rPr>
-              <a:t>A Rhythm You Can See — One Morning Flow</a:t>
-            </a:r>
-          </a:p>
-        </p:txBody>
-      </p:sp>
-      <p:sp>
-        <p:nvSpPr>
-          <p:cNvPr id="90" name="SlideNum"/>
+              <a:t>Opening Container — the Eight Steps</a:t>
+            </a:r>
+          </a:p>
+        </p:txBody>
+      </p:sp>
+      <p:sp>
+        <p:nvSpPr>
+          <p:cNvPr id="4" name="TextBox 4"/>
           <p:cNvSpPr txBox="1"/>
           <p:nvPr/>
         </p:nvSpPr>
         <p:spPr>
           <a:xfrm>
-            <a:off x="11384280" y="6446520"/>
-            <a:ext cx="640080" cy="292608"/>
+            <a:off x="822960" y="1554480"/>
+            <a:ext cx="10515600" cy="4892040"/>
           </a:xfrm>
           <a:prstGeom prst="rect">
             <a:avLst/>
@@ -6725,12 +7648,233 @@
           <a:noFill/>
         </p:spPr>
         <p:txBody>
+          <a:bodyPr wrap="square" lIns="91440" tIns="91440" rIns="91440" bIns="91440"/>
+          <a:lstStyle/>
+          <a:p>
+            <a:pPr marL="342900" indent="-342900">
+              <a:spcAft>
+                <a:spcPts val="650"/>
+              </a:spcAft>
+            </a:pPr>
+            <a:r>
+              <a:rPr sz="2400" b="1" i="0">
+                <a:solidFill>
+                  <a:srgbClr val="97BC62"/>
+                </a:solidFill>
+                <a:latin typeface="Calibri"/>
+              </a:rPr>
+              <a:t>1   </a:t>
+            </a:r>
+            <a:r>
+              <a:rPr sz="2400" b="0" i="0">
+                <a:solidFill>
+                  <a:srgbClr val="222B22"/>
+                </a:solidFill>
+                <a:latin typeface="Calibri"/>
+              </a:rPr>
+              <a:t>Welcome — five minutes to open the container</a:t>
+            </a:r>
+          </a:p>
+          <a:p>
+            <a:pPr marL="342900" indent="-342900">
+              <a:spcAft>
+                <a:spcPts val="650"/>
+              </a:spcAft>
+            </a:pPr>
+            <a:r>
+              <a:rPr sz="2400" b="1" i="0">
+                <a:solidFill>
+                  <a:srgbClr val="97BC62"/>
+                </a:solidFill>
+                <a:latin typeface="Calibri"/>
+              </a:rPr>
+              <a:t>2   </a:t>
+            </a:r>
+            <a:r>
+              <a:rPr sz="2400" b="0" i="0">
+                <a:solidFill>
+                  <a:srgbClr val="222B22"/>
+                </a:solidFill>
+                <a:latin typeface="Calibri"/>
+              </a:rPr>
+              <a:t>Phones silenced and put away</a:t>
+            </a:r>
+          </a:p>
+          <a:p>
+            <a:pPr marL="342900" indent="-342900">
+              <a:spcAft>
+                <a:spcPts val="650"/>
+              </a:spcAft>
+            </a:pPr>
+            <a:r>
+              <a:rPr sz="2400" b="1" i="0">
+                <a:solidFill>
+                  <a:srgbClr val="97BC62"/>
+                </a:solidFill>
+                <a:latin typeface="Calibri"/>
+              </a:rPr>
+              <a:t>3   </a:t>
+            </a:r>
+            <a:r>
+              <a:rPr sz="2400" b="0" i="0">
+                <a:solidFill>
+                  <a:srgbClr val="222B22"/>
+                </a:solidFill>
+                <a:latin typeface="Calibri"/>
+              </a:rPr>
+              <a:t>Stand in a circle</a:t>
+            </a:r>
+          </a:p>
+          <a:p>
+            <a:pPr marL="342900" indent="-342900">
+              <a:spcAft>
+                <a:spcPts val="650"/>
+              </a:spcAft>
+            </a:pPr>
+            <a:r>
+              <a:rPr sz="2400" b="1" i="0">
+                <a:solidFill>
+                  <a:srgbClr val="97BC62"/>
+                </a:solidFill>
+                <a:latin typeface="Calibri"/>
+              </a:rPr>
+              <a:t>4   </a:t>
+            </a:r>
+            <a:r>
+              <a:rPr sz="2400" b="0" i="0">
+                <a:solidFill>
+                  <a:srgbClr val="222B22"/>
+                </a:solidFill>
+                <a:latin typeface="Calibri"/>
+              </a:rPr>
+              <a:t>One-word check-in — how you actually are, right now</a:t>
+            </a:r>
+          </a:p>
+          <a:p>
+            <a:pPr marL="342900" indent="-342900">
+              <a:spcAft>
+                <a:spcPts val="650"/>
+              </a:spcAft>
+            </a:pPr>
+            <a:r>
+              <a:rPr sz="2400" b="1" i="0">
+                <a:solidFill>
+                  <a:srgbClr val="97BC62"/>
+                </a:solidFill>
+                <a:latin typeface="Calibri"/>
+              </a:rPr>
+              <a:t>5   </a:t>
+            </a:r>
+            <a:r>
+              <a:rPr sz="2400" b="0" i="0">
+                <a:solidFill>
+                  <a:srgbClr val="222B22"/>
+                </a:solidFill>
+                <a:latin typeface="Calibri"/>
+              </a:rPr>
+              <a:t>Put out / bring in — set something down; bring a blessing in</a:t>
+            </a:r>
+          </a:p>
+          <a:p>
+            <a:pPr marL="342900" indent="-342900">
+              <a:spcAft>
+                <a:spcPts val="650"/>
+              </a:spcAft>
+            </a:pPr>
+            <a:r>
+              <a:rPr sz="2400" b="1" i="0">
+                <a:solidFill>
+                  <a:srgbClr val="97BC62"/>
+                </a:solidFill>
+                <a:latin typeface="Calibri"/>
+              </a:rPr>
+              <a:t>6   </a:t>
+            </a:r>
+            <a:r>
+              <a:rPr sz="2400" b="0" i="0">
+                <a:solidFill>
+                  <a:srgbClr val="222B22"/>
+                </a:solidFill>
+                <a:latin typeface="Calibri"/>
+              </a:rPr>
+              <a:t>Spoken commitment: “I am here. I am paying attention. I am willing to be moved.”</a:t>
+            </a:r>
+          </a:p>
+          <a:p>
+            <a:pPr marL="342900" indent="-342900">
+              <a:spcAft>
+                <a:spcPts val="650"/>
+              </a:spcAft>
+            </a:pPr>
+            <a:r>
+              <a:rPr sz="2400" b="1" i="0">
+                <a:solidFill>
+                  <a:srgbClr val="97BC62"/>
+                </a:solidFill>
+                <a:latin typeface="Calibri"/>
+              </a:rPr>
+              <a:t>7   </a:t>
+            </a:r>
+            <a:r>
+              <a:rPr sz="2400" b="0" i="0">
+                <a:solidFill>
+                  <a:srgbClr val="222B22"/>
+                </a:solidFill>
+                <a:latin typeface="Calibri"/>
+              </a:rPr>
+              <a:t>Opening prayer — “Holy Spirit, you are welcome here. Speak. We are listening.”</a:t>
+            </a:r>
+          </a:p>
+          <a:p>
+            <a:pPr marL="342900" indent="-342900">
+              <a:spcAft>
+                <a:spcPts val="650"/>
+              </a:spcAft>
+            </a:pPr>
+            <a:r>
+              <a:rPr sz="2400" b="1" i="0">
+                <a:solidFill>
+                  <a:srgbClr val="97BC62"/>
+                </a:solidFill>
+                <a:latin typeface="Calibri"/>
+              </a:rPr>
+              <a:t>8   </a:t>
+            </a:r>
+            <a:r>
+              <a:rPr sz="2400" b="0" i="0">
+                <a:solidFill>
+                  <a:srgbClr val="222B22"/>
+                </a:solidFill>
+                <a:latin typeface="Calibri"/>
+              </a:rPr>
+              <a:t>Sit. Begin.</a:t>
+            </a:r>
+          </a:p>
+        </p:txBody>
+      </p:sp>
+      <p:sp>
+        <p:nvSpPr>
+          <p:cNvPr id="90" name="SlideNum"/>
+          <p:cNvSpPr txBox="1"/>
+          <p:nvPr/>
+        </p:nvSpPr>
+        <p:spPr>
+          <a:xfrm>
+            <a:off x="11384280" y="6446520"/>
+            <a:ext cx="640080" cy="292608"/>
+          </a:xfrm>
+          <a:prstGeom prst="rect">
+            <a:avLst/>
+          </a:prstGeom>
+          <a:noFill/>
+        </p:spPr>
+        <p:txBody>
           <a:bodyPr wrap="none" lIns="0" tIns="0" rIns="45720" bIns="0" anchor="ctr"/>
           <a:lstStyle/>
           <a:p>
             <a:pPr algn="r"/>
             <a:r>
-              <a:t>191</a:t>
+              <a:t>187</a:t>
             </a:r>
             <a:endParaRPr sz="1000" b="1">
               <a:solidFill>
@@ -6738,315 +7882,6 @@
               </a:solidFill>
               <a:latin typeface="Calibri"/>
             </a:endParaRPr>
-          </a:p>
-        </p:txBody>
-      </p:sp>
-      <p:pic>
-        <p:nvPicPr>
-          <p:cNvPr id="100" name="Flow 1" descr="a bench above an evening valley"/>
-          <p:cNvPicPr>
-            <a:picLocks noChangeAspect="1"/>
-          </p:cNvPicPr>
-          <p:nvPr/>
-        </p:nvPicPr>
-        <p:blipFill>
-          <a:blip r:embed="rId3"/>
-          <a:stretch>
-            <a:fillRect/>
-          </a:stretch>
-        </p:blipFill>
-        <p:spPr>
-          <a:xfrm>
-            <a:off x="822960" y="1691640"/>
-            <a:ext cx="2450592" cy="3264408"/>
-          </a:xfrm>
-          <a:prstGeom prst="rect">
-            <a:avLst/>
-          </a:prstGeom>
-          <a:ln w="76200">
-            <a:solidFill>
-              <a:srgbClr val="FFFFFF"/>
-            </a:solidFill>
-          </a:ln>
-          <a:effectLst>
-            <a:outerShdw blurRad="63500" dist="25400" dir="5400000" rotWithShape="0">
-              <a:srgbClr val="000000">
-                <a:alpha val="35000"/>
-              </a:srgbClr>
-            </a:outerShdw>
-          </a:effectLst>
-        </p:spPr>
-      </p:pic>
-      <p:sp>
-        <p:nvSpPr>
-          <p:cNvPr id="110" name="Cap 1"/>
-          <p:cNvSpPr txBox="1"/>
-          <p:nvPr/>
-        </p:nvSpPr>
-        <p:spPr>
-          <a:xfrm>
-            <a:off x="822960" y="5047488"/>
-            <a:ext cx="2450592" cy="365760"/>
-          </a:xfrm>
-          <a:prstGeom prst="rect">
-            <a:avLst/>
-          </a:prstGeom>
-          <a:noFill/>
-        </p:spPr>
-        <p:txBody>
-          <a:bodyPr wrap="square"/>
-          <a:lstStyle/>
-          <a:p>
-            <a:pPr algn="ctr"/>
-            <a:r>
-              <a:rPr sz="1800" b="1">
-                <a:solidFill>
-                  <a:srgbClr val="97BC62"/>
-                </a:solidFill>
-                <a:latin typeface="Calibri"/>
-              </a:rPr>
-              <a:t>GROUNDED</a:t>
-            </a:r>
-          </a:p>
-        </p:txBody>
-      </p:sp>
-      <p:pic>
-        <p:nvPicPr>
-          <p:cNvPr id="101" name="Flow 2" descr="an open Bible beside a quiet chair"/>
-          <p:cNvPicPr>
-            <a:picLocks noChangeAspect="1"/>
-          </p:cNvPicPr>
-          <p:nvPr/>
-        </p:nvPicPr>
-        <p:blipFill>
-          <a:blip r:embed="rId4"/>
-          <a:stretch>
-            <a:fillRect/>
-          </a:stretch>
-        </p:blipFill>
-        <p:spPr>
-          <a:xfrm>
-            <a:off x="3502152" y="1691640"/>
-            <a:ext cx="2450592" cy="3264408"/>
-          </a:xfrm>
-          <a:prstGeom prst="rect">
-            <a:avLst/>
-          </a:prstGeom>
-          <a:ln w="76200">
-            <a:solidFill>
-              <a:srgbClr val="FFFFFF"/>
-            </a:solidFill>
-          </a:ln>
-          <a:effectLst>
-            <a:outerShdw blurRad="63500" dist="25400" dir="5400000" rotWithShape="0">
-              <a:srgbClr val="000000">
-                <a:alpha val="35000"/>
-              </a:srgbClr>
-            </a:outerShdw>
-          </a:effectLst>
-        </p:spPr>
-      </p:pic>
-      <p:sp>
-        <p:nvSpPr>
-          <p:cNvPr id="111" name="Cap 2"/>
-          <p:cNvSpPr txBox="1"/>
-          <p:nvPr/>
-        </p:nvSpPr>
-        <p:spPr>
-          <a:xfrm>
-            <a:off x="3502152" y="5047488"/>
-            <a:ext cx="2450592" cy="365760"/>
-          </a:xfrm>
-          <a:prstGeom prst="rect">
-            <a:avLst/>
-          </a:prstGeom>
-          <a:noFill/>
-        </p:spPr>
-        <p:txBody>
-          <a:bodyPr wrap="square"/>
-          <a:lstStyle/>
-          <a:p>
-            <a:pPr algn="ctr"/>
-            <a:r>
-              <a:rPr sz="1800" b="1">
-                <a:solidFill>
-                  <a:srgbClr val="97BC62"/>
-                </a:solidFill>
-                <a:latin typeface="Calibri"/>
-              </a:rPr>
-              <a:t>LISTENING</a:t>
-            </a:r>
-          </a:p>
-        </p:txBody>
-      </p:sp>
-      <p:pic>
-        <p:nvPicPr>
-          <p:cNvPr id="102" name="Flow 3" descr="rings widening on still water"/>
-          <p:cNvPicPr>
-            <a:picLocks noChangeAspect="1"/>
-          </p:cNvPicPr>
-          <p:nvPr/>
-        </p:nvPicPr>
-        <p:blipFill>
-          <a:blip r:embed="rId5"/>
-          <a:stretch>
-            <a:fillRect/>
-          </a:stretch>
-        </p:blipFill>
-        <p:spPr>
-          <a:xfrm>
-            <a:off x="6181344" y="1691640"/>
-            <a:ext cx="2450592" cy="3264408"/>
-          </a:xfrm>
-          <a:prstGeom prst="rect">
-            <a:avLst/>
-          </a:prstGeom>
-          <a:ln w="76200">
-            <a:solidFill>
-              <a:srgbClr val="FFFFFF"/>
-            </a:solidFill>
-          </a:ln>
-          <a:effectLst>
-            <a:outerShdw blurRad="63500" dist="25400" dir="5400000" rotWithShape="0">
-              <a:srgbClr val="000000">
-                <a:alpha val="35000"/>
-              </a:srgbClr>
-            </a:outerShdw>
-          </a:effectLst>
-        </p:spPr>
-      </p:pic>
-      <p:sp>
-        <p:nvSpPr>
-          <p:cNvPr id="112" name="Cap 3"/>
-          <p:cNvSpPr txBox="1"/>
-          <p:nvPr/>
-        </p:nvSpPr>
-        <p:spPr>
-          <a:xfrm>
-            <a:off x="6181344" y="5047488"/>
-            <a:ext cx="2450592" cy="365760"/>
-          </a:xfrm>
-          <a:prstGeom prst="rect">
-            <a:avLst/>
-          </a:prstGeom>
-          <a:noFill/>
-        </p:spPr>
-        <p:txBody>
-          <a:bodyPr wrap="square"/>
-          <a:lstStyle/>
-          <a:p>
-            <a:pPr algn="ctr"/>
-            <a:r>
-              <a:rPr sz="1800" b="1">
-                <a:solidFill>
-                  <a:srgbClr val="97BC62"/>
-                </a:solidFill>
-                <a:latin typeface="Calibri"/>
-              </a:rPr>
-              <a:t>CHANGED, RIPPLING</a:t>
-            </a:r>
-          </a:p>
-        </p:txBody>
-      </p:sp>
-      <p:pic>
-        <p:nvPicPr>
-          <p:cNvPr id="103" name="Flow 4" descr="a hiker leaping between two rocks"/>
-          <p:cNvPicPr>
-            <a:picLocks noChangeAspect="1"/>
-          </p:cNvPicPr>
-          <p:nvPr/>
-        </p:nvPicPr>
-        <p:blipFill>
-          <a:blip r:embed="rId6"/>
-          <a:stretch>
-            <a:fillRect/>
-          </a:stretch>
-        </p:blipFill>
-        <p:spPr>
-          <a:xfrm>
-            <a:off x="8860536" y="1691640"/>
-            <a:ext cx="2450592" cy="3264408"/>
-          </a:xfrm>
-          <a:prstGeom prst="rect">
-            <a:avLst/>
-          </a:prstGeom>
-          <a:ln w="76200">
-            <a:solidFill>
-              <a:srgbClr val="FFFFFF"/>
-            </a:solidFill>
-          </a:ln>
-          <a:effectLst>
-            <a:outerShdw blurRad="63500" dist="25400" dir="5400000" rotWithShape="0">
-              <a:srgbClr val="000000">
-                <a:alpha val="35000"/>
-              </a:srgbClr>
-            </a:outerShdw>
-          </a:effectLst>
-        </p:spPr>
-      </p:pic>
-      <p:sp>
-        <p:nvSpPr>
-          <p:cNvPr id="113" name="Cap 4"/>
-          <p:cNvSpPr txBox="1"/>
-          <p:nvPr/>
-        </p:nvSpPr>
-        <p:spPr>
-          <a:xfrm>
-            <a:off x="8860536" y="5047488"/>
-            <a:ext cx="2450592" cy="365760"/>
-          </a:xfrm>
-          <a:prstGeom prst="rect">
-            <a:avLst/>
-          </a:prstGeom>
-          <a:noFill/>
-        </p:spPr>
-        <p:txBody>
-          <a:bodyPr wrap="square"/>
-          <a:lstStyle/>
-          <a:p>
-            <a:pPr algn="ctr"/>
-            <a:r>
-              <a:rPr sz="1800" b="1">
-                <a:solidFill>
-                  <a:srgbClr val="97BC62"/>
-                </a:solidFill>
-                <a:latin typeface="Calibri"/>
-              </a:rPr>
-              <a:t>LEAPING</a:t>
-            </a:r>
-          </a:p>
-        </p:txBody>
-      </p:sp>
-      <p:sp>
-        <p:nvSpPr>
-          <p:cNvPr id="120" name="FlowLine"/>
-          <p:cNvSpPr txBox="1"/>
-          <p:nvPr/>
-        </p:nvSpPr>
-        <p:spPr>
-          <a:xfrm>
-            <a:off x="822960" y="5623560"/>
-            <a:ext cx="10515600" cy="731520"/>
-          </a:xfrm>
-          <a:prstGeom prst="rect">
-            <a:avLst/>
-          </a:prstGeom>
-          <a:noFill/>
-        </p:spPr>
-        <p:txBody>
-          <a:bodyPr wrap="square"/>
-          <a:lstStyle/>
-          <a:p>
-            <a:pPr algn="l"/>
-            <a:r>
-              <a:rPr sz="1800" i="1">
-                <a:solidFill>
-                  <a:srgbClr val="222B22"/>
-                </a:solidFill>
-                <a:latin typeface="Calibri"/>
-              </a:rPr>
-              <a:t>The founder’s own morning flow — four images, one motto, kept for years. Yours will look different. The journal has a page waiting for it.</a:t>
-            </a:r>
           </a:p>
         </p:txBody>
       </p:sp>
@@ -7058,7 +7893,7 @@
 </p:sld>
 </file>
 
-<file path=ppt/slides/slide192.xml><?xml version="1.0" encoding="utf-8"?>
+<file path=ppt/slides/slide5.xml><?xml version="1.0" encoding="utf-8"?>
 <p:sld xmlns:a="http://schemas.openxmlformats.org/drawingml/2006/main" xmlns:r="http://schemas.openxmlformats.org/officeDocument/2006/relationships" xmlns:p="http://schemas.openxmlformats.org/presentationml/2006/main">
   <p:cSld>
     <p:spTree>
@@ -7138,7 +7973,7 @@
                 </a:solidFill>
                 <a:latin typeface="Cambria"/>
               </a:rPr>
-              <a:t>Building Your Rhythm Card</a:t>
+              <a:t>Week 13 Completion — Finishing the Mission Week</a:t>
             </a:r>
           </a:p>
         </p:txBody>
@@ -7169,7 +8004,7 @@
               </a:spcAft>
             </a:pPr>
             <a:r>
-              <a:rPr sz="2400" b="1" i="0">
+              <a:rPr sz="2800" b="1" i="0">
                 <a:solidFill>
                   <a:srgbClr val="97BC62"/>
                 </a:solidFill>
@@ -7178,13 +8013,13 @@
               <a:t>•  </a:t>
             </a:r>
             <a:r>
-              <a:rPr sz="2400" b="0" i="0">
+              <a:rPr sz="2800" b="0" i="0">
                 <a:solidFill>
                   <a:srgbClr val="222B22"/>
                 </a:solidFill>
                 <a:latin typeface="Calibri"/>
               </a:rPr>
-              <a:t>Twenty minutes in pairs — in your own handwriting, on the build sheet</a:t>
+              <a:t>“Before we walk forward, we finish the Mission week” — unfinished downhill answers finish here</a:t>
             </a:r>
           </a:p>
           <a:p>
@@ -7194,7 +8029,7 @@
               </a:spcAft>
             </a:pPr>
             <a:r>
-              <a:rPr sz="2400" b="1" i="0">
+              <a:rPr sz="2800" b="1" i="0">
                 <a:solidFill>
                   <a:srgbClr val="97BC62"/>
                 </a:solidFill>
@@ -7203,13 +8038,13 @@
               <a:t>•  </a:t>
             </a:r>
             <a:r>
-              <a:rPr sz="2400" b="0" i="0">
+              <a:rPr sz="2800" b="0" i="0">
                 <a:solidFill>
                   <a:srgbClr val="222B22"/>
                 </a:solidFill>
                 <a:latin typeface="Calibri"/>
               </a:rPr>
-              <a:t>Specific beats vague — “morning question, 6:50, kitchen table, before my phone” is a rhythm</a:t>
+              <a:t>Two weeks of living with the question usually deepens it — one sentence, now, to the room</a:t>
             </a:r>
           </a:p>
           <a:p>
@@ -7219,7 +8054,7 @@
               </a:spcAft>
             </a:pPr>
             <a:r>
-              <a:rPr sz="2400" b="1" i="0">
+              <a:rPr sz="2800" b="1" i="0">
                 <a:solidFill>
                   <a:srgbClr val="97BC62"/>
                 </a:solidFill>
@@ -7228,13 +8063,13 @@
               <a:t>•  </a:t>
             </a:r>
             <a:r>
-              <a:rPr sz="2400" b="0" i="0">
+              <a:rPr sz="2800" b="0" i="0">
                 <a:solidFill>
                   <a:srgbClr val="222B22"/>
                 </a:solidFill>
                 <a:latin typeface="Calibri"/>
               </a:rPr>
-              <a:t>The weekly partner line is the most important line on the sheet — name an actual person</a:t>
+              <a:t>A parent opens the round; teens choose their own depth after — pass-anytime holds</a:t>
             </a:r>
           </a:p>
           <a:p>
@@ -7244,7 +8079,7 @@
               </a:spcAft>
             </a:pPr>
             <a:r>
-              <a:rPr sz="2400" b="1" i="0">
+              <a:rPr sz="2800" b="1" i="0">
                 <a:solidFill>
                   <a:srgbClr val="97BC62"/>
                 </a:solidFill>
@@ -7253,13 +8088,13 @@
               <a:t>•  </a:t>
             </a:r>
             <a:r>
-              <a:rPr sz="2400" b="0" i="0">
+              <a:rPr sz="2800" b="0" i="0">
                 <a:solidFill>
                   <a:srgbClr val="222B22"/>
                 </a:solidFill>
                 <a:latin typeface="Calibri"/>
               </a:rPr>
-              <a:t>Build down, not up — which two practices survive exam season? Start there; the card lets you add later</a:t>
+              <a:t>The answers carry forward to the Week 21 commissioning</a:t>
             </a:r>
           </a:p>
           <a:p>
@@ -7269,7 +8104,7 @@
               </a:spcAft>
             </a:pPr>
             <a:r>
-              <a:rPr sz="2400" b="1" i="0">
+              <a:rPr sz="2800" b="1" i="0">
                 <a:solidFill>
                   <a:srgbClr val="97BC62"/>
                 </a:solidFill>
@@ -7278,13 +8113,13 @@
               <a:t>•  </a:t>
             </a:r>
             <a:r>
-              <a:rPr sz="2400" b="0" i="0">
+              <a:rPr sz="2800" b="0" i="0">
                 <a:solidFill>
                   <a:srgbClr val="222B22"/>
                 </a:solidFill>
                 <a:latin typeface="Calibri"/>
               </a:rPr>
-              <a:t>Close: each participant reads their daily line aloud to the pair — a parent first; pass-anytime holds</a:t>
+              <a:t>Practice check: one small action aligned with your downhill mission — ninety seconds, one sentence on what happened</a:t>
             </a:r>
           </a:p>
         </p:txBody>
@@ -7311,7 +8146,7 @@
           <a:p>
             <a:pPr algn="r"/>
             <a:r>
-              <a:t>192</a:t>
+              <a:t>188</a:t>
             </a:r>
             <a:endParaRPr sz="1000" b="1">
               <a:solidFill>
@@ -7330,7 +8165,7 @@
 </p:sld>
 </file>
 
-<file path=ppt/slides/slide193.xml><?xml version="1.0" encoding="utf-8"?>
+<file path=ppt/slides/slide6.xml><?xml version="1.0" encoding="utf-8"?>
 <p:sld xmlns:a="http://schemas.openxmlformats.org/drawingml/2006/main" xmlns:r="http://schemas.openxmlformats.org/officeDocument/2006/relationships" xmlns:p="http://schemas.openxmlformats.org/presentationml/2006/main">
   <p:cSld>
     <p:spTree>
@@ -7410,7 +8245,7 @@
                 </a:solidFill>
                 <a:latin typeface="Cambria"/>
               </a:rPr>
-              <a:t>The Four Questions</a:t>
+              <a:t>The Long Walk — Galatians 6:9</a:t>
             </a:r>
           </a:p>
         </p:txBody>
@@ -7437,11 +8272,11 @@
           <a:p>
             <a:pPr marL="274320" indent="-274320">
               <a:spcAft>
-                <a:spcPts val="650"/>
+                <a:spcPts val="800"/>
               </a:spcAft>
             </a:pPr>
             <a:r>
-              <a:rPr sz="1800" b="1" i="0">
+              <a:rPr sz="2000" b="1" i="0">
                 <a:solidFill>
                   <a:srgbClr val="97BC62"/>
                 </a:solidFill>
@@ -7450,138 +8285,113 @@
               <a:t>•  </a:t>
             </a:r>
             <a:r>
-              <a:rPr sz="1800" b="0" i="0">
+              <a:rPr sz="2000" b="0" i="0">
                 <a:solidFill>
                   <a:srgbClr val="222B22"/>
                 </a:solidFill>
                 <a:latin typeface="Calibri"/>
               </a:rPr>
-              <a:t>Parents, this next part is for you — nobody answers tonight. This week, at home, for the willing: unhurried, no audience, phone away, yours first</a:t>
-            </a:r>
-          </a:p>
-          <a:p>
-            <a:pPr marL="342900" indent="-342900">
+              <a:t>The condition is not “if we feel it.” It is “if we do not give up” — Paul assumes the weariness</a:t>
+            </a:r>
+          </a:p>
+          <a:p>
+            <a:pPr marL="274320" indent="-274320">
               <a:spcAft>
-                <a:spcPts val="650"/>
+                <a:spcPts val="800"/>
               </a:spcAft>
             </a:pPr>
             <a:r>
-              <a:rPr sz="1800" b="1" i="0">
+              <a:rPr sz="2000" b="1" i="0">
                 <a:solidFill>
                   <a:srgbClr val="97BC62"/>
                 </a:solidFill>
                 <a:latin typeface="Calibri"/>
               </a:rPr>
-              <a:t>1   </a:t>
-            </a:r>
-            <a:r>
-              <a:rPr sz="1800" b="0" i="0">
+              <a:t>•  </a:t>
+            </a:r>
+            <a:r>
+              <a:rPr sz="2000" b="0" i="0">
                 <a:solidFill>
                   <a:srgbClr val="222B22"/>
                 </a:solidFill>
                 <a:latin typeface="Calibri"/>
               </a:rPr>
-              <a:t>What has it been like to live with me all these years?</a:t>
-            </a:r>
-          </a:p>
-          <a:p>
-            <a:pPr marL="342900" indent="-342900">
+              <a:t>The reaping is tied to the season, and the season is God's — our part is the not-giving-up</a:t>
+            </a:r>
+          </a:p>
+          <a:p>
+            <a:pPr marL="274320" indent="-274320">
               <a:spcAft>
-                <a:spcPts val="650"/>
+                <a:spcPts val="800"/>
               </a:spcAft>
             </a:pPr>
             <a:r>
-              <a:rPr sz="1800" b="1" i="0">
+              <a:rPr sz="2000" b="1" i="0">
                 <a:solidFill>
                   <a:srgbClr val="97BC62"/>
                 </a:solidFill>
                 <a:latin typeface="Calibri"/>
               </a:rPr>
-              <a:t>2   </a:t>
-            </a:r>
-            <a:r>
-              <a:rPr sz="1800" b="0" i="0">
+              <a:t>•  </a:t>
+            </a:r>
+            <a:r>
+              <a:rPr sz="2000" b="0" i="0">
                 <a:solidFill>
                   <a:srgbClr val="222B22"/>
                 </a:solidFill>
                 <a:latin typeface="Calibri"/>
               </a:rPr>
-              <a:t>What have been my messages to you?</a:t>
-            </a:r>
-          </a:p>
-          <a:p>
-            <a:pPr marL="342900" indent="-342900">
+              <a:t>Nobody white-knuckles their way through years; people with a rhythm walk through years</a:t>
+            </a:r>
+          </a:p>
+          <a:p>
+            <a:pPr marL="274320" indent="-274320">
               <a:spcAft>
-                <a:spcPts val="650"/>
+                <a:spcPts val="800"/>
               </a:spcAft>
             </a:pPr>
             <a:r>
-              <a:rPr sz="1800" b="1" i="0">
+              <a:rPr sz="2000" b="1" i="0">
                 <a:solidFill>
                   <a:srgbClr val="97BC62"/>
                 </a:solidFill>
                 <a:latin typeface="Calibri"/>
               </a:rPr>
-              <a:t>3   </a:t>
-            </a:r>
-            <a:r>
-              <a:rPr sz="1800" b="0" i="0">
+              <a:t>•  </a:t>
+            </a:r>
+            <a:r>
+              <a:rPr sz="2000" b="0" i="0">
                 <a:solidFill>
                   <a:srgbClr val="222B22"/>
                 </a:solidFill>
                 <a:latin typeface="Calibri"/>
               </a:rPr>
-              <a:t>How have I wounded you?</a:t>
-            </a:r>
-          </a:p>
-          <a:p>
-            <a:pPr marL="342900" indent="-342900">
+              <a:t>The break is coming — what carries the practices across a gap is not momentum; it is a rhythm you built on purpose</a:t>
+            </a:r>
+          </a:p>
+          <a:p>
+            <a:pPr marL="274320" indent="-274320">
               <a:spcAft>
-                <a:spcPts val="650"/>
+                <a:spcPts val="800"/>
               </a:spcAft>
             </a:pPr>
             <a:r>
-              <a:rPr sz="1800" b="1" i="0">
+              <a:rPr sz="2000" b="1" i="0">
                 <a:solidFill>
                   <a:srgbClr val="97BC62"/>
                 </a:solidFill>
                 <a:latin typeface="Calibri"/>
               </a:rPr>
-              <a:t>4   </a:t>
-            </a:r>
-            <a:r>
-              <a:rPr sz="1800" b="0" i="0">
+              <a:t>•  </a:t>
+            </a:r>
+            <a:r>
+              <a:rPr sz="2000" b="0" i="0">
                 <a:solidFill>
                   <a:srgbClr val="222B22"/>
                 </a:solidFill>
                 <a:latin typeface="Calibri"/>
               </a:rPr>
-              <a:t>What would you like from me going forward?</a:t>
-            </a:r>
-          </a:p>
-          <a:p>
-            <a:pPr marL="274320" indent="-274320">
-              <a:spcAft>
-                <a:spcPts val="650"/>
-              </a:spcAft>
-            </a:pPr>
-            <a:r>
-              <a:rPr sz="1800" b="1" i="0">
-                <a:solidFill>
-                  <a:srgbClr val="97BC62"/>
-                </a:solidFill>
-                <a:latin typeface="Calibri"/>
-              </a:rPr>
-              <a:t>•  </a:t>
-            </a:r>
-            <a:r>
-              <a:rPr sz="1800" b="0" i="0">
-                <a:solidFill>
-                  <a:srgbClr val="222B22"/>
-                </a:solidFill>
-                <a:latin typeface="Calibri"/>
-              </a:rPr>
-              <a:t>The guards — willing only, both directions; receive without defending (listening questions and “thank you” only); invisible by default; a letter counts; the Section 6 boundary</a:t>
+              <a:t>So we build it tonight, before the gap, not after it</a:t>
             </a:r>
           </a:p>
         </p:txBody>
@@ -7620,7 +8430,7 @@
                 </a:solidFill>
                 <a:latin typeface="Calibri"/>
               </a:rPr>
-              <a:t>PSALM 139:23–24</a:t>
+              <a:t>GALATIANS 6:9 (ESV)</a:t>
             </a:r>
           </a:p>
           <a:p>
@@ -7636,23 +8446,7 @@
                 </a:solidFill>
                 <a:latin typeface="Cambria"/>
               </a:rPr>
-              <a:t>Asked of God, it is worship. Asked of your family, it is the bravest form of the same prayer.</a:t>
-            </a:r>
-          </a:p>
-          <a:p>
-            <a:pPr>
-              <a:spcAft>
-                <a:spcPts val="600"/>
-              </a:spcAft>
-            </a:pPr>
-            <a:r>
-              <a:rPr sz="2400" b="0" i="1">
-                <a:solidFill>
-                  <a:srgbClr val="222B22"/>
-                </a:solidFill>
-                <a:latin typeface="Cambria"/>
-              </a:rPr>
-              <a:t>James 1:19 — quick to hear, slow to speak.</a:t>
+              <a:t>“And let us not grow weary of doing good, for in due season we will reap, if we do not give up.”</a:t>
             </a:r>
           </a:p>
         </p:txBody>
@@ -7679,7 +8473,7 @@
           <a:p>
             <a:pPr algn="r"/>
             <a:r>
-              <a:t>193</a:t>
+              <a:t>189</a:t>
             </a:r>
             <a:endParaRPr sz="1000" b="1">
               <a:solidFill>
@@ -7698,7 +8492,7 @@
 </p:sld>
 </file>
 
-<file path=ppt/slides/slide194.xml><?xml version="1.0" encoding="utf-8"?>
+<file path=ppt/slides/slide7.xml><?xml version="1.0" encoding="utf-8"?>
 <p:sld xmlns:a="http://schemas.openxmlformats.org/drawingml/2006/main" xmlns:r="http://schemas.openxmlformats.org/officeDocument/2006/relationships" xmlns:p="http://schemas.openxmlformats.org/presentationml/2006/main">
   <p:cSld>
     <p:spTree>
@@ -7778,7 +8572,7 @@
                 </a:solidFill>
                 <a:latin typeface="Cambria"/>
               </a:rPr>
-              <a:t>The Leader Feedback Round</a:t>
+              <a:t>The Rhythm Card Introduced</a:t>
             </a:r>
           </a:p>
         </p:txBody>
@@ -7792,7 +8586,7 @@
         <p:spPr>
           <a:xfrm>
             <a:off x="822960" y="1554480"/>
-            <a:ext cx="6675120" cy="4892040"/>
+            <a:ext cx="10515600" cy="4892040"/>
           </a:xfrm>
           <a:prstGeom prst="rect">
             <a:avLst/>
@@ -7805,11 +8599,11 @@
           <a:p>
             <a:pPr marL="274320" indent="-274320">
               <a:spcAft>
-                <a:spcPts val="900"/>
+                <a:spcPts val="750"/>
               </a:spcAft>
             </a:pPr>
             <a:r>
-              <a:rPr sz="2800" b="1" i="0">
+              <a:rPr sz="2200" b="1" i="0">
                 <a:solidFill>
                   <a:srgbClr val="97BC62"/>
                 </a:solidFill>
@@ -7818,98 +8612,98 @@
               <a:t>•  </a:t>
             </a:r>
             <a:r>
-              <a:rPr sz="2800" b="0" i="0">
+              <a:rPr sz="2200" b="0" i="0">
                 <a:solidFill>
                   <a:srgbClr val="222B22"/>
                 </a:solidFill>
                 <a:latin typeface="Calibri"/>
               </a:rPr>
-              <a:t>Two rounds, same as every session — the container holder first, then the content presenter: three things each</a:t>
-            </a:r>
-          </a:p>
-          <a:p>
-            <a:pPr marL="685800" indent="-274320">
+              <a:t>The whole series folded into one page — you have already received every practice on this card</a:t>
+            </a:r>
+          </a:p>
+          <a:p>
+            <a:pPr marL="274320" indent="-274320">
               <a:spcAft>
-                <a:spcPts val="700"/>
+                <a:spcPts val="750"/>
               </a:spcAft>
             </a:pPr>
             <a:r>
-              <a:rPr sz="2000" b="1" i="0">
+              <a:rPr sz="2200" b="1" i="0">
                 <a:solidFill>
                   <a:srgbClr val="97BC62"/>
                 </a:solidFill>
                 <a:latin typeface="Calibri"/>
               </a:rPr>
-              <a:t>–  </a:t>
-            </a:r>
-            <a:r>
-              <a:rPr sz="2000" b="0" i="1">
+              <a:t>•  </a:t>
+            </a:r>
+            <a:r>
+              <a:rPr sz="2200" b="0" i="0">
                 <a:solidFill>
                   <a:srgbClr val="222B22"/>
                 </a:solidFill>
                 <a:latin typeface="Calibri"/>
               </a:rPr>
-              <a:t>“What I think went well tonight: ______”</a:t>
-            </a:r>
-          </a:p>
-          <a:p>
-            <a:pPr marL="685800" indent="-274320">
+              <a:t>Daily — the morning question, the evening journal note, PROAPT if the season allows</a:t>
+            </a:r>
+          </a:p>
+          <a:p>
+            <a:pPr marL="274320" indent="-274320">
               <a:spcAft>
-                <a:spcPts val="700"/>
+                <a:spcPts val="750"/>
               </a:spcAft>
             </a:pPr>
             <a:r>
-              <a:rPr sz="2000" b="1" i="0">
+              <a:rPr sz="2200" b="1" i="0">
                 <a:solidFill>
                   <a:srgbClr val="97BC62"/>
                 </a:solidFill>
                 <a:latin typeface="Calibri"/>
               </a:rPr>
-              <a:t>–  </a:t>
-            </a:r>
-            <a:r>
-              <a:rPr sz="2000" b="0" i="1">
+              <a:t>•  </a:t>
+            </a:r>
+            <a:r>
+              <a:rPr sz="2200" b="0" i="0">
                 <a:solidFill>
                   <a:srgbClr val="222B22"/>
                 </a:solidFill>
                 <a:latin typeface="Calibri"/>
               </a:rPr>
-              <a:t>“What I’d do differently next time: ______”</a:t>
-            </a:r>
-          </a:p>
-          <a:p>
-            <a:pPr marL="685800" indent="-274320">
+              <a:t>Weekly — one specific person who knows what you are working on, and a sabbath rhythm</a:t>
+            </a:r>
+          </a:p>
+          <a:p>
+            <a:pPr marL="274320" indent="-274320">
               <a:spcAft>
-                <a:spcPts val="700"/>
+                <a:spcPts val="750"/>
               </a:spcAft>
             </a:pPr>
             <a:r>
-              <a:rPr sz="2000" b="1" i="0">
+              <a:rPr sz="2200" b="1" i="0">
                 <a:solidFill>
                   <a:srgbClr val="97BC62"/>
                 </a:solidFill>
                 <a:latin typeface="Calibri"/>
               </a:rPr>
-              <a:t>–  </a:t>
-            </a:r>
-            <a:r>
-              <a:rPr sz="2000" b="0" i="1">
+              <a:t>•  </a:t>
+            </a:r>
+            <a:r>
+              <a:rPr sz="2200" b="0" i="0">
                 <a:solidFill>
                   <a:srgbClr val="222B22"/>
                 </a:solidFill>
                 <a:latin typeface="Calibri"/>
               </a:rPr>
-              <a:t>“If I were to teach tonight’s process to someone, I would tell them: ______”</a:t>
+              <a:t>Monthly — a clearing time and a Four-Connects review. Seasonally — the deeper work</a:t>
             </a:r>
           </a:p>
           <a:p>
             <a:pPr marL="274320" indent="-274320">
               <a:spcAft>
-                <a:spcPts val="900"/>
+                <a:spcPts val="750"/>
               </a:spcAft>
             </a:pPr>
             <a:r>
-              <a:rPr sz="2800" b="1" i="0">
+              <a:rPr sz="2200" b="1" i="0">
                 <a:solidFill>
                   <a:srgbClr val="97BC62"/>
                 </a:solidFill>
@@ -7918,23 +8712,23 @@
               <a:t>•  </a:t>
             </a:r>
             <a:r>
-              <a:rPr sz="2800" b="0" i="0">
+              <a:rPr sz="2200" b="0" i="0">
                 <a:solidFill>
                   <a:srgbClr val="222B22"/>
                 </a:solidFill>
                 <a:latin typeface="Calibri"/>
               </a:rPr>
-              <a:t>Then the room — the same two questions about tonight</a:t>
+              <a:t>One rule for the build: “write the rhythm you will actually keep, not the one that impresses you”</a:t>
             </a:r>
           </a:p>
           <a:p>
             <a:pPr marL="274320" indent="-274320">
               <a:spcAft>
-                <a:spcPts val="900"/>
+                <a:spcPts val="750"/>
               </a:spcAft>
             </a:pPr>
             <a:r>
-              <a:rPr sz="2800" b="1" i="0">
+              <a:rPr sz="2200" b="1" i="0">
                 <a:solidFill>
                   <a:srgbClr val="97BC62"/>
                 </a:solidFill>
@@ -7943,13 +8737,13 @@
               <a:t>•  </a:t>
             </a:r>
             <a:r>
-              <a:rPr sz="2800" b="0" i="0">
+              <a:rPr sz="2200" b="0" i="0">
                 <a:solidFill>
                   <a:srgbClr val="222B22"/>
                 </a:solidFill>
                 <a:latin typeface="Calibri"/>
               </a:rPr>
-              <a:t>The leaders receive without defending — “thank you” is the whole response</a:t>
+              <a:t>The starter plan begins with two practices totaling six minutes a day — six honest minutes is a real rhythm</a:t>
             </a:r>
           </a:p>
         </p:txBody>
@@ -7976,7 +8770,7 @@
           <a:p>
             <a:pPr algn="r"/>
             <a:r>
-              <a:t>194</a:t>
+              <a:t>190</a:t>
             </a:r>
             <a:endParaRPr sz="1000" b="1">
               <a:solidFill>
@@ -7987,42 +8781,6 @@
           </a:p>
         </p:txBody>
       </p:sp>
-      <p:pic>
-        <p:nvPicPr>
-          <p:cNvPr id="33" name="Picture 33" descr="compass on the trail - the weekly bearing check"/>
-          <p:cNvPicPr>
-            <a:picLocks noChangeAspect="1"/>
-          </p:cNvPicPr>
-          <p:nvPr/>
-        </p:nvPicPr>
-        <p:blipFill>
-          <a:blip r:embed="rId3"/>
-          <a:stretch>
-            <a:fillRect/>
-          </a:stretch>
-        </p:blipFill>
-        <p:spPr>
-          <a:xfrm>
-            <a:off x="8106160" y="1463040"/>
-            <a:ext cx="3259831" cy="4892040"/>
-          </a:xfrm>
-          <a:prstGeom prst="rect">
-            <a:avLst/>
-          </a:prstGeom>
-          <a:ln w="76200">
-            <a:solidFill>
-              <a:srgbClr val="FFFFFF"/>
-            </a:solidFill>
-          </a:ln>
-          <a:effectLst>
-            <a:outerShdw blurRad="63500" dist="25400" dir="5400000" rotWithShape="0">
-              <a:srgbClr val="000000">
-                <a:alpha val="35000"/>
-              </a:srgbClr>
-            </a:outerShdw>
-          </a:effectLst>
-        </p:spPr>
-      </p:pic>
     </p:spTree>
   </p:cSld>
   <p:clrMapOvr>
@@ -8031,7 +8789,7 @@
 </p:sld>
 </file>
 
-<file path=ppt/slides/slide195.xml><?xml version="1.0" encoding="utf-8"?>
+<file path=ppt/slides/slide8.xml><?xml version="1.0" encoding="utf-8"?>
 <p:sld xmlns:a="http://schemas.openxmlformats.org/drawingml/2006/main" xmlns:r="http://schemas.openxmlformats.org/officeDocument/2006/relationships" xmlns:p="http://schemas.openxmlformats.org/presentationml/2006/main">
   <p:cSld>
     <p:spTree>
@@ -8111,21 +8869,21 @@
                 </a:solidFill>
                 <a:latin typeface="Cambria"/>
               </a:rPr>
-              <a:t>Closing the Container + Aaronic Blessing</a:t>
-            </a:r>
-          </a:p>
-        </p:txBody>
-      </p:sp>
-      <p:sp>
-        <p:nvSpPr>
-          <p:cNvPr id="4" name="TextBox 4"/>
+              <a:t>A Rhythm You Can See — One Morning Flow</a:t>
+            </a:r>
+          </a:p>
+        </p:txBody>
+      </p:sp>
+      <p:sp>
+        <p:nvSpPr>
+          <p:cNvPr id="90" name="SlideNum"/>
           <p:cNvSpPr txBox="1"/>
           <p:nvPr/>
         </p:nvSpPr>
         <p:spPr>
           <a:xfrm>
-            <a:off x="822960" y="1600200"/>
-            <a:ext cx="5669280" cy="4572000"/>
+            <a:off x="11384280" y="6446520"/>
+            <a:ext cx="640080" cy="292608"/>
           </a:xfrm>
           <a:prstGeom prst="rect">
             <a:avLst/>
@@ -8133,295 +8891,12 @@
           <a:noFill/>
         </p:spPr>
         <p:txBody>
-          <a:bodyPr wrap="square" lIns="91440" tIns="91440" rIns="91440" bIns="91440"/>
-          <a:lstStyle/>
-          <a:p>
-            <a:pPr marL="274320" indent="-274320">
-              <a:spcAft>
-                <a:spcPts val="900"/>
-              </a:spcAft>
-            </a:pPr>
-            <a:r>
-              <a:rPr sz="2200" b="1" i="0">
-                <a:solidFill>
-                  <a:srgbClr val="97BC62"/>
-                </a:solidFill>
-                <a:latin typeface="Calibri"/>
-              </a:rPr>
-              <a:t>•  </a:t>
-            </a:r>
-            <a:r>
-              <a:rPr sz="2200" b="0" i="0">
-                <a:solidFill>
-                  <a:srgbClr val="222B22"/>
-                </a:solidFill>
-                <a:latin typeface="Calibri"/>
-              </a:rPr>
-              <a:t>We close the way we opened — the container, six steps:</a:t>
-            </a:r>
-          </a:p>
-          <a:p>
-            <a:pPr marL="685800" indent="-274320">
-              <a:spcAft>
-                <a:spcPts val="700"/>
-              </a:spcAft>
-            </a:pPr>
-            <a:r>
-              <a:rPr sz="2000" b="1" i="0">
-                <a:solidFill>
-                  <a:srgbClr val="97BC62"/>
-                </a:solidFill>
-                <a:latin typeface="Calibri"/>
-              </a:rPr>
-              <a:t>1   </a:t>
-            </a:r>
-            <a:r>
-              <a:rPr sz="2000" b="0" i="0">
-                <a:solidFill>
-                  <a:srgbClr val="222B22"/>
-                </a:solidFill>
-                <a:latin typeface="Calibri"/>
-              </a:rPr>
-              <a:t>Stand again — same circle, same posture as the open</a:t>
-            </a:r>
-          </a:p>
-          <a:p>
-            <a:pPr marL="685800" indent="-274320">
-              <a:spcAft>
-                <a:spcPts val="700"/>
-              </a:spcAft>
-            </a:pPr>
-            <a:r>
-              <a:rPr sz="2000" b="1" i="0">
-                <a:solidFill>
-                  <a:srgbClr val="97BC62"/>
-                </a:solidFill>
-                <a:latin typeface="Calibri"/>
-              </a:rPr>
-              <a:t>2   </a:t>
-            </a:r>
-            <a:r>
-              <a:rPr sz="2000" b="0" i="0">
-                <a:solidFill>
-                  <a:srgbClr val="222B22"/>
-                </a:solidFill>
-                <a:latin typeface="Calibri"/>
-              </a:rPr>
-              <a:t>One-word landing — compare it to your opening word</a:t>
-            </a:r>
-          </a:p>
-          <a:p>
-            <a:pPr marL="685800" indent="-274320">
-              <a:spcAft>
-                <a:spcPts val="700"/>
-              </a:spcAft>
-            </a:pPr>
-            <a:r>
-              <a:rPr sz="2000" b="1" i="0">
-                <a:solidFill>
-                  <a:srgbClr val="97BC62"/>
-                </a:solidFill>
-                <a:latin typeface="Calibri"/>
-              </a:rPr>
-              <a:t>3   </a:t>
-            </a:r>
-            <a:r>
-              <a:rPr sz="2000" b="0" i="0">
-                <a:solidFill>
-                  <a:srgbClr val="222B22"/>
-                </a:solidFill>
-                <a:latin typeface="Calibri"/>
-              </a:rPr>
-              <a:t>The one thing you are taking from tonight</a:t>
-            </a:r>
-          </a:p>
-          <a:p>
-            <a:pPr marL="685800" indent="-274320">
-              <a:spcAft>
-                <a:spcPts val="700"/>
-              </a:spcAft>
-            </a:pPr>
-            <a:r>
-              <a:rPr sz="2000" b="1" i="0">
-                <a:solidFill>
-                  <a:srgbClr val="97BC62"/>
-                </a:solidFill>
-                <a:latin typeface="Calibri"/>
-              </a:rPr>
-              <a:t>4   </a:t>
-            </a:r>
-            <a:r>
-              <a:rPr sz="2000" b="0" i="0">
-                <a:solidFill>
-                  <a:srgbClr val="222B22"/>
-                </a:solidFill>
-                <a:latin typeface="Calibri"/>
-              </a:rPr>
-              <a:t>The one practice — committed aloud, or modified to one you will actually keep</a:t>
-            </a:r>
-          </a:p>
-          <a:p>
-            <a:pPr marL="685800" indent="-274320">
-              <a:spcAft>
-                <a:spcPts val="700"/>
-              </a:spcAft>
-            </a:pPr>
-            <a:r>
-              <a:rPr sz="2000" b="1" i="0">
-                <a:solidFill>
-                  <a:srgbClr val="97BC62"/>
-                </a:solidFill>
-                <a:latin typeface="Calibri"/>
-              </a:rPr>
-              <a:t>5   </a:t>
-            </a:r>
-            <a:r>
-              <a:rPr sz="2000" b="0" i="0">
-                <a:solidFill>
-                  <a:srgbClr val="222B22"/>
-                </a:solidFill>
-                <a:latin typeface="Calibri"/>
-              </a:rPr>
-              <a:t>Blessings — specific, witnessed, short</a:t>
-            </a:r>
-          </a:p>
-          <a:p>
-            <a:pPr marL="685800" indent="-274320">
-              <a:spcAft>
-                <a:spcPts val="700"/>
-              </a:spcAft>
-            </a:pPr>
-            <a:r>
-              <a:rPr sz="2000" b="1" i="0">
-                <a:solidFill>
-                  <a:srgbClr val="97BC62"/>
-                </a:solidFill>
-                <a:latin typeface="Calibri"/>
-              </a:rPr>
-              <a:t>6   </a:t>
-            </a:r>
-            <a:r>
-              <a:rPr sz="2000" b="0" i="0">
-                <a:solidFill>
-                  <a:srgbClr val="222B22"/>
-                </a:solidFill>
-                <a:latin typeface="Calibri"/>
-              </a:rPr>
-              <a:t>Closing prayer — and the Aaronic blessing, spoken over each other, face to face</a:t>
-            </a:r>
-          </a:p>
-        </p:txBody>
-      </p:sp>
-      <p:sp>
-        <p:nvSpPr>
-          <p:cNvPr id="6" name="TextBox 6"/>
-          <p:cNvSpPr txBox="1"/>
-          <p:nvPr/>
-        </p:nvSpPr>
-        <p:spPr>
-          <a:xfrm>
-            <a:off x="6766560" y="1737360"/>
-            <a:ext cx="4663440" cy="2926080"/>
-          </a:xfrm>
-          <a:prstGeom prst="rect">
-            <a:avLst/>
-          </a:prstGeom>
-          <a:solidFill>
-            <a:srgbClr val="F1F6EC"/>
-          </a:solidFill>
-        </p:spPr>
-        <p:txBody>
-          <a:bodyPr wrap="square" lIns="91440" tIns="91440" rIns="91440" bIns="91440" anchor="ctr"/>
-          <a:lstStyle/>
-          <a:p>
-            <a:pPr>
-              <a:spcAft>
-                <a:spcPts val="900"/>
-              </a:spcAft>
-            </a:pPr>
-            <a:r>
-              <a:rPr sz="1200" b="1" i="0">
-                <a:solidFill>
-                  <a:srgbClr val="97BC62"/>
-                </a:solidFill>
-                <a:latin typeface="Calibri"/>
-              </a:rPr>
-              <a:t>THE AARONIC BLESSING — NUMBERS 6:24–26</a:t>
-            </a:r>
-          </a:p>
-          <a:p>
-            <a:pPr>
-              <a:spcAft>
-                <a:spcPts val="600"/>
-              </a:spcAft>
-            </a:pPr>
-            <a:r>
-              <a:rPr sz="2400" b="0" i="1">
-                <a:solidFill>
-                  <a:srgbClr val="222B22"/>
-                </a:solidFill>
-                <a:latin typeface="Cambria"/>
-              </a:rPr>
-              <a:t>“The Lord bless you and keep you;</a:t>
-            </a:r>
-          </a:p>
-          <a:p>
-            <a:pPr>
-              <a:spcAft>
-                <a:spcPts val="600"/>
-              </a:spcAft>
-            </a:pPr>
-            <a:r>
-              <a:rPr sz="2400" b="0" i="1">
-                <a:solidFill>
-                  <a:srgbClr val="222B22"/>
-                </a:solidFill>
-                <a:latin typeface="Cambria"/>
-              </a:rPr>
-              <a:t>the Lord make his face to shine upon you, and be gracious to you;</a:t>
-            </a:r>
-          </a:p>
-          <a:p>
-            <a:pPr>
-              <a:spcAft>
-                <a:spcPts val="600"/>
-              </a:spcAft>
-            </a:pPr>
-            <a:r>
-              <a:rPr sz="2400" b="0" i="1">
-                <a:solidFill>
-                  <a:srgbClr val="222B22"/>
-                </a:solidFill>
-                <a:latin typeface="Cambria"/>
-              </a:rPr>
-              <a:t>the Lord lift up his countenance upon you, and give you peace.”</a:t>
-            </a:r>
-          </a:p>
-        </p:txBody>
-      </p:sp>
-      <p:sp>
-        <p:nvSpPr>
-          <p:cNvPr id="90" name="SlideNum"/>
-          <p:cNvSpPr txBox="1"/>
-          <p:nvPr/>
-        </p:nvSpPr>
-        <p:spPr>
-          <a:xfrm>
-            <a:off x="11384280" y="6446520"/>
-            <a:ext cx="640080" cy="292608"/>
-          </a:xfrm>
-          <a:prstGeom prst="rect">
-            <a:avLst/>
-          </a:prstGeom>
-          <a:noFill/>
-        </p:spPr>
-        <p:txBody>
           <a:bodyPr wrap="none" lIns="0" tIns="0" rIns="45720" bIns="0" anchor="ctr"/>
           <a:lstStyle/>
           <a:p>
             <a:pPr algn="r"/>
             <a:r>
-              <a:t>195</a:t>
+              <a:t>191</a:t>
             </a:r>
             <a:endParaRPr sz="1000" b="1">
               <a:solidFill>
@@ -8429,6 +8904,315 @@
               </a:solidFill>
               <a:latin typeface="Calibri"/>
             </a:endParaRPr>
+          </a:p>
+        </p:txBody>
+      </p:sp>
+      <p:pic>
+        <p:nvPicPr>
+          <p:cNvPr id="100" name="Flow 1" descr="a bench above an evening valley"/>
+          <p:cNvPicPr>
+            <a:picLocks noChangeAspect="1"/>
+          </p:cNvPicPr>
+          <p:nvPr/>
+        </p:nvPicPr>
+        <p:blipFill>
+          <a:blip r:embed="rId3"/>
+          <a:stretch>
+            <a:fillRect/>
+          </a:stretch>
+        </p:blipFill>
+        <p:spPr>
+          <a:xfrm>
+            <a:off x="822960" y="1691640"/>
+            <a:ext cx="2450592" cy="3264408"/>
+          </a:xfrm>
+          <a:prstGeom prst="rect">
+            <a:avLst/>
+          </a:prstGeom>
+          <a:ln w="76200">
+            <a:solidFill>
+              <a:srgbClr val="FFFFFF"/>
+            </a:solidFill>
+          </a:ln>
+          <a:effectLst>
+            <a:outerShdw blurRad="63500" dist="25400" dir="5400000" rotWithShape="0">
+              <a:srgbClr val="000000">
+                <a:alpha val="35000"/>
+              </a:srgbClr>
+            </a:outerShdw>
+          </a:effectLst>
+        </p:spPr>
+      </p:pic>
+      <p:sp>
+        <p:nvSpPr>
+          <p:cNvPr id="110" name="Cap 1"/>
+          <p:cNvSpPr txBox="1"/>
+          <p:nvPr/>
+        </p:nvSpPr>
+        <p:spPr>
+          <a:xfrm>
+            <a:off x="822960" y="5047488"/>
+            <a:ext cx="2450592" cy="365760"/>
+          </a:xfrm>
+          <a:prstGeom prst="rect">
+            <a:avLst/>
+          </a:prstGeom>
+          <a:noFill/>
+        </p:spPr>
+        <p:txBody>
+          <a:bodyPr wrap="square"/>
+          <a:lstStyle/>
+          <a:p>
+            <a:pPr algn="ctr"/>
+            <a:r>
+              <a:rPr sz="1800" b="1">
+                <a:solidFill>
+                  <a:srgbClr val="97BC62"/>
+                </a:solidFill>
+                <a:latin typeface="Calibri"/>
+              </a:rPr>
+              <a:t>GROUNDED</a:t>
+            </a:r>
+          </a:p>
+        </p:txBody>
+      </p:sp>
+      <p:pic>
+        <p:nvPicPr>
+          <p:cNvPr id="101" name="Flow 2" descr="an open Bible beside a quiet chair"/>
+          <p:cNvPicPr>
+            <a:picLocks noChangeAspect="1"/>
+          </p:cNvPicPr>
+          <p:nvPr/>
+        </p:nvPicPr>
+        <p:blipFill>
+          <a:blip r:embed="rId4"/>
+          <a:stretch>
+            <a:fillRect/>
+          </a:stretch>
+        </p:blipFill>
+        <p:spPr>
+          <a:xfrm>
+            <a:off x="3502152" y="1691640"/>
+            <a:ext cx="2450592" cy="3264408"/>
+          </a:xfrm>
+          <a:prstGeom prst="rect">
+            <a:avLst/>
+          </a:prstGeom>
+          <a:ln w="76200">
+            <a:solidFill>
+              <a:srgbClr val="FFFFFF"/>
+            </a:solidFill>
+          </a:ln>
+          <a:effectLst>
+            <a:outerShdw blurRad="63500" dist="25400" dir="5400000" rotWithShape="0">
+              <a:srgbClr val="000000">
+                <a:alpha val="35000"/>
+              </a:srgbClr>
+            </a:outerShdw>
+          </a:effectLst>
+        </p:spPr>
+      </p:pic>
+      <p:sp>
+        <p:nvSpPr>
+          <p:cNvPr id="111" name="Cap 2"/>
+          <p:cNvSpPr txBox="1"/>
+          <p:nvPr/>
+        </p:nvSpPr>
+        <p:spPr>
+          <a:xfrm>
+            <a:off x="3502152" y="5047488"/>
+            <a:ext cx="2450592" cy="365760"/>
+          </a:xfrm>
+          <a:prstGeom prst="rect">
+            <a:avLst/>
+          </a:prstGeom>
+          <a:noFill/>
+        </p:spPr>
+        <p:txBody>
+          <a:bodyPr wrap="square"/>
+          <a:lstStyle/>
+          <a:p>
+            <a:pPr algn="ctr"/>
+            <a:r>
+              <a:rPr sz="1800" b="1">
+                <a:solidFill>
+                  <a:srgbClr val="97BC62"/>
+                </a:solidFill>
+                <a:latin typeface="Calibri"/>
+              </a:rPr>
+              <a:t>LISTENING</a:t>
+            </a:r>
+          </a:p>
+        </p:txBody>
+      </p:sp>
+      <p:pic>
+        <p:nvPicPr>
+          <p:cNvPr id="102" name="Flow 3" descr="rings widening on still water"/>
+          <p:cNvPicPr>
+            <a:picLocks noChangeAspect="1"/>
+          </p:cNvPicPr>
+          <p:nvPr/>
+        </p:nvPicPr>
+        <p:blipFill>
+          <a:blip r:embed="rId5"/>
+          <a:stretch>
+            <a:fillRect/>
+          </a:stretch>
+        </p:blipFill>
+        <p:spPr>
+          <a:xfrm>
+            <a:off x="6181344" y="1691640"/>
+            <a:ext cx="2450592" cy="3264408"/>
+          </a:xfrm>
+          <a:prstGeom prst="rect">
+            <a:avLst/>
+          </a:prstGeom>
+          <a:ln w="76200">
+            <a:solidFill>
+              <a:srgbClr val="FFFFFF"/>
+            </a:solidFill>
+          </a:ln>
+          <a:effectLst>
+            <a:outerShdw blurRad="63500" dist="25400" dir="5400000" rotWithShape="0">
+              <a:srgbClr val="000000">
+                <a:alpha val="35000"/>
+              </a:srgbClr>
+            </a:outerShdw>
+          </a:effectLst>
+        </p:spPr>
+      </p:pic>
+      <p:sp>
+        <p:nvSpPr>
+          <p:cNvPr id="112" name="Cap 3"/>
+          <p:cNvSpPr txBox="1"/>
+          <p:nvPr/>
+        </p:nvSpPr>
+        <p:spPr>
+          <a:xfrm>
+            <a:off x="6181344" y="5047488"/>
+            <a:ext cx="2450592" cy="365760"/>
+          </a:xfrm>
+          <a:prstGeom prst="rect">
+            <a:avLst/>
+          </a:prstGeom>
+          <a:noFill/>
+        </p:spPr>
+        <p:txBody>
+          <a:bodyPr wrap="square"/>
+          <a:lstStyle/>
+          <a:p>
+            <a:pPr algn="ctr"/>
+            <a:r>
+              <a:rPr sz="1800" b="1">
+                <a:solidFill>
+                  <a:srgbClr val="97BC62"/>
+                </a:solidFill>
+                <a:latin typeface="Calibri"/>
+              </a:rPr>
+              <a:t>CHANGED, RIPPLING</a:t>
+            </a:r>
+          </a:p>
+        </p:txBody>
+      </p:sp>
+      <p:pic>
+        <p:nvPicPr>
+          <p:cNvPr id="103" name="Flow 4" descr="a hiker leaping between two rocks"/>
+          <p:cNvPicPr>
+            <a:picLocks noChangeAspect="1"/>
+          </p:cNvPicPr>
+          <p:nvPr/>
+        </p:nvPicPr>
+        <p:blipFill>
+          <a:blip r:embed="rId6"/>
+          <a:stretch>
+            <a:fillRect/>
+          </a:stretch>
+        </p:blipFill>
+        <p:spPr>
+          <a:xfrm>
+            <a:off x="8860536" y="1691640"/>
+            <a:ext cx="2450592" cy="3264408"/>
+          </a:xfrm>
+          <a:prstGeom prst="rect">
+            <a:avLst/>
+          </a:prstGeom>
+          <a:ln w="76200">
+            <a:solidFill>
+              <a:srgbClr val="FFFFFF"/>
+            </a:solidFill>
+          </a:ln>
+          <a:effectLst>
+            <a:outerShdw blurRad="63500" dist="25400" dir="5400000" rotWithShape="0">
+              <a:srgbClr val="000000">
+                <a:alpha val="35000"/>
+              </a:srgbClr>
+            </a:outerShdw>
+          </a:effectLst>
+        </p:spPr>
+      </p:pic>
+      <p:sp>
+        <p:nvSpPr>
+          <p:cNvPr id="113" name="Cap 4"/>
+          <p:cNvSpPr txBox="1"/>
+          <p:nvPr/>
+        </p:nvSpPr>
+        <p:spPr>
+          <a:xfrm>
+            <a:off x="8860536" y="5047488"/>
+            <a:ext cx="2450592" cy="365760"/>
+          </a:xfrm>
+          <a:prstGeom prst="rect">
+            <a:avLst/>
+          </a:prstGeom>
+          <a:noFill/>
+        </p:spPr>
+        <p:txBody>
+          <a:bodyPr wrap="square"/>
+          <a:lstStyle/>
+          <a:p>
+            <a:pPr algn="ctr"/>
+            <a:r>
+              <a:rPr sz="1800" b="1">
+                <a:solidFill>
+                  <a:srgbClr val="97BC62"/>
+                </a:solidFill>
+                <a:latin typeface="Calibri"/>
+              </a:rPr>
+              <a:t>LEAPING</a:t>
+            </a:r>
+          </a:p>
+        </p:txBody>
+      </p:sp>
+      <p:sp>
+        <p:nvSpPr>
+          <p:cNvPr id="120" name="FlowLine"/>
+          <p:cNvSpPr txBox="1"/>
+          <p:nvPr/>
+        </p:nvSpPr>
+        <p:spPr>
+          <a:xfrm>
+            <a:off x="822960" y="5623560"/>
+            <a:ext cx="10515600" cy="731520"/>
+          </a:xfrm>
+          <a:prstGeom prst="rect">
+            <a:avLst/>
+          </a:prstGeom>
+          <a:noFill/>
+        </p:spPr>
+        <p:txBody>
+          <a:bodyPr wrap="square"/>
+          <a:lstStyle/>
+          <a:p>
+            <a:pPr algn="l"/>
+            <a:r>
+              <a:rPr sz="1800" i="1">
+                <a:solidFill>
+                  <a:srgbClr val="222B22"/>
+                </a:solidFill>
+                <a:latin typeface="Calibri"/>
+              </a:rPr>
+              <a:t>The founder’s own morning flow — four images, one motto, kept for years. Yours will look different. The journal has a page waiting for it.</a:t>
+            </a:r>
           </a:p>
         </p:txBody>
       </p:sp>
@@ -8440,7 +9224,7 @@
 </p:sld>
 </file>
 
-<file path=ppt/slides/slide196.xml><?xml version="1.0" encoding="utf-8"?>
+<file path=ppt/slides/slide9.xml><?xml version="1.0" encoding="utf-8"?>
 <p:sld xmlns:a="http://schemas.openxmlformats.org/drawingml/2006/main" xmlns:r="http://schemas.openxmlformats.org/officeDocument/2006/relationships" xmlns:p="http://schemas.openxmlformats.org/presentationml/2006/main">
   <p:cSld>
     <p:spTree>
@@ -8520,7 +9304,7 @@
                 </a:solidFill>
                 <a:latin typeface="Cambria"/>
               </a:rPr>
-              <a:t>Homework — Two Weeks, Four Parts — This Week and Across the Break</a:t>
+              <a:t>Building Your Rhythm Card</a:t>
             </a:r>
           </a:p>
         </p:txBody>
@@ -8534,7 +9318,7 @@
         <p:spPr>
           <a:xfrm>
             <a:off x="822960" y="1554480"/>
-            <a:ext cx="6675120" cy="4892040"/>
+            <a:ext cx="10515600" cy="4892040"/>
           </a:xfrm>
           <a:prstGeom prst="rect">
             <a:avLst/>
@@ -8551,7 +9335,7 @@
               </a:spcAft>
             </a:pPr>
             <a:r>
-              <a:rPr sz="2200" b="1" i="0">
+              <a:rPr sz="2400" b="1" i="0">
                 <a:solidFill>
                   <a:srgbClr val="97BC62"/>
                 </a:solidFill>
@@ -8560,13 +9344,13 @@
               <a:t>•  </a:t>
             </a:r>
             <a:r>
-              <a:rPr sz="2200" b="0" i="0">
+              <a:rPr sz="2400" b="0" i="0">
                 <a:solidFill>
                   <a:srgbClr val="222B22"/>
                 </a:solidFill>
                 <a:latin typeface="Calibri"/>
               </a:rPr>
-              <a:t>The Four Questions (for the willing) — the parent asks their teen at home; married parents also ask their spouse, separately. “Not yet” is a full answer for everyone</a:t>
+              <a:t>Twenty minutes in pairs — in your own handwriting, on the build sheet</a:t>
             </a:r>
           </a:p>
           <a:p>
@@ -8576,7 +9360,7 @@
               </a:spcAft>
             </a:pPr>
             <a:r>
-              <a:rPr sz="2200" b="1" i="0">
+              <a:rPr sz="2400" b="1" i="0">
                 <a:solidFill>
                   <a:srgbClr val="97BC62"/>
                 </a:solidFill>
@@ -8585,13 +9369,13 @@
               <a:t>•  </a:t>
             </a:r>
             <a:r>
-              <a:rPr sz="2200" b="0" i="0">
+              <a:rPr sz="2400" b="0" i="0">
                 <a:solidFill>
                   <a:srgbClr val="222B22"/>
                 </a:solidFill>
                 <a:latin typeface="Calibri"/>
               </a:rPr>
-              <a:t>Run the Rhythm Card as built — for real, at the times and places written on it; the break is its first field test</a:t>
+              <a:t>Specific beats vague — “morning question, 6:50, kitchen table, before my phone” is a rhythm</a:t>
             </a:r>
           </a:p>
           <a:p>
@@ -8601,7 +9385,7 @@
               </a:spcAft>
             </a:pPr>
             <a:r>
-              <a:rPr sz="2200" b="1" i="0">
+              <a:rPr sz="2400" b="1" i="0">
                 <a:solidFill>
                   <a:srgbClr val="97BC62"/>
                 </a:solidFill>
@@ -8610,13 +9394,13 @@
               <a:t>•  </a:t>
             </a:r>
             <a:r>
-              <a:rPr sz="2200" b="0" i="0">
+              <a:rPr sz="2400" b="0" i="0">
                 <a:solidFill>
                   <a:srgbClr val="222B22"/>
                 </a:solidFill>
                 <a:latin typeface="Calibri"/>
               </a:rPr>
-              <a:t>Journal the holds and the slips — one line a day; no fixing, no guilt-engine. The slips are data, not verdicts</a:t>
+              <a:t>The weekly partner line is the most important line on the sheet — name an actual person</a:t>
             </a:r>
           </a:p>
           <a:p>
@@ -8626,7 +9410,7 @@
               </a:spcAft>
             </a:pPr>
             <a:r>
-              <a:rPr sz="2200" b="1" i="0">
+              <a:rPr sz="2400" b="1" i="0">
                 <a:solidFill>
                   <a:srgbClr val="97BC62"/>
                 </a:solidFill>
@@ -8635,13 +9419,13 @@
               <a:t>•  </a:t>
             </a:r>
             <a:r>
-              <a:rPr sz="2200" b="0" i="0">
+              <a:rPr sz="2400" b="0" i="0">
                 <a:solidFill>
                   <a:srgbClr val="222B22"/>
                 </a:solidFill>
                 <a:latin typeface="Calibri"/>
               </a:rPr>
-              <a:t>The returning rule — miss a day: begin again on the next available day. Do not start over; do not double up. Returning is the goal</a:t>
+              <a:t>Build down, not up — which two practices survive exam season? Start there; the card lets you add later</a:t>
             </a:r>
           </a:p>
           <a:p>
@@ -8651,7 +9435,7 @@
               </a:spcAft>
             </a:pPr>
             <a:r>
-              <a:rPr sz="2200" b="1" i="0">
+              <a:rPr sz="2400" b="1" i="0">
                 <a:solidFill>
                   <a:srgbClr val="97BC62"/>
                 </a:solidFill>
@@ -8660,13 +9444,13 @@
               <a:t>•  </a:t>
             </a:r>
             <a:r>
-              <a:rPr sz="2200" b="0" i="0">
+              <a:rPr sz="2400" b="0" i="0">
                 <a:solidFill>
                   <a:srgbClr val="222B22"/>
                 </a:solidFill>
                 <a:latin typeface="Calibri"/>
               </a:rPr>
-              <a:t>The morning question and evening note continue inside the rhythm — the practices have stopped being assignments and become a life</a:t>
+              <a:t>Close: each participant reads their daily line aloud to the pair — a parent first; pass-anytime holds</a:t>
             </a:r>
           </a:p>
         </p:txBody>
@@ -8693,7 +9477,7 @@
           <a:p>
             <a:pPr algn="r"/>
             <a:r>
-              <a:t>196</a:t>
+              <a:t>192</a:t>
             </a:r>
             <a:endParaRPr sz="1000" b="1">
               <a:solidFill>
@@ -8701,237 +9485,6 @@
               </a:solidFill>
               <a:latin typeface="Calibri"/>
             </a:endParaRPr>
-          </a:p>
-        </p:txBody>
-      </p:sp>
-      <p:pic>
-        <p:nvPicPr>
-          <p:cNvPr id="33" name="Picture 33" descr="seedling - what grows between Wednesdays"/>
-          <p:cNvPicPr>
-            <a:picLocks noChangeAspect="1"/>
-          </p:cNvPicPr>
-          <p:nvPr/>
-        </p:nvPicPr>
-        <p:blipFill>
-          <a:blip r:embed="rId3"/>
-          <a:stretch>
-            <a:fillRect/>
-          </a:stretch>
-        </p:blipFill>
-        <p:spPr>
-          <a:xfrm>
-            <a:off x="8103612" y="1463040"/>
-            <a:ext cx="3262379" cy="4892040"/>
-          </a:xfrm>
-          <a:prstGeom prst="rect">
-            <a:avLst/>
-          </a:prstGeom>
-          <a:ln w="76200">
-            <a:solidFill>
-              <a:srgbClr val="FFFFFF"/>
-            </a:solidFill>
-          </a:ln>
-          <a:effectLst>
-            <a:outerShdw blurRad="63500" dist="25400" dir="5400000" rotWithShape="0">
-              <a:srgbClr val="000000">
-                <a:alpha val="35000"/>
-              </a:srgbClr>
-            </a:outerShdw>
-          </a:effectLst>
-        </p:spPr>
-      </p:pic>
-    </p:spTree>
-  </p:cSld>
-  <p:clrMapOvr>
-    <a:masterClrMapping/>
-  </p:clrMapOvr>
-</p:sld>
-</file>
-
-<file path=ppt/slides/slide197.xml><?xml version="1.0" encoding="utf-8"?>
-<p:sld xmlns:a="http://schemas.openxmlformats.org/drawingml/2006/main" xmlns:r="http://schemas.openxmlformats.org/officeDocument/2006/relationships" xmlns:p="http://schemas.openxmlformats.org/presentationml/2006/main">
-  <p:cSld>
-    <p:spTree>
-      <p:nvGrpSpPr>
-        <p:cNvPr id="1" name=""/>
-        <p:cNvGrpSpPr/>
-        <p:nvPr/>
-      </p:nvGrpSpPr>
-      <p:grpSpPr>
-        <a:xfrm>
-          <a:off x="0" y="0"/>
-          <a:ext cx="0" cy="0"/>
-          <a:chOff x="0" y="0"/>
-          <a:chExt cx="0" cy="0"/>
-        </a:xfrm>
-      </p:grpSpPr>
-      <p:sp>
-        <p:nvSpPr>
-          <p:cNvPr id="2" name="Rectangle 1"/>
-          <p:cNvSpPr/>
-          <p:nvPr/>
-        </p:nvSpPr>
-        <p:spPr>
-          <a:xfrm>
-            <a:off x="0" y="0"/>
-            <a:ext cx="12191695" cy="6858000"/>
-          </a:xfrm>
-          <a:prstGeom prst="rect">
-            <a:avLst/>
-          </a:prstGeom>
-          <a:solidFill>
-            <a:srgbClr val="FFFFFF"/>
-          </a:solidFill>
-          <a:ln>
-            <a:noFill/>
-          </a:ln>
-        </p:spPr>
-        <p:txBody>
-          <a:bodyPr/>
-          <a:lstStyle/>
-          <a:p>
-            <a:endParaRPr/>
-          </a:p>
-        </p:txBody>
-      </p:sp>
-      <p:sp>
-        <p:nvSpPr>
-          <p:cNvPr id="3" name="TextBox 2"/>
-          <p:cNvSpPr txBox="1"/>
-          <p:nvPr/>
-        </p:nvSpPr>
-        <p:spPr>
-          <a:xfrm>
-            <a:off x="822960" y="502920"/>
-            <a:ext cx="10515600" cy="822960"/>
-          </a:xfrm>
-          <a:prstGeom prst="rect">
-            <a:avLst/>
-          </a:prstGeom>
-          <a:noFill/>
-        </p:spPr>
-        <p:txBody>
-          <a:bodyPr wrap="square">
-            <a:spAutoFit/>
-          </a:bodyPr>
-          <a:lstStyle/>
-          <a:p>
-            <a:pPr algn="l">
-              <a:spcAft>
-                <a:spcPts val="600"/>
-              </a:spcAft>
-            </a:pPr>
-            <a:r>
-              <a:rPr sz="2800" b="1" i="0">
-                <a:solidFill>
-                  <a:srgbClr val="2C5F2D"/>
-                </a:solidFill>
-                <a:latin typeface="Cambria"/>
-              </a:rPr>
-              <a:t>Your Take-Home Card — This Session’s Practice</a:t>
-            </a:r>
-          </a:p>
-        </p:txBody>
-      </p:sp>
-      <p:sp>
-        <p:nvSpPr>
-          <p:cNvPr id="90" name="SlideNum"/>
-          <p:cNvSpPr txBox="1"/>
-          <p:nvPr/>
-        </p:nvSpPr>
-        <p:spPr>
-          <a:xfrm>
-            <a:off x="11384280" y="6446520"/>
-            <a:ext cx="640080" cy="292608"/>
-          </a:xfrm>
-          <a:prstGeom prst="rect">
-            <a:avLst/>
-          </a:prstGeom>
-          <a:noFill/>
-        </p:spPr>
-        <p:txBody>
-          <a:bodyPr wrap="none" lIns="0" tIns="0" rIns="45720" bIns="0" anchor="ctr"/>
-          <a:lstStyle/>
-          <a:p>
-            <a:pPr algn="r"/>
-            <a:r>
-              <a:t>197</a:t>
-            </a:r>
-            <a:endParaRPr sz="1000" b="1">
-              <a:solidFill>
-                <a:srgbClr val="7A8A6E"/>
-              </a:solidFill>
-              <a:latin typeface="Calibri"/>
-            </a:endParaRPr>
-          </a:p>
-        </p:txBody>
-      </p:sp>
-      <p:pic>
-        <p:nvPicPr>
-          <p:cNvPr id="270" name="CardImage" descr="the Week 15 check-off card, as handed out"/>
-          <p:cNvPicPr>
-            <a:picLocks noChangeAspect="1"/>
-          </p:cNvPicPr>
-          <p:nvPr/>
-        </p:nvPicPr>
-        <p:blipFill>
-          <a:blip r:embed="rId3"/>
-          <a:stretch>
-            <a:fillRect/>
-          </a:stretch>
-        </p:blipFill>
-        <p:spPr>
-          <a:xfrm>
-            <a:off x="1656179" y="1554480"/>
-            <a:ext cx="8879336" cy="4480560"/>
-          </a:xfrm>
-          <a:prstGeom prst="rect">
-            <a:avLst/>
-          </a:prstGeom>
-          <a:ln w="76200">
-            <a:solidFill>
-              <a:srgbClr val="FFFFFF"/>
-            </a:solidFill>
-          </a:ln>
-          <a:effectLst>
-            <a:outerShdw blurRad="63500" dist="25400" dir="5400000" rotWithShape="0">
-              <a:srgbClr val="000000">
-                <a:alpha val="35000"/>
-              </a:srgbClr>
-            </a:outerShdw>
-          </a:effectLst>
-        </p:spPr>
-      </p:pic>
-      <p:sp>
-        <p:nvSpPr>
-          <p:cNvPr id="271" name="Caption"/>
-          <p:cNvSpPr txBox="1"/>
-          <p:nvPr/>
-        </p:nvSpPr>
-        <p:spPr>
-          <a:xfrm>
-            <a:off x="822960" y="6217920"/>
-            <a:ext cx="10515600" cy="457200"/>
-          </a:xfrm>
-          <a:prstGeom prst="rect">
-            <a:avLst/>
-          </a:prstGeom>
-          <a:noFill/>
-        </p:spPr>
-        <p:txBody>
-          <a:bodyPr wrap="square"/>
-          <a:lstStyle/>
-          <a:p>
-            <a:pPr algn="ctr"/>
-            <a:r>
-              <a:rPr sz="1800" b="0" i="1">
-                <a:solidFill>
-                  <a:srgbClr val="222B22"/>
-                </a:solidFill>
-                <a:latin typeface="Calibri"/>
-              </a:rPr>
-              <a:t>Handed out now — fridge, mirror, journal pocket.</a:t>
-            </a:r>
           </a:p>
         </p:txBody>
       </p:sp>

--- a/_implementation-notes/evening-series/FotH Evening Session 15 Slides DRAFT v1.pptx
+++ b/_implementation-notes/evening-series/FotH Evening Session 15 Slides DRAFT v1.pptx
@@ -4944,7 +4944,7 @@
                 </a:solidFill>
                 <a:latin typeface="Cambria"/>
               </a:rPr>
-              <a:t>The Four Questions</a:t>
+              <a:t>Building Your Rhythm Card</a:t>
             </a:r>
           </a:p>
         </p:txBody>
@@ -4957,8 +4957,8 @@
         </p:nvSpPr>
         <p:spPr>
           <a:xfrm>
-            <a:off x="822960" y="1600200"/>
-            <a:ext cx="5669280" cy="4572000"/>
+            <a:off x="822960" y="1554480"/>
+            <a:ext cx="10515600" cy="4892040"/>
           </a:xfrm>
           <a:prstGeom prst="rect">
             <a:avLst/>
@@ -4971,11 +4971,11 @@
           <a:p>
             <a:pPr marL="274320" indent="-274320">
               <a:spcAft>
-                <a:spcPts val="650"/>
+                <a:spcPts val="900"/>
               </a:spcAft>
             </a:pPr>
             <a:r>
-              <a:rPr sz="1800" b="1" i="0">
+              <a:rPr sz="2400" b="1" i="0">
                 <a:solidFill>
                   <a:srgbClr val="97BC62"/>
                 </a:solidFill>
@@ -4984,209 +4984,113 @@
               <a:t>•  </a:t>
             </a:r>
             <a:r>
-              <a:rPr sz="1800" b="0" i="0">
+              <a:rPr sz="2400" b="0" i="0">
                 <a:solidFill>
                   <a:srgbClr val="222B22"/>
                 </a:solidFill>
                 <a:latin typeface="Calibri"/>
               </a:rPr>
-              <a:t>Parents, this next part is for you — nobody answers tonight. This week, at home, for the willing: unhurried, no audience, phone away, yours first</a:t>
-            </a:r>
-          </a:p>
-          <a:p>
-            <a:pPr marL="342900" indent="-342900">
-              <a:spcAft>
-                <a:spcPts val="650"/>
-              </a:spcAft>
-            </a:pPr>
-            <a:r>
-              <a:rPr sz="1800" b="1" i="0">
-                <a:solidFill>
-                  <a:srgbClr val="97BC62"/>
-                </a:solidFill>
-                <a:latin typeface="Calibri"/>
-              </a:rPr>
-              <a:t>1   </a:t>
-            </a:r>
-            <a:r>
-              <a:rPr sz="1800" b="0" i="0">
-                <a:solidFill>
-                  <a:srgbClr val="222B22"/>
-                </a:solidFill>
-                <a:latin typeface="Calibri"/>
-              </a:rPr>
-              <a:t>What has it been like to live with me all these years?</a:t>
-            </a:r>
-          </a:p>
-          <a:p>
-            <a:pPr marL="342900" indent="-342900">
-              <a:spcAft>
-                <a:spcPts val="650"/>
-              </a:spcAft>
-            </a:pPr>
-            <a:r>
-              <a:rPr sz="1800" b="1" i="0">
-                <a:solidFill>
-                  <a:srgbClr val="97BC62"/>
-                </a:solidFill>
-                <a:latin typeface="Calibri"/>
-              </a:rPr>
-              <a:t>2   </a:t>
-            </a:r>
-            <a:r>
-              <a:rPr sz="1800" b="0" i="0">
-                <a:solidFill>
-                  <a:srgbClr val="222B22"/>
-                </a:solidFill>
-                <a:latin typeface="Calibri"/>
-              </a:rPr>
-              <a:t>What have been my messages to you?</a:t>
-            </a:r>
-          </a:p>
-          <a:p>
-            <a:pPr marL="342900" indent="-342900">
-              <a:spcAft>
-                <a:spcPts val="650"/>
-              </a:spcAft>
-            </a:pPr>
-            <a:r>
-              <a:rPr sz="1800" b="1" i="0">
-                <a:solidFill>
-                  <a:srgbClr val="97BC62"/>
-                </a:solidFill>
-                <a:latin typeface="Calibri"/>
-              </a:rPr>
-              <a:t>3   </a:t>
-            </a:r>
-            <a:r>
-              <a:rPr sz="1800" b="0" i="0">
-                <a:solidFill>
-                  <a:srgbClr val="222B22"/>
-                </a:solidFill>
-                <a:latin typeface="Calibri"/>
-              </a:rPr>
-              <a:t>How have I wounded you?</a:t>
-            </a:r>
-          </a:p>
-          <a:p>
-            <a:pPr marL="342900" indent="-342900">
-              <a:spcAft>
-                <a:spcPts val="650"/>
-              </a:spcAft>
-            </a:pPr>
-            <a:r>
-              <a:rPr sz="1800" b="1" i="0">
-                <a:solidFill>
-                  <a:srgbClr val="97BC62"/>
-                </a:solidFill>
-                <a:latin typeface="Calibri"/>
-              </a:rPr>
-              <a:t>4   </a:t>
-            </a:r>
-            <a:r>
-              <a:rPr sz="1800" b="0" i="0">
-                <a:solidFill>
-                  <a:srgbClr val="222B22"/>
-                </a:solidFill>
-                <a:latin typeface="Calibri"/>
-              </a:rPr>
-              <a:t>What would you like from me going forward?</a:t>
+              <a:t>Twenty minutes in pairs — in your own handwriting, on the build sheet</a:t>
             </a:r>
           </a:p>
           <a:p>
             <a:pPr marL="274320" indent="-274320">
-              <a:spcAft>
-                <a:spcPts val="650"/>
-              </a:spcAft>
-            </a:pPr>
-            <a:r>
-              <a:rPr sz="1800" b="1" i="0">
-                <a:solidFill>
-                  <a:srgbClr val="97BC62"/>
-                </a:solidFill>
-                <a:latin typeface="Calibri"/>
-              </a:rPr>
-              <a:t>•  </a:t>
-            </a:r>
-            <a:r>
-              <a:rPr sz="1800" b="0" i="0">
-                <a:solidFill>
-                  <a:srgbClr val="222B22"/>
-                </a:solidFill>
-                <a:latin typeface="Calibri"/>
-              </a:rPr>
-              <a:t>The guards — willing only, both directions; receive without defending (listening questions and “thank you” only); invisible by default; a letter counts; the Section 6 boundary</a:t>
-            </a:r>
-          </a:p>
-        </p:txBody>
-      </p:sp>
-      <p:sp>
-        <p:nvSpPr>
-          <p:cNvPr id="6" name="TextBox 6"/>
-          <p:cNvSpPr txBox="1"/>
-          <p:nvPr/>
-        </p:nvSpPr>
-        <p:spPr>
-          <a:xfrm>
-            <a:off x="6766560" y="1737360"/>
-            <a:ext cx="4663440" cy="2194560"/>
-          </a:xfrm>
-          <a:prstGeom prst="rect">
-            <a:avLst/>
-          </a:prstGeom>
-          <a:solidFill>
-            <a:srgbClr val="F1F6EC"/>
-          </a:solidFill>
-        </p:spPr>
-        <p:txBody>
-          <a:bodyPr wrap="square" lIns="91440" tIns="91440" rIns="91440" bIns="91440" anchor="ctr"/>
-          <a:lstStyle/>
-          <a:p>
-            <a:pPr>
               <a:spcAft>
                 <a:spcPts val="900"/>
               </a:spcAft>
             </a:pPr>
             <a:r>
-              <a:rPr sz="1200" b="1" i="0">
+              <a:rPr sz="2400" b="1" i="0">
                 <a:solidFill>
                   <a:srgbClr val="97BC62"/>
                 </a:solidFill>
                 <a:latin typeface="Calibri"/>
               </a:rPr>
-              <a:t>PSALM 139:23–24</a:t>
-            </a:r>
-          </a:p>
-          <a:p>
-            <a:pPr>
+              <a:t>•  </a:t>
+            </a:r>
+            <a:r>
+              <a:rPr sz="2400" b="0" i="0">
+                <a:solidFill>
+                  <a:srgbClr val="222B22"/>
+                </a:solidFill>
+                <a:latin typeface="Calibri"/>
+              </a:rPr>
+              <a:t>Specific beats vague — “morning question, 6:50, kitchen table, before my phone” is a rhythm</a:t>
+            </a:r>
+          </a:p>
+          <a:p>
+            <a:pPr marL="274320" indent="-274320">
               <a:spcAft>
-                <a:spcPts val="600"/>
+                <a:spcPts val="900"/>
               </a:spcAft>
             </a:pPr>
             <a:r>
-              <a:rPr sz="2400" b="0" i="1">
+              <a:rPr sz="2400" b="1" i="0">
+                <a:solidFill>
+                  <a:srgbClr val="97BC62"/>
+                </a:solidFill>
+                <a:latin typeface="Calibri"/>
+              </a:rPr>
+              <a:t>•  </a:t>
+            </a:r>
+            <a:r>
+              <a:rPr sz="2400" b="0" i="0">
                 <a:solidFill>
                   <a:srgbClr val="222B22"/>
                 </a:solidFill>
-                <a:latin typeface="Cambria"/>
-              </a:rPr>
-              <a:t>Asked of God, it is worship. Asked of your family, it is the bravest form of the same prayer.</a:t>
-            </a:r>
-          </a:p>
-          <a:p>
-            <a:pPr>
+                <a:latin typeface="Calibri"/>
+              </a:rPr>
+              <a:t>The weekly partner line is the most important line on the sheet — name an actual person</a:t>
+            </a:r>
+          </a:p>
+          <a:p>
+            <a:pPr marL="274320" indent="-274320">
               <a:spcAft>
-                <a:spcPts val="600"/>
+                <a:spcPts val="900"/>
               </a:spcAft>
             </a:pPr>
             <a:r>
-              <a:rPr sz="2400" b="0" i="1">
+              <a:rPr sz="2400" b="1" i="0">
+                <a:solidFill>
+                  <a:srgbClr val="97BC62"/>
+                </a:solidFill>
+                <a:latin typeface="Calibri"/>
+              </a:rPr>
+              <a:t>•  </a:t>
+            </a:r>
+            <a:r>
+              <a:rPr sz="2400" b="0" i="0">
                 <a:solidFill>
                   <a:srgbClr val="222B22"/>
                 </a:solidFill>
-                <a:latin typeface="Cambria"/>
-              </a:rPr>
-              <a:t>James 1:19 — quick to hear, slow to speak.</a:t>
+                <a:latin typeface="Calibri"/>
+              </a:rPr>
+              <a:t>Build down, not up — which two practices survive exam season? Start there; the card lets you add later</a:t>
+            </a:r>
+          </a:p>
+          <a:p>
+            <a:pPr marL="274320" indent="-274320">
+              <a:spcAft>
+                <a:spcPts val="900"/>
+              </a:spcAft>
+            </a:pPr>
+            <a:r>
+              <a:rPr sz="2400" b="1" i="0">
+                <a:solidFill>
+                  <a:srgbClr val="97BC62"/>
+                </a:solidFill>
+                <a:latin typeface="Calibri"/>
+              </a:rPr>
+              <a:t>•  </a:t>
+            </a:r>
+            <a:r>
+              <a:rPr sz="2400" b="0" i="0">
+                <a:solidFill>
+                  <a:srgbClr val="222B22"/>
+                </a:solidFill>
+                <a:latin typeface="Calibri"/>
+              </a:rPr>
+              <a:t>Close: each participant reads their daily line aloud to the pair — a parent first; pass-anytime holds</a:t>
             </a:r>
           </a:p>
         </p:txBody>
@@ -5213,7 +5117,7 @@
           <a:p>
             <a:pPr algn="r"/>
             <a:r>
-              <a:t>193</a:t>
+              <a:t>192</a:t>
             </a:r>
             <a:endParaRPr sz="1000" b="1">
               <a:solidFill>
@@ -5312,7 +5216,7 @@
                 </a:solidFill>
                 <a:latin typeface="Cambria"/>
               </a:rPr>
-              <a:t>The Leader Feedback Round</a:t>
+              <a:t>The Four Questions</a:t>
             </a:r>
           </a:p>
         </p:txBody>
@@ -5325,8 +5229,8 @@
         </p:nvSpPr>
         <p:spPr>
           <a:xfrm>
-            <a:off x="822960" y="1554480"/>
-            <a:ext cx="6675120" cy="4892040"/>
+            <a:off x="822960" y="1600200"/>
+            <a:ext cx="5669280" cy="4572000"/>
           </a:xfrm>
           <a:prstGeom prst="rect">
             <a:avLst/>
@@ -5339,11 +5243,11 @@
           <a:p>
             <a:pPr marL="274320" indent="-274320">
               <a:spcAft>
-                <a:spcPts val="900"/>
+                <a:spcPts val="650"/>
               </a:spcAft>
             </a:pPr>
             <a:r>
-              <a:rPr sz="2800" b="1" i="0">
+              <a:rPr sz="1800" b="1" i="0">
                 <a:solidFill>
                   <a:srgbClr val="97BC62"/>
                 </a:solidFill>
@@ -5352,138 +5256,209 @@
               <a:t>•  </a:t>
             </a:r>
             <a:r>
-              <a:rPr sz="2800" b="0" i="0">
+              <a:rPr sz="1800" b="0" i="0">
                 <a:solidFill>
                   <a:srgbClr val="222B22"/>
                 </a:solidFill>
                 <a:latin typeface="Calibri"/>
               </a:rPr>
-              <a:t>Two rounds, same as every session — the container holder first, then the content presenter: three things each</a:t>
-            </a:r>
-          </a:p>
-          <a:p>
-            <a:pPr marL="685800" indent="-274320">
+              <a:t>Parents, this next part is for you — nobody answers tonight. This week, at home, for the willing: unhurried, no audience, phone away, yours first</a:t>
+            </a:r>
+          </a:p>
+          <a:p>
+            <a:pPr marL="342900" indent="-342900">
               <a:spcAft>
-                <a:spcPts val="700"/>
+                <a:spcPts val="650"/>
               </a:spcAft>
             </a:pPr>
             <a:r>
-              <a:rPr sz="2000" b="1" i="0">
+              <a:rPr sz="1800" b="1" i="0">
                 <a:solidFill>
                   <a:srgbClr val="97BC62"/>
                 </a:solidFill>
                 <a:latin typeface="Calibri"/>
               </a:rPr>
-              <a:t>–  </a:t>
-            </a:r>
-            <a:r>
-              <a:rPr sz="2000" b="0" i="1">
+              <a:t>1   </a:t>
+            </a:r>
+            <a:r>
+              <a:rPr sz="1800" b="0" i="0">
                 <a:solidFill>
                   <a:srgbClr val="222B22"/>
                 </a:solidFill>
                 <a:latin typeface="Calibri"/>
               </a:rPr>
-              <a:t>“What I think went well tonight: ______”</a:t>
-            </a:r>
-          </a:p>
-          <a:p>
-            <a:pPr marL="685800" indent="-274320">
+              <a:t>What has it been like to live with me all these years?</a:t>
+            </a:r>
+          </a:p>
+          <a:p>
+            <a:pPr marL="342900" indent="-342900">
               <a:spcAft>
-                <a:spcPts val="700"/>
+                <a:spcPts val="650"/>
               </a:spcAft>
             </a:pPr>
             <a:r>
-              <a:rPr sz="2000" b="1" i="0">
+              <a:rPr sz="1800" b="1" i="0">
                 <a:solidFill>
                   <a:srgbClr val="97BC62"/>
                 </a:solidFill>
                 <a:latin typeface="Calibri"/>
               </a:rPr>
-              <a:t>–  </a:t>
-            </a:r>
-            <a:r>
-              <a:rPr sz="2000" b="0" i="1">
+              <a:t>2   </a:t>
+            </a:r>
+            <a:r>
+              <a:rPr sz="1800" b="0" i="0">
                 <a:solidFill>
                   <a:srgbClr val="222B22"/>
                 </a:solidFill>
                 <a:latin typeface="Calibri"/>
               </a:rPr>
-              <a:t>“What I’d do differently next time: ______”</a:t>
-            </a:r>
-          </a:p>
-          <a:p>
-            <a:pPr marL="685800" indent="-274320">
+              <a:t>What have been my messages to you?</a:t>
+            </a:r>
+          </a:p>
+          <a:p>
+            <a:pPr marL="342900" indent="-342900">
               <a:spcAft>
-                <a:spcPts val="700"/>
+                <a:spcPts val="650"/>
               </a:spcAft>
             </a:pPr>
             <a:r>
-              <a:rPr sz="2000" b="1" i="0">
+              <a:rPr sz="1800" b="1" i="0">
                 <a:solidFill>
                   <a:srgbClr val="97BC62"/>
                 </a:solidFill>
                 <a:latin typeface="Calibri"/>
               </a:rPr>
-              <a:t>–  </a:t>
-            </a:r>
-            <a:r>
-              <a:rPr sz="2000" b="0" i="1">
+              <a:t>3   </a:t>
+            </a:r>
+            <a:r>
+              <a:rPr sz="1800" b="0" i="0">
                 <a:solidFill>
                   <a:srgbClr val="222B22"/>
                 </a:solidFill>
                 <a:latin typeface="Calibri"/>
               </a:rPr>
-              <a:t>“If I were to teach tonight’s process to someone, I would tell them: ______”</a:t>
+              <a:t>How have I wounded you?</a:t>
+            </a:r>
+          </a:p>
+          <a:p>
+            <a:pPr marL="342900" indent="-342900">
+              <a:spcAft>
+                <a:spcPts val="650"/>
+              </a:spcAft>
+            </a:pPr>
+            <a:r>
+              <a:rPr sz="1800" b="1" i="0">
+                <a:solidFill>
+                  <a:srgbClr val="97BC62"/>
+                </a:solidFill>
+                <a:latin typeface="Calibri"/>
+              </a:rPr>
+              <a:t>4   </a:t>
+            </a:r>
+            <a:r>
+              <a:rPr sz="1800" b="0" i="0">
+                <a:solidFill>
+                  <a:srgbClr val="222B22"/>
+                </a:solidFill>
+                <a:latin typeface="Calibri"/>
+              </a:rPr>
+              <a:t>What would you like from me going forward?</a:t>
             </a:r>
           </a:p>
           <a:p>
             <a:pPr marL="274320" indent="-274320">
+              <a:spcAft>
+                <a:spcPts val="650"/>
+              </a:spcAft>
+            </a:pPr>
+            <a:r>
+              <a:rPr sz="1800" b="1" i="0">
+                <a:solidFill>
+                  <a:srgbClr val="97BC62"/>
+                </a:solidFill>
+                <a:latin typeface="Calibri"/>
+              </a:rPr>
+              <a:t>•  </a:t>
+            </a:r>
+            <a:r>
+              <a:rPr sz="1800" b="0" i="0">
+                <a:solidFill>
+                  <a:srgbClr val="222B22"/>
+                </a:solidFill>
+                <a:latin typeface="Calibri"/>
+              </a:rPr>
+              <a:t>The guards — willing only, both directions; receive without defending (listening questions and “thank you” only); invisible by default; a letter counts; the Section 6 boundary</a:t>
+            </a:r>
+          </a:p>
+        </p:txBody>
+      </p:sp>
+      <p:sp>
+        <p:nvSpPr>
+          <p:cNvPr id="6" name="TextBox 6"/>
+          <p:cNvSpPr txBox="1"/>
+          <p:nvPr/>
+        </p:nvSpPr>
+        <p:spPr>
+          <a:xfrm>
+            <a:off x="6766560" y="1737360"/>
+            <a:ext cx="4663440" cy="2194560"/>
+          </a:xfrm>
+          <a:prstGeom prst="rect">
+            <a:avLst/>
+          </a:prstGeom>
+          <a:solidFill>
+            <a:srgbClr val="F1F6EC"/>
+          </a:solidFill>
+        </p:spPr>
+        <p:txBody>
+          <a:bodyPr wrap="square" lIns="91440" tIns="91440" rIns="91440" bIns="91440" anchor="ctr"/>
+          <a:lstStyle/>
+          <a:p>
+            <a:pPr>
               <a:spcAft>
                 <a:spcPts val="900"/>
               </a:spcAft>
             </a:pPr>
             <a:r>
-              <a:rPr sz="2800" b="1" i="0">
+              <a:rPr sz="1200" b="1" i="0">
                 <a:solidFill>
                   <a:srgbClr val="97BC62"/>
                 </a:solidFill>
                 <a:latin typeface="Calibri"/>
               </a:rPr>
-              <a:t>•  </a:t>
-            </a:r>
-            <a:r>
-              <a:rPr sz="2800" b="0" i="0">
-                <a:solidFill>
-                  <a:srgbClr val="222B22"/>
-                </a:solidFill>
-                <a:latin typeface="Calibri"/>
-              </a:rPr>
-              <a:t>Then the room — the same two questions about tonight</a:t>
-            </a:r>
-          </a:p>
-          <a:p>
-            <a:pPr marL="274320" indent="-274320">
+              <a:t>PSALM 139:23–24</a:t>
+            </a:r>
+          </a:p>
+          <a:p>
+            <a:pPr>
               <a:spcAft>
-                <a:spcPts val="900"/>
+                <a:spcPts val="600"/>
               </a:spcAft>
             </a:pPr>
             <a:r>
-              <a:rPr sz="2800" b="1" i="0">
-                <a:solidFill>
-                  <a:srgbClr val="97BC62"/>
-                </a:solidFill>
-                <a:latin typeface="Calibri"/>
-              </a:rPr>
-              <a:t>•  </a:t>
-            </a:r>
-            <a:r>
-              <a:rPr sz="2800" b="0" i="0">
+              <a:rPr sz="2400" b="0" i="1">
                 <a:solidFill>
                   <a:srgbClr val="222B22"/>
                 </a:solidFill>
-                <a:latin typeface="Calibri"/>
-              </a:rPr>
-              <a:t>The leaders receive without defending — “thank you” is the whole response</a:t>
+                <a:latin typeface="Cambria"/>
+              </a:rPr>
+              <a:t>Asked of God, it is worship. Asked of your family, it is the bravest form of the same prayer.</a:t>
+            </a:r>
+          </a:p>
+          <a:p>
+            <a:pPr>
+              <a:spcAft>
+                <a:spcPts val="600"/>
+              </a:spcAft>
+            </a:pPr>
+            <a:r>
+              <a:rPr sz="2400" b="0" i="1">
+                <a:solidFill>
+                  <a:srgbClr val="222B22"/>
+                </a:solidFill>
+                <a:latin typeface="Cambria"/>
+              </a:rPr>
+              <a:t>James 1:19 — quick to hear, slow to speak.</a:t>
             </a:r>
           </a:p>
         </p:txBody>
@@ -5510,7 +5485,7 @@
           <a:p>
             <a:pPr algn="r"/>
             <a:r>
-              <a:t>194</a:t>
+              <a:t>193</a:t>
             </a:r>
             <a:endParaRPr sz="1000" b="1">
               <a:solidFill>
@@ -5521,42 +5496,6 @@
           </a:p>
         </p:txBody>
       </p:sp>
-      <p:pic>
-        <p:nvPicPr>
-          <p:cNvPr id="33" name="Picture 33" descr="compass on the trail - the weekly bearing check"/>
-          <p:cNvPicPr>
-            <a:picLocks noChangeAspect="1"/>
-          </p:cNvPicPr>
-          <p:nvPr/>
-        </p:nvPicPr>
-        <p:blipFill>
-          <a:blip r:embed="rId3"/>
-          <a:stretch>
-            <a:fillRect/>
-          </a:stretch>
-        </p:blipFill>
-        <p:spPr>
-          <a:xfrm>
-            <a:off x="8106160" y="1463040"/>
-            <a:ext cx="3259831" cy="4892040"/>
-          </a:xfrm>
-          <a:prstGeom prst="rect">
-            <a:avLst/>
-          </a:prstGeom>
-          <a:ln w="76200">
-            <a:solidFill>
-              <a:srgbClr val="FFFFFF"/>
-            </a:solidFill>
-          </a:ln>
-          <a:effectLst>
-            <a:outerShdw blurRad="63500" dist="25400" dir="5400000" rotWithShape="0">
-              <a:srgbClr val="000000">
-                <a:alpha val="35000"/>
-              </a:srgbClr>
-            </a:outerShdw>
-          </a:effectLst>
-        </p:spPr>
-      </p:pic>
     </p:spTree>
   </p:cSld>
   <p:clrMapOvr>
@@ -5645,7 +5584,7 @@
                 </a:solidFill>
                 <a:latin typeface="Cambria"/>
               </a:rPr>
-              <a:t>Closing the Container + Aaronic Blessing</a:t>
+              <a:t>The Leader Feedback Round</a:t>
             </a:r>
           </a:p>
         </p:txBody>
@@ -5658,8 +5597,8 @@
         </p:nvSpPr>
         <p:spPr>
           <a:xfrm>
-            <a:off x="822960" y="1600200"/>
-            <a:ext cx="5669280" cy="4572000"/>
+            <a:off x="822960" y="1554480"/>
+            <a:ext cx="6675120" cy="4892040"/>
           </a:xfrm>
           <a:prstGeom prst="rect">
             <a:avLst/>
@@ -5676,7 +5615,7 @@
               </a:spcAft>
             </a:pPr>
             <a:r>
-              <a:rPr sz="2200" b="1" i="0">
+              <a:rPr sz="2800" b="1" i="0">
                 <a:solidFill>
                   <a:srgbClr val="97BC62"/>
                 </a:solidFill>
@@ -5685,13 +5624,13 @@
               <a:t>•  </a:t>
             </a:r>
             <a:r>
-              <a:rPr sz="2200" b="0" i="0">
+              <a:rPr sz="2800" b="0" i="0">
                 <a:solidFill>
                   <a:srgbClr val="222B22"/>
                 </a:solidFill>
                 <a:latin typeface="Calibri"/>
               </a:rPr>
-              <a:t>We close the way we opened — the container, six steps:</a:t>
+              <a:t>Two rounds, same as every session — the container holder first, then the content presenter: three things each</a:t>
             </a:r>
           </a:p>
           <a:p>
@@ -5707,16 +5646,16 @@
                 </a:solidFill>
                 <a:latin typeface="Calibri"/>
               </a:rPr>
-              <a:t>1   </a:t>
-            </a:r>
-            <a:r>
-              <a:rPr sz="2000" b="0" i="0">
+              <a:t>–  </a:t>
+            </a:r>
+            <a:r>
+              <a:rPr sz="2000" b="0" i="1">
                 <a:solidFill>
                   <a:srgbClr val="222B22"/>
                 </a:solidFill>
                 <a:latin typeface="Calibri"/>
               </a:rPr>
-              <a:t>Stand again — same circle, same posture as the open</a:t>
+              <a:t>“What I think went well tonight: ______”</a:t>
             </a:r>
           </a:p>
           <a:p>
@@ -5732,16 +5671,16 @@
                 </a:solidFill>
                 <a:latin typeface="Calibri"/>
               </a:rPr>
-              <a:t>2   </a:t>
-            </a:r>
-            <a:r>
-              <a:rPr sz="2000" b="0" i="0">
+              <a:t>–  </a:t>
+            </a:r>
+            <a:r>
+              <a:rPr sz="2000" b="0" i="1">
                 <a:solidFill>
                   <a:srgbClr val="222B22"/>
                 </a:solidFill>
                 <a:latin typeface="Calibri"/>
               </a:rPr>
-              <a:t>One-word landing — compare it to your opening word</a:t>
+              <a:t>“What I’d do differently next time: ______”</a:t>
             </a:r>
           </a:p>
           <a:p>
@@ -5757,178 +5696,66 @@
                 </a:solidFill>
                 <a:latin typeface="Calibri"/>
               </a:rPr>
-              <a:t>3   </a:t>
-            </a:r>
-            <a:r>
-              <a:rPr sz="2000" b="0" i="0">
+              <a:t>–  </a:t>
+            </a:r>
+            <a:r>
+              <a:rPr sz="2000" b="0" i="1">
                 <a:solidFill>
                   <a:srgbClr val="222B22"/>
                 </a:solidFill>
                 <a:latin typeface="Calibri"/>
               </a:rPr>
-              <a:t>The one thing you are taking from tonight</a:t>
-            </a:r>
-          </a:p>
-          <a:p>
-            <a:pPr marL="685800" indent="-274320">
-              <a:spcAft>
-                <a:spcPts val="700"/>
-              </a:spcAft>
-            </a:pPr>
-            <a:r>
-              <a:rPr sz="2000" b="1" i="0">
-                <a:solidFill>
-                  <a:srgbClr val="97BC62"/>
-                </a:solidFill>
-                <a:latin typeface="Calibri"/>
-              </a:rPr>
-              <a:t>4   </a:t>
-            </a:r>
-            <a:r>
-              <a:rPr sz="2000" b="0" i="0">
-                <a:solidFill>
-                  <a:srgbClr val="222B22"/>
-                </a:solidFill>
-                <a:latin typeface="Calibri"/>
-              </a:rPr>
-              <a:t>The one practice — committed aloud, or modified to one you will actually keep</a:t>
-            </a:r>
-          </a:p>
-          <a:p>
-            <a:pPr marL="685800" indent="-274320">
-              <a:spcAft>
-                <a:spcPts val="700"/>
-              </a:spcAft>
-            </a:pPr>
-            <a:r>
-              <a:rPr sz="2000" b="1" i="0">
-                <a:solidFill>
-                  <a:srgbClr val="97BC62"/>
-                </a:solidFill>
-                <a:latin typeface="Calibri"/>
-              </a:rPr>
-              <a:t>5   </a:t>
-            </a:r>
-            <a:r>
-              <a:rPr sz="2000" b="0" i="0">
-                <a:solidFill>
-                  <a:srgbClr val="222B22"/>
-                </a:solidFill>
-                <a:latin typeface="Calibri"/>
-              </a:rPr>
-              <a:t>Blessings — specific, witnessed, short</a:t>
-            </a:r>
-          </a:p>
-          <a:p>
-            <a:pPr marL="685800" indent="-274320">
-              <a:spcAft>
-                <a:spcPts val="700"/>
-              </a:spcAft>
-            </a:pPr>
-            <a:r>
-              <a:rPr sz="2000" b="1" i="0">
-                <a:solidFill>
-                  <a:srgbClr val="97BC62"/>
-                </a:solidFill>
-                <a:latin typeface="Calibri"/>
-              </a:rPr>
-              <a:t>6   </a:t>
-            </a:r>
-            <a:r>
-              <a:rPr sz="2000" b="0" i="0">
-                <a:solidFill>
-                  <a:srgbClr val="222B22"/>
-                </a:solidFill>
-                <a:latin typeface="Calibri"/>
-              </a:rPr>
-              <a:t>Closing prayer — and the Aaronic blessing, spoken over each other, face to face</a:t>
-            </a:r>
-          </a:p>
-        </p:txBody>
-      </p:sp>
-      <p:sp>
-        <p:nvSpPr>
-          <p:cNvPr id="6" name="TextBox 6"/>
-          <p:cNvSpPr txBox="1"/>
-          <p:nvPr/>
-        </p:nvSpPr>
-        <p:spPr>
-          <a:xfrm>
-            <a:off x="6766560" y="1737360"/>
-            <a:ext cx="4663440" cy="2926080"/>
-          </a:xfrm>
-          <a:prstGeom prst="rect">
-            <a:avLst/>
-          </a:prstGeom>
-          <a:solidFill>
-            <a:srgbClr val="F1F6EC"/>
-          </a:solidFill>
-        </p:spPr>
-        <p:txBody>
-          <a:bodyPr wrap="square" lIns="91440" tIns="91440" rIns="91440" bIns="91440" anchor="ctr"/>
-          <a:lstStyle/>
-          <a:p>
-            <a:pPr>
+              <a:t>“If I were to teach tonight’s process to someone, I would tell them: ______”</a:t>
+            </a:r>
+          </a:p>
+          <a:p>
+            <a:pPr marL="274320" indent="-274320">
               <a:spcAft>
                 <a:spcPts val="900"/>
               </a:spcAft>
             </a:pPr>
             <a:r>
-              <a:rPr sz="1200" b="1" i="0">
+              <a:rPr sz="2800" b="1" i="0">
                 <a:solidFill>
                   <a:srgbClr val="97BC62"/>
                 </a:solidFill>
                 <a:latin typeface="Calibri"/>
               </a:rPr>
-              <a:t>THE AARONIC BLESSING — NUMBERS 6:24–26</a:t>
-            </a:r>
-          </a:p>
-          <a:p>
-            <a:pPr>
+              <a:t>•  </a:t>
+            </a:r>
+            <a:r>
+              <a:rPr sz="2800" b="0" i="0">
+                <a:solidFill>
+                  <a:srgbClr val="222B22"/>
+                </a:solidFill>
+                <a:latin typeface="Calibri"/>
+              </a:rPr>
+              <a:t>Then the room — the same two questions about tonight</a:t>
+            </a:r>
+          </a:p>
+          <a:p>
+            <a:pPr marL="274320" indent="-274320">
               <a:spcAft>
-                <a:spcPts val="600"/>
+                <a:spcPts val="900"/>
               </a:spcAft>
             </a:pPr>
             <a:r>
-              <a:rPr sz="2400" b="0" i="1">
+              <a:rPr sz="2800" b="1" i="0">
+                <a:solidFill>
+                  <a:srgbClr val="97BC62"/>
+                </a:solidFill>
+                <a:latin typeface="Calibri"/>
+              </a:rPr>
+              <a:t>•  </a:t>
+            </a:r>
+            <a:r>
+              <a:rPr sz="2800" b="0" i="0">
                 <a:solidFill>
                   <a:srgbClr val="222B22"/>
                 </a:solidFill>
-                <a:latin typeface="Cambria"/>
-              </a:rPr>
-              <a:t>“The Lord bless you and keep you;</a:t>
-            </a:r>
-          </a:p>
-          <a:p>
-            <a:pPr>
-              <a:spcAft>
-                <a:spcPts val="600"/>
-              </a:spcAft>
-            </a:pPr>
-            <a:r>
-              <a:rPr sz="2400" b="0" i="1">
-                <a:solidFill>
-                  <a:srgbClr val="222B22"/>
-                </a:solidFill>
-                <a:latin typeface="Cambria"/>
-              </a:rPr>
-              <a:t>the Lord make his face to shine upon you, and be gracious to you;</a:t>
-            </a:r>
-          </a:p>
-          <a:p>
-            <a:pPr>
-              <a:spcAft>
-                <a:spcPts val="600"/>
-              </a:spcAft>
-            </a:pPr>
-            <a:r>
-              <a:rPr sz="2400" b="0" i="1">
-                <a:solidFill>
-                  <a:srgbClr val="222B22"/>
-                </a:solidFill>
-                <a:latin typeface="Cambria"/>
-              </a:rPr>
-              <a:t>the Lord lift up his countenance upon you, and give you peace.”</a:t>
+                <a:latin typeface="Calibri"/>
+              </a:rPr>
+              <a:t>The leaders receive without defending — “thank you” is the whole response</a:t>
             </a:r>
           </a:p>
         </p:txBody>
@@ -5955,7 +5782,7 @@
           <a:p>
             <a:pPr algn="r"/>
             <a:r>
-              <a:t>195</a:t>
+              <a:t>194</a:t>
             </a:r>
             <a:endParaRPr sz="1000" b="1">
               <a:solidFill>
@@ -5966,6 +5793,42 @@
           </a:p>
         </p:txBody>
       </p:sp>
+      <p:pic>
+        <p:nvPicPr>
+          <p:cNvPr id="33" name="Picture 33" descr="compass on the trail - the weekly bearing check"/>
+          <p:cNvPicPr>
+            <a:picLocks noChangeAspect="1"/>
+          </p:cNvPicPr>
+          <p:nvPr/>
+        </p:nvPicPr>
+        <p:blipFill>
+          <a:blip r:embed="rId3"/>
+          <a:stretch>
+            <a:fillRect/>
+          </a:stretch>
+        </p:blipFill>
+        <p:spPr>
+          <a:xfrm>
+            <a:off x="8106160" y="1463040"/>
+            <a:ext cx="3259831" cy="4892040"/>
+          </a:xfrm>
+          <a:prstGeom prst="rect">
+            <a:avLst/>
+          </a:prstGeom>
+          <a:ln w="76200">
+            <a:solidFill>
+              <a:srgbClr val="FFFFFF"/>
+            </a:solidFill>
+          </a:ln>
+          <a:effectLst>
+            <a:outerShdw blurRad="63500" dist="25400" dir="5400000" rotWithShape="0">
+              <a:srgbClr val="000000">
+                <a:alpha val="35000"/>
+              </a:srgbClr>
+            </a:outerShdw>
+          </a:effectLst>
+        </p:spPr>
+      </p:pic>
     </p:spTree>
   </p:cSld>
   <p:clrMapOvr>
@@ -6054,6 +5917,415 @@
                 </a:solidFill>
                 <a:latin typeface="Cambria"/>
               </a:rPr>
+              <a:t>Closing the Container + Aaronic Blessing</a:t>
+            </a:r>
+          </a:p>
+        </p:txBody>
+      </p:sp>
+      <p:sp>
+        <p:nvSpPr>
+          <p:cNvPr id="4" name="TextBox 4"/>
+          <p:cNvSpPr txBox="1"/>
+          <p:nvPr/>
+        </p:nvSpPr>
+        <p:spPr>
+          <a:xfrm>
+            <a:off x="822960" y="1600200"/>
+            <a:ext cx="5669280" cy="4572000"/>
+          </a:xfrm>
+          <a:prstGeom prst="rect">
+            <a:avLst/>
+          </a:prstGeom>
+          <a:noFill/>
+        </p:spPr>
+        <p:txBody>
+          <a:bodyPr wrap="square" lIns="91440" tIns="91440" rIns="91440" bIns="91440"/>
+          <a:lstStyle/>
+          <a:p>
+            <a:pPr marL="274320" indent="-274320">
+              <a:spcAft>
+                <a:spcPts val="900"/>
+              </a:spcAft>
+            </a:pPr>
+            <a:r>
+              <a:rPr sz="2200" b="1" i="0">
+                <a:solidFill>
+                  <a:srgbClr val="97BC62"/>
+                </a:solidFill>
+                <a:latin typeface="Calibri"/>
+              </a:rPr>
+              <a:t>•  </a:t>
+            </a:r>
+            <a:r>
+              <a:rPr sz="2200" b="0" i="0">
+                <a:solidFill>
+                  <a:srgbClr val="222B22"/>
+                </a:solidFill>
+                <a:latin typeface="Calibri"/>
+              </a:rPr>
+              <a:t>We close the way we opened — the container, six steps:</a:t>
+            </a:r>
+          </a:p>
+          <a:p>
+            <a:pPr marL="685800" indent="-274320">
+              <a:spcAft>
+                <a:spcPts val="700"/>
+              </a:spcAft>
+            </a:pPr>
+            <a:r>
+              <a:rPr sz="2000" b="1" i="0">
+                <a:solidFill>
+                  <a:srgbClr val="97BC62"/>
+                </a:solidFill>
+                <a:latin typeface="Calibri"/>
+              </a:rPr>
+              <a:t>1   </a:t>
+            </a:r>
+            <a:r>
+              <a:rPr sz="2000" b="0" i="0">
+                <a:solidFill>
+                  <a:srgbClr val="222B22"/>
+                </a:solidFill>
+                <a:latin typeface="Calibri"/>
+              </a:rPr>
+              <a:t>Stand again — same circle, same posture as the open</a:t>
+            </a:r>
+          </a:p>
+          <a:p>
+            <a:pPr marL="685800" indent="-274320">
+              <a:spcAft>
+                <a:spcPts val="700"/>
+              </a:spcAft>
+            </a:pPr>
+            <a:r>
+              <a:rPr sz="2000" b="1" i="0">
+                <a:solidFill>
+                  <a:srgbClr val="97BC62"/>
+                </a:solidFill>
+                <a:latin typeface="Calibri"/>
+              </a:rPr>
+              <a:t>2   </a:t>
+            </a:r>
+            <a:r>
+              <a:rPr sz="2000" b="0" i="0">
+                <a:solidFill>
+                  <a:srgbClr val="222B22"/>
+                </a:solidFill>
+                <a:latin typeface="Calibri"/>
+              </a:rPr>
+              <a:t>One-word landing — compare it to your opening word</a:t>
+            </a:r>
+          </a:p>
+          <a:p>
+            <a:pPr marL="685800" indent="-274320">
+              <a:spcAft>
+                <a:spcPts val="700"/>
+              </a:spcAft>
+            </a:pPr>
+            <a:r>
+              <a:rPr sz="2000" b="1" i="0">
+                <a:solidFill>
+                  <a:srgbClr val="97BC62"/>
+                </a:solidFill>
+                <a:latin typeface="Calibri"/>
+              </a:rPr>
+              <a:t>3   </a:t>
+            </a:r>
+            <a:r>
+              <a:rPr sz="2000" b="0" i="0">
+                <a:solidFill>
+                  <a:srgbClr val="222B22"/>
+                </a:solidFill>
+                <a:latin typeface="Calibri"/>
+              </a:rPr>
+              <a:t>The one thing you are taking from tonight</a:t>
+            </a:r>
+          </a:p>
+          <a:p>
+            <a:pPr marL="685800" indent="-274320">
+              <a:spcAft>
+                <a:spcPts val="700"/>
+              </a:spcAft>
+            </a:pPr>
+            <a:r>
+              <a:rPr sz="2000" b="1" i="0">
+                <a:solidFill>
+                  <a:srgbClr val="97BC62"/>
+                </a:solidFill>
+                <a:latin typeface="Calibri"/>
+              </a:rPr>
+              <a:t>4   </a:t>
+            </a:r>
+            <a:r>
+              <a:rPr sz="2000" b="0" i="0">
+                <a:solidFill>
+                  <a:srgbClr val="222B22"/>
+                </a:solidFill>
+                <a:latin typeface="Calibri"/>
+              </a:rPr>
+              <a:t>The one practice — committed aloud, or modified to one you will actually keep</a:t>
+            </a:r>
+          </a:p>
+          <a:p>
+            <a:pPr marL="685800" indent="-274320">
+              <a:spcAft>
+                <a:spcPts val="700"/>
+              </a:spcAft>
+            </a:pPr>
+            <a:r>
+              <a:rPr sz="2000" b="1" i="0">
+                <a:solidFill>
+                  <a:srgbClr val="97BC62"/>
+                </a:solidFill>
+                <a:latin typeface="Calibri"/>
+              </a:rPr>
+              <a:t>5   </a:t>
+            </a:r>
+            <a:r>
+              <a:rPr sz="2000" b="0" i="0">
+                <a:solidFill>
+                  <a:srgbClr val="222B22"/>
+                </a:solidFill>
+                <a:latin typeface="Calibri"/>
+              </a:rPr>
+              <a:t>Blessings — specific, witnessed, short</a:t>
+            </a:r>
+          </a:p>
+          <a:p>
+            <a:pPr marL="685800" indent="-274320">
+              <a:spcAft>
+                <a:spcPts val="700"/>
+              </a:spcAft>
+            </a:pPr>
+            <a:r>
+              <a:rPr sz="2000" b="1" i="0">
+                <a:solidFill>
+                  <a:srgbClr val="97BC62"/>
+                </a:solidFill>
+                <a:latin typeface="Calibri"/>
+              </a:rPr>
+              <a:t>6   </a:t>
+            </a:r>
+            <a:r>
+              <a:rPr sz="2000" b="0" i="0">
+                <a:solidFill>
+                  <a:srgbClr val="222B22"/>
+                </a:solidFill>
+                <a:latin typeface="Calibri"/>
+              </a:rPr>
+              <a:t>Closing prayer — and the Aaronic blessing, spoken over each other, face to face</a:t>
+            </a:r>
+          </a:p>
+        </p:txBody>
+      </p:sp>
+      <p:sp>
+        <p:nvSpPr>
+          <p:cNvPr id="6" name="TextBox 6"/>
+          <p:cNvSpPr txBox="1"/>
+          <p:nvPr/>
+        </p:nvSpPr>
+        <p:spPr>
+          <a:xfrm>
+            <a:off x="6766560" y="1737360"/>
+            <a:ext cx="4663440" cy="2926080"/>
+          </a:xfrm>
+          <a:prstGeom prst="rect">
+            <a:avLst/>
+          </a:prstGeom>
+          <a:solidFill>
+            <a:srgbClr val="F1F6EC"/>
+          </a:solidFill>
+        </p:spPr>
+        <p:txBody>
+          <a:bodyPr wrap="square" lIns="91440" tIns="91440" rIns="91440" bIns="91440" anchor="ctr"/>
+          <a:lstStyle/>
+          <a:p>
+            <a:pPr>
+              <a:spcAft>
+                <a:spcPts val="900"/>
+              </a:spcAft>
+            </a:pPr>
+            <a:r>
+              <a:rPr sz="1200" b="1" i="0">
+                <a:solidFill>
+                  <a:srgbClr val="97BC62"/>
+                </a:solidFill>
+                <a:latin typeface="Calibri"/>
+              </a:rPr>
+              <a:t>THE AARONIC BLESSING — NUMBERS 6:24–26</a:t>
+            </a:r>
+          </a:p>
+          <a:p>
+            <a:pPr>
+              <a:spcAft>
+                <a:spcPts val="600"/>
+              </a:spcAft>
+            </a:pPr>
+            <a:r>
+              <a:rPr sz="2400" b="0" i="1">
+                <a:solidFill>
+                  <a:srgbClr val="222B22"/>
+                </a:solidFill>
+                <a:latin typeface="Cambria"/>
+              </a:rPr>
+              <a:t>“The Lord bless you and keep you;</a:t>
+            </a:r>
+          </a:p>
+          <a:p>
+            <a:pPr>
+              <a:spcAft>
+                <a:spcPts val="600"/>
+              </a:spcAft>
+            </a:pPr>
+            <a:r>
+              <a:rPr sz="2400" b="0" i="1">
+                <a:solidFill>
+                  <a:srgbClr val="222B22"/>
+                </a:solidFill>
+                <a:latin typeface="Cambria"/>
+              </a:rPr>
+              <a:t>the Lord make his face to shine upon you, and be gracious to you;</a:t>
+            </a:r>
+          </a:p>
+          <a:p>
+            <a:pPr>
+              <a:spcAft>
+                <a:spcPts val="600"/>
+              </a:spcAft>
+            </a:pPr>
+            <a:r>
+              <a:rPr sz="2400" b="0" i="1">
+                <a:solidFill>
+                  <a:srgbClr val="222B22"/>
+                </a:solidFill>
+                <a:latin typeface="Cambria"/>
+              </a:rPr>
+              <a:t>the Lord lift up his countenance upon you, and give you peace.”</a:t>
+            </a:r>
+          </a:p>
+        </p:txBody>
+      </p:sp>
+      <p:sp>
+        <p:nvSpPr>
+          <p:cNvPr id="90" name="SlideNum"/>
+          <p:cNvSpPr txBox="1"/>
+          <p:nvPr/>
+        </p:nvSpPr>
+        <p:spPr>
+          <a:xfrm>
+            <a:off x="11384280" y="6446520"/>
+            <a:ext cx="640080" cy="292608"/>
+          </a:xfrm>
+          <a:prstGeom prst="rect">
+            <a:avLst/>
+          </a:prstGeom>
+          <a:noFill/>
+        </p:spPr>
+        <p:txBody>
+          <a:bodyPr wrap="none" lIns="0" tIns="0" rIns="45720" bIns="0" anchor="ctr"/>
+          <a:lstStyle/>
+          <a:p>
+            <a:pPr algn="r"/>
+            <a:r>
+              <a:t>195</a:t>
+            </a:r>
+            <a:endParaRPr sz="1000" b="1">
+              <a:solidFill>
+                <a:srgbClr val="7A8A6E"/>
+              </a:solidFill>
+              <a:latin typeface="Calibri"/>
+            </a:endParaRPr>
+          </a:p>
+        </p:txBody>
+      </p:sp>
+    </p:spTree>
+  </p:cSld>
+  <p:clrMapOvr>
+    <a:masterClrMapping/>
+  </p:clrMapOvr>
+</p:sld>
+</file>
+
+<file path=ppt/slides/slide14.xml><?xml version="1.0" encoding="utf-8"?>
+<p:sld xmlns:a="http://schemas.openxmlformats.org/drawingml/2006/main" xmlns:r="http://schemas.openxmlformats.org/officeDocument/2006/relationships" xmlns:p="http://schemas.openxmlformats.org/presentationml/2006/main">
+  <p:cSld>
+    <p:spTree>
+      <p:nvGrpSpPr>
+        <p:cNvPr id="1" name=""/>
+        <p:cNvGrpSpPr/>
+        <p:nvPr/>
+      </p:nvGrpSpPr>
+      <p:grpSpPr>
+        <a:xfrm>
+          <a:off x="0" y="0"/>
+          <a:ext cx="0" cy="0"/>
+          <a:chOff x="0" y="0"/>
+          <a:chExt cx="0" cy="0"/>
+        </a:xfrm>
+      </p:grpSpPr>
+      <p:sp>
+        <p:nvSpPr>
+          <p:cNvPr id="2" name="Rectangle 1"/>
+          <p:cNvSpPr/>
+          <p:nvPr/>
+        </p:nvSpPr>
+        <p:spPr>
+          <a:xfrm>
+            <a:off x="0" y="0"/>
+            <a:ext cx="12191695" cy="6858000"/>
+          </a:xfrm>
+          <a:prstGeom prst="rect">
+            <a:avLst/>
+          </a:prstGeom>
+          <a:solidFill>
+            <a:srgbClr val="FFFFFF"/>
+          </a:solidFill>
+          <a:ln>
+            <a:noFill/>
+          </a:ln>
+        </p:spPr>
+        <p:txBody>
+          <a:bodyPr/>
+          <a:lstStyle/>
+          <a:p>
+            <a:endParaRPr/>
+          </a:p>
+        </p:txBody>
+      </p:sp>
+      <p:sp>
+        <p:nvSpPr>
+          <p:cNvPr id="3" name="TextBox 2"/>
+          <p:cNvSpPr txBox="1"/>
+          <p:nvPr/>
+        </p:nvSpPr>
+        <p:spPr>
+          <a:xfrm>
+            <a:off x="822960" y="502920"/>
+            <a:ext cx="10515600" cy="822960"/>
+          </a:xfrm>
+          <a:prstGeom prst="rect">
+            <a:avLst/>
+          </a:prstGeom>
+          <a:noFill/>
+        </p:spPr>
+        <p:txBody>
+          <a:bodyPr wrap="square">
+            <a:spAutoFit/>
+          </a:bodyPr>
+          <a:lstStyle/>
+          <a:p>
+            <a:pPr algn="l">
+              <a:spcAft>
+                <a:spcPts val="600"/>
+              </a:spcAft>
+            </a:pPr>
+            <a:r>
+              <a:rPr sz="2800" b="1" i="0">
+                <a:solidFill>
+                  <a:srgbClr val="2C5F2D"/>
+                </a:solidFill>
+                <a:latin typeface="Cambria"/>
+              </a:rPr>
               <a:t>Homework — Two Weeks, Four Parts — This Week and Across the Break</a:t>
             </a:r>
           </a:p>
@@ -6365,211 +6637,6 @@
                 </a:solidFill>
                 <a:latin typeface="Cambria"/>
               </a:rPr>
-              <a:t>Where We Are — the Four Connects</a:t>
-            </a:r>
-          </a:p>
-        </p:txBody>
-      </p:sp>
-      <p:pic>
-        <p:nvPicPr>
-          <p:cNvPr id="4" name="Picture 3" descr="four-connects.png"/>
-          <p:cNvPicPr>
-            <a:picLocks noChangeAspect="1"/>
-          </p:cNvPicPr>
-          <p:nvPr/>
-        </p:nvPicPr>
-        <p:blipFill>
-          <a:blip r:embed="rId2"/>
-          <a:stretch>
-            <a:fillRect/>
-          </a:stretch>
-        </p:blipFill>
-        <p:spPr>
-          <a:xfrm>
-            <a:off x="932688" y="1645920"/>
-            <a:ext cx="10332720" cy="3708663"/>
-          </a:xfrm>
-          <a:prstGeom prst="rect">
-            <a:avLst/>
-          </a:prstGeom>
-        </p:spPr>
-      </p:pic>
-      <p:sp>
-        <p:nvSpPr>
-          <p:cNvPr id="5" name="TextBox 4"/>
-          <p:cNvSpPr txBox="1"/>
-          <p:nvPr/>
-        </p:nvSpPr>
-        <p:spPr>
-          <a:xfrm>
-            <a:off x="822960" y="5623560"/>
-            <a:ext cx="10515600" cy="914400"/>
-          </a:xfrm>
-          <a:prstGeom prst="rect">
-            <a:avLst/>
-          </a:prstGeom>
-          <a:noFill/>
-        </p:spPr>
-        <p:txBody>
-          <a:bodyPr wrap="square">
-            <a:spAutoFit/>
-          </a:bodyPr>
-          <a:lstStyle/>
-          <a:p>
-            <a:r>
-              <a:rPr sz="1800" b="0">
-                <a:solidFill>
-                  <a:srgbClr val="222B22"/>
-                </a:solidFill>
-                <a:latin typeface="Calibri"/>
-              </a:rPr>
-              <a:t>Session 15 gathers the whole map into a rhythm — </a:t>
-            </a:r>
-            <a:r>
-              <a:rPr sz="1800" b="1">
-                <a:solidFill>
-                  <a:srgbClr val="2C5F2D"/>
-                </a:solidFill>
-                <a:latin typeface="Calibri"/>
-              </a:rPr>
-              <a:t>all four Connects</a:t>
-            </a:r>
-            <a:r>
-              <a:rPr sz="1800" b="0">
-                <a:solidFill>
-                  <a:srgbClr val="222B22"/>
-                </a:solidFill>
-                <a:latin typeface="Calibri"/>
-              </a:rPr>
-              <a:t>, sustained. Each connection makes the next one real (Matt. 22:37–40).</a:t>
-            </a:r>
-          </a:p>
-        </p:txBody>
-      </p:sp>
-      <p:sp>
-        <p:nvSpPr>
-          <p:cNvPr id="90" name="SlideNum"/>
-          <p:cNvSpPr txBox="1"/>
-          <p:nvPr/>
-        </p:nvSpPr>
-        <p:spPr>
-          <a:xfrm>
-            <a:off x="11384280" y="6446520"/>
-            <a:ext cx="640080" cy="292608"/>
-          </a:xfrm>
-          <a:prstGeom prst="rect">
-            <a:avLst/>
-          </a:prstGeom>
-          <a:noFill/>
-        </p:spPr>
-        <p:txBody>
-          <a:bodyPr wrap="none" lIns="0" tIns="0" rIns="45720" bIns="0" anchor="ctr"/>
-          <a:lstStyle/>
-          <a:p>
-            <a:pPr algn="r"/>
-            <a:r>
-              <a:t>185a</a:t>
-            </a:r>
-            <a:endParaRPr sz="1000" b="1">
-              <a:solidFill>
-                <a:srgbClr val="7A8A6E"/>
-              </a:solidFill>
-              <a:latin typeface="Calibri"/>
-            </a:endParaRPr>
-          </a:p>
-        </p:txBody>
-      </p:sp>
-    </p:spTree>
-  </p:cSld>
-  <p:clrMapOvr>
-    <a:masterClrMapping/>
-  </p:clrMapOvr>
-</p:sld>
-</file>
-
-<file path=ppt/slides/slide16.xml><?xml version="1.0" encoding="utf-8"?>
-<p:sld xmlns:a="http://schemas.openxmlformats.org/drawingml/2006/main" xmlns:p="http://schemas.openxmlformats.org/presentationml/2006/main" xmlns:r="http://schemas.openxmlformats.org/officeDocument/2006/relationships">
-  <p:cSld>
-    <p:spTree>
-      <p:nvGrpSpPr>
-        <p:cNvPr id="1" name=""/>
-        <p:cNvGrpSpPr/>
-        <p:nvPr/>
-      </p:nvGrpSpPr>
-      <p:grpSpPr/>
-      <p:sp>
-        <p:nvSpPr>
-          <p:cNvPr id="2" name="Rectangle 1"/>
-          <p:cNvSpPr/>
-          <p:nvPr/>
-        </p:nvSpPr>
-        <p:spPr>
-          <a:xfrm>
-            <a:off x="0" y="0"/>
-            <a:ext cx="12192000" cy="6858000"/>
-          </a:xfrm>
-          <a:prstGeom prst="rect">
-            <a:avLst/>
-          </a:prstGeom>
-          <a:solidFill>
-            <a:srgbClr val="FFFFFF"/>
-          </a:solidFill>
-          <a:ln>
-            <a:noFill/>
-          </a:ln>
-          <a:effectLst/>
-        </p:spPr>
-        <p:style>
-          <a:lnRef idx="1">
-            <a:schemeClr val="accent1"/>
-          </a:lnRef>
-          <a:fillRef idx="3">
-            <a:schemeClr val="accent1"/>
-          </a:fillRef>
-          <a:effectRef idx="2">
-            <a:schemeClr val="accent1"/>
-          </a:effectRef>
-          <a:fontRef idx="minor">
-            <a:schemeClr val="lt1"/>
-          </a:fontRef>
-        </p:style>
-        <p:txBody>
-          <a:bodyPr rtlCol="0" anchor="ctr"/>
-          <a:lstStyle/>
-          <a:p>
-            <a:pPr algn="ctr"/>
-          </a:p>
-        </p:txBody>
-      </p:sp>
-      <p:sp>
-        <p:nvSpPr>
-          <p:cNvPr id="3" name="TextBox 2"/>
-          <p:cNvSpPr txBox="1"/>
-          <p:nvPr/>
-        </p:nvSpPr>
-        <p:spPr>
-          <a:xfrm>
-            <a:off x="822960" y="502920"/>
-            <a:ext cx="10515600" cy="822960"/>
-          </a:xfrm>
-          <a:prstGeom prst="rect">
-            <a:avLst/>
-          </a:prstGeom>
-          <a:noFill/>
-        </p:spPr>
-        <p:txBody>
-          <a:bodyPr wrap="square">
-            <a:spAutoFit/>
-          </a:bodyPr>
-          <a:lstStyle/>
-          <a:p>
-            <a:r>
-              <a:rPr sz="2800" b="1">
-                <a:solidFill>
-                  <a:srgbClr val="2C5F2D"/>
-                </a:solidFill>
-                <a:latin typeface="Cambria"/>
-              </a:rPr>
               <a:t>The Take-Home Sheet — the Daily Rhythm</a:t>
             </a:r>
           </a:p>
@@ -6679,7 +6746,7 @@
 </p:sld>
 </file>
 
-<file path=ppt/slides/slide17.xml><?xml version="1.0" encoding="utf-8"?>
+<file path=ppt/slides/slide16.xml><?xml version="1.0" encoding="utf-8"?>
 <p:sld xmlns:a="http://schemas.openxmlformats.org/drawingml/2006/main" xmlns:p="http://schemas.openxmlformats.org/presentationml/2006/main" xmlns:r="http://schemas.openxmlformats.org/officeDocument/2006/relationships">
   <p:cSld>
     <p:spTree>
@@ -7121,7 +7188,7 @@
 </file>
 
 <file path=ppt/slides/slide3.xml><?xml version="1.0" encoding="utf-8"?>
-<p:sld xmlns:a="http://schemas.openxmlformats.org/drawingml/2006/main" xmlns:r="http://schemas.openxmlformats.org/officeDocument/2006/relationships" xmlns:p="http://schemas.openxmlformats.org/presentationml/2006/main">
+<p:sld xmlns:a="http://schemas.openxmlformats.org/drawingml/2006/main" xmlns:p="http://schemas.openxmlformats.org/presentationml/2006/main" xmlns:r="http://schemas.openxmlformats.org/officeDocument/2006/relationships">
   <p:cSld>
     <p:spTree>
       <p:nvGrpSpPr>
@@ -7129,14 +7196,7 @@
         <p:cNvGrpSpPr/>
         <p:nvPr/>
       </p:nvGrpSpPr>
-      <p:grpSpPr>
-        <a:xfrm>
-          <a:off x="0" y="0"/>
-          <a:ext cx="0" cy="0"/>
-          <a:chOff x="0" y="0"/>
-          <a:chExt cx="0" cy="0"/>
-        </a:xfrm>
-      </p:grpSpPr>
+      <p:grpSpPr/>
       <p:sp>
         <p:nvSpPr>
           <p:cNvPr id="2" name="Rectangle 1"/>
@@ -7146,7 +7206,7 @@
         <p:spPr>
           <a:xfrm>
             <a:off x="0" y="0"/>
-            <a:ext cx="12191695" cy="6858000"/>
+            <a:ext cx="12192000" cy="6858000"/>
           </a:xfrm>
           <a:prstGeom prst="rect">
             <a:avLst/>
@@ -7178,7 +7238,6 @@
           <a:lstStyle/>
           <a:p>
             <a:pPr algn="ctr"/>
-            <a:endParaRPr/>
           </a:p>
         </p:txBody>
       </p:sp>
@@ -7204,33 +7263,28 @@
           </a:bodyPr>
           <a:lstStyle/>
           <a:p>
-            <a:pPr algn="l">
-              <a:spcAft>
-                <a:spcPts val="600"/>
-              </a:spcAft>
-            </a:pPr>
-            <a:r>
-              <a:rPr sz="2800" b="1" i="0">
+            <a:r>
+              <a:rPr sz="2800" b="1">
                 <a:solidFill>
                   <a:srgbClr val="2C5F2D"/>
                 </a:solidFill>
                 <a:latin typeface="Cambria"/>
               </a:rPr>
-              <a:t>Session 15 — Tonight’s Road</a:t>
-            </a:r>
-          </a:p>
-        </p:txBody>
-      </p:sp>
-      <p:sp>
-        <p:nvSpPr>
-          <p:cNvPr id="4" name="TextBox 3"/>
+              <a:t>Where We Are — the Four Connects</a:t>
+            </a:r>
+          </a:p>
+        </p:txBody>
+      </p:sp>
+      <p:sp>
+        <p:nvSpPr>
+          <p:cNvPr id="5" name="TextBox 4"/>
           <p:cNvSpPr txBox="1"/>
           <p:nvPr/>
         </p:nvSpPr>
         <p:spPr>
           <a:xfrm>
-            <a:off x="822960" y="1508760"/>
-            <a:ext cx="7040880" cy="4754880"/>
+            <a:off x="822960" y="5623560"/>
+            <a:ext cx="10515600" cy="914400"/>
           </a:xfrm>
           <a:prstGeom prst="rect">
             <a:avLst/>
@@ -7243,228 +7297,32 @@
           </a:bodyPr>
           <a:lstStyle/>
           <a:p>
-            <a:pPr>
-              <a:spcAft>
-                <a:spcPts val="500"/>
-              </a:spcAft>
-            </a:pPr>
-            <a:r>
-              <a:rPr sz="2800" b="1">
-                <a:solidFill>
-                  <a:srgbClr val="97BC62"/>
-                </a:solidFill>
-                <a:latin typeface="Calibri"/>
-              </a:rPr>
-              <a:t>1   </a:t>
-            </a:r>
-            <a:r>
-              <a:rPr sz="2800">
+            <a:r>
+              <a:rPr sz="1800" b="0">
                 <a:solidFill>
                   <a:srgbClr val="222B22"/>
                 </a:solidFill>
                 <a:latin typeface="Calibri"/>
               </a:rPr>
-              <a:t>Welcome and centering</a:t>
-            </a:r>
-          </a:p>
-          <a:p>
-            <a:pPr>
-              <a:spcAft>
-                <a:spcPts val="500"/>
-              </a:spcAft>
-            </a:pPr>
-            <a:r>
-              <a:rPr sz="2800" b="1">
-                <a:solidFill>
-                  <a:srgbClr val="97BC62"/>
-                </a:solidFill>
-                <a:latin typeface="Calibri"/>
-              </a:rPr>
-              <a:t>2   </a:t>
-            </a:r>
-            <a:r>
-              <a:rPr sz="2800">
+              <a:t>Session 15 gathers the whole map into a rhythm — </a:t>
+            </a:r>
+            <a:r>
+              <a:rPr sz="1800" b="1">
+                <a:solidFill>
+                  <a:srgbClr val="2C5F2D"/>
+                </a:solidFill>
+                <a:latin typeface="Calibri"/>
+              </a:rPr>
+              <a:t>all four Connects</a:t>
+            </a:r>
+            <a:r>
+              <a:rPr sz="1800" b="0">
                 <a:solidFill>
                   <a:srgbClr val="222B22"/>
                 </a:solidFill>
                 <a:latin typeface="Calibri"/>
               </a:rPr>
-              <a:t>Week 13 completion</a:t>
-            </a:r>
-          </a:p>
-          <a:p>
-            <a:pPr>
-              <a:spcAft>
-                <a:spcPts val="500"/>
-              </a:spcAft>
-            </a:pPr>
-            <a:r>
-              <a:rPr sz="2800" b="1">
-                <a:solidFill>
-                  <a:srgbClr val="97BC62"/>
-                </a:solidFill>
-                <a:latin typeface="Calibri"/>
-              </a:rPr>
-              <a:t>3   </a:t>
-            </a:r>
-            <a:r>
-              <a:rPr sz="2800">
-                <a:solidFill>
-                  <a:srgbClr val="222B22"/>
-                </a:solidFill>
-                <a:latin typeface="Calibri"/>
-              </a:rPr>
-              <a:t>The long walk — Gal. 6:9</a:t>
-            </a:r>
-          </a:p>
-          <a:p>
-            <a:pPr>
-              <a:spcAft>
-                <a:spcPts val="500"/>
-              </a:spcAft>
-            </a:pPr>
-            <a:r>
-              <a:rPr sz="2800" b="1">
-                <a:solidFill>
-                  <a:srgbClr val="97BC62"/>
-                </a:solidFill>
-                <a:latin typeface="Calibri"/>
-              </a:rPr>
-              <a:t>4   </a:t>
-            </a:r>
-            <a:r>
-              <a:rPr sz="2800">
-                <a:solidFill>
-                  <a:srgbClr val="222B22"/>
-                </a:solidFill>
-                <a:latin typeface="Calibri"/>
-              </a:rPr>
-              <a:t>The Rhythm Card introduced</a:t>
-            </a:r>
-          </a:p>
-          <a:p>
-            <a:pPr>
-              <a:spcAft>
-                <a:spcPts val="500"/>
-              </a:spcAft>
-            </a:pPr>
-            <a:r>
-              <a:rPr sz="2800" b="1">
-                <a:solidFill>
-                  <a:srgbClr val="97BC62"/>
-                </a:solidFill>
-                <a:latin typeface="Calibri"/>
-              </a:rPr>
-              <a:t>5   </a:t>
-            </a:r>
-            <a:r>
-              <a:rPr sz="2800">
-                <a:solidFill>
-                  <a:srgbClr val="222B22"/>
-                </a:solidFill>
-                <a:latin typeface="Calibri"/>
-              </a:rPr>
-              <a:t>Building your Rhythm Card</a:t>
-            </a:r>
-          </a:p>
-          <a:p>
-            <a:pPr>
-              <a:spcAft>
-                <a:spcPts val="500"/>
-              </a:spcAft>
-            </a:pPr>
-            <a:r>
-              <a:rPr sz="2800" b="1">
-                <a:solidFill>
-                  <a:srgbClr val="97BC62"/>
-                </a:solidFill>
-                <a:latin typeface="Calibri"/>
-              </a:rPr>
-              <a:t>6   </a:t>
-            </a:r>
-            <a:r>
-              <a:rPr sz="2800">
-                <a:solidFill>
-                  <a:srgbClr val="222B22"/>
-                </a:solidFill>
-                <a:latin typeface="Calibri"/>
-              </a:rPr>
-              <a:t>The Four Questions</a:t>
-            </a:r>
-          </a:p>
-          <a:p>
-            <a:pPr>
-              <a:spcAft>
-                <a:spcPts val="500"/>
-              </a:spcAft>
-            </a:pPr>
-            <a:r>
-              <a:rPr sz="2800" b="1">
-                <a:solidFill>
-                  <a:srgbClr val="97BC62"/>
-                </a:solidFill>
-                <a:latin typeface="Calibri"/>
-              </a:rPr>
-              <a:t>7   </a:t>
-            </a:r>
-            <a:r>
-              <a:rPr sz="2800">
-                <a:solidFill>
-                  <a:srgbClr val="222B22"/>
-                </a:solidFill>
-                <a:latin typeface="Calibri"/>
-              </a:rPr>
-              <a:t>The Leader Feedback Round — both leaders</a:t>
-            </a:r>
-          </a:p>
-          <a:p>
-            <a:pPr>
-              <a:spcAft>
-                <a:spcPts val="500"/>
-              </a:spcAft>
-            </a:pPr>
-            <a:r>
-              <a:rPr sz="2800" b="1">
-                <a:solidFill>
-                  <a:srgbClr val="97BC62"/>
-                </a:solidFill>
-                <a:latin typeface="Calibri"/>
-              </a:rPr>
-              <a:t>8   </a:t>
-            </a:r>
-            <a:r>
-              <a:rPr sz="2800">
-                <a:solidFill>
-                  <a:srgbClr val="222B22"/>
-                </a:solidFill>
-                <a:latin typeface="Calibri"/>
-              </a:rPr>
-              <a:t>Between-week practice — the Rhythm Card begins; the Four Questions go home</a:t>
-            </a:r>
-          </a:p>
-          <a:p>
-            <a:pPr>
-              <a:spcAft>
-                <a:spcPts val="500"/>
-              </a:spcAft>
-            </a:pPr>
-            <a:r>
-              <a:rPr sz="2800" b="1">
-                <a:solidFill>
-                  <a:srgbClr val="97BC62"/>
-                </a:solidFill>
-                <a:latin typeface="Calibri"/>
-              </a:rPr>
-              <a:t>9   </a:t>
-            </a:r>
-            <a:r>
-              <a:rPr sz="2800">
-                <a:solidFill>
-                  <a:srgbClr val="222B22"/>
-                </a:solidFill>
-                <a:latin typeface="Calibri"/>
-              </a:rPr>
-              <a:t>Closing container + Aaronic blessing</a:t>
+              <a:t>, sustained. Each connection makes the next one real (Matt. 22:37–40).</a:t>
             </a:r>
           </a:p>
         </p:txBody>
@@ -7491,7 +7349,7 @@
           <a:p>
             <a:pPr algn="r"/>
             <a:r>
-              <a:t>186</a:t>
+              <a:t>185a</a:t>
             </a:r>
             <a:endParaRPr sz="1000" b="1">
               <a:solidFill>
@@ -7504,38 +7362,26 @@
       </p:sp>
       <p:pic>
         <p:nvPicPr>
-          <p:cNvPr id="31" name="Picture 31" descr="the open container bowl"/>
+          <p:cNvPr id="91" name="Picture 90" descr="four-connects.png"/>
           <p:cNvPicPr>
             <a:picLocks noChangeAspect="1"/>
           </p:cNvPicPr>
           <p:nvPr/>
         </p:nvPicPr>
         <p:blipFill>
-          <a:blip r:embed="rId3"/>
+          <a:blip r:embed="rId4"/>
           <a:stretch>
             <a:fillRect/>
           </a:stretch>
         </p:blipFill>
         <p:spPr>
           <a:xfrm>
-            <a:off x="8001000" y="1554480"/>
-            <a:ext cx="3017520" cy="4526280"/>
+            <a:off x="932688" y="1645920"/>
+            <a:ext cx="10332720" cy="3708663"/>
           </a:xfrm>
           <a:prstGeom prst="rect">
             <a:avLst/>
           </a:prstGeom>
-          <a:ln w="76200">
-            <a:solidFill>
-              <a:srgbClr val="FFFFFF"/>
-            </a:solidFill>
-          </a:ln>
-          <a:effectLst>
-            <a:outerShdw blurRad="63500" dist="25400" dir="5400000" rotWithShape="0">
-              <a:srgbClr val="000000">
-                <a:alpha val="35000"/>
-              </a:srgbClr>
-            </a:outerShdw>
-          </a:effectLst>
         </p:spPr>
       </p:pic>
     </p:spTree>
@@ -7583,11 +7429,27 @@
           <a:ln>
             <a:noFill/>
           </a:ln>
-        </p:spPr>
-        <p:txBody>
-          <a:bodyPr/>
-          <a:lstStyle/>
-          <a:p>
+          <a:effectLst/>
+        </p:spPr>
+        <p:style>
+          <a:lnRef idx="1">
+            <a:schemeClr val="accent1"/>
+          </a:lnRef>
+          <a:fillRef idx="3">
+            <a:schemeClr val="accent1"/>
+          </a:fillRef>
+          <a:effectRef idx="2">
+            <a:schemeClr val="accent1"/>
+          </a:effectRef>
+          <a:fontRef idx="minor">
+            <a:schemeClr val="lt1"/>
+          </a:fontRef>
+        </p:style>
+        <p:txBody>
+          <a:bodyPr rtlCol="0" anchor="ctr"/>
+          <a:lstStyle/>
+          <a:p>
+            <a:pPr algn="ctr"/>
             <a:endParaRPr/>
           </a:p>
         </p:txBody>
@@ -7626,21 +7488,21 @@
                 </a:solidFill>
                 <a:latin typeface="Cambria"/>
               </a:rPr>
-              <a:t>Opening Container — the Eight Steps</a:t>
-            </a:r>
-          </a:p>
-        </p:txBody>
-      </p:sp>
-      <p:sp>
-        <p:nvSpPr>
-          <p:cNvPr id="4" name="TextBox 4"/>
+              <a:t>Session 15 — Tonight’s Road</a:t>
+            </a:r>
+          </a:p>
+        </p:txBody>
+      </p:sp>
+      <p:sp>
+        <p:nvSpPr>
+          <p:cNvPr id="4" name="TextBox 3"/>
           <p:cNvSpPr txBox="1"/>
           <p:nvPr/>
         </p:nvSpPr>
         <p:spPr>
           <a:xfrm>
-            <a:off x="822960" y="1554480"/>
-            <a:ext cx="10515600" cy="4892040"/>
+            <a:off x="822960" y="1508760"/>
+            <a:ext cx="7040880" cy="4754880"/>
           </a:xfrm>
           <a:prstGeom prst="rect">
             <a:avLst/>
@@ -7648,16 +7510,18 @@
           <a:noFill/>
         </p:spPr>
         <p:txBody>
-          <a:bodyPr wrap="square" lIns="91440" tIns="91440" rIns="91440" bIns="91440"/>
-          <a:lstStyle/>
-          <a:p>
-            <a:pPr marL="342900" indent="-342900">
+          <a:bodyPr wrap="square">
+            <a:spAutoFit/>
+          </a:bodyPr>
+          <a:lstStyle/>
+          <a:p>
+            <a:pPr>
               <a:spcAft>
-                <a:spcPts val="650"/>
+                <a:spcPts val="500"/>
               </a:spcAft>
             </a:pPr>
             <a:r>
-              <a:rPr sz="2400" b="1" i="0">
+              <a:rPr sz="2800" b="1">
                 <a:solidFill>
                   <a:srgbClr val="97BC62"/>
                 </a:solidFill>
@@ -7666,23 +7530,23 @@
               <a:t>1   </a:t>
             </a:r>
             <a:r>
-              <a:rPr sz="2400" b="0" i="0">
+              <a:rPr sz="2800">
                 <a:solidFill>
                   <a:srgbClr val="222B22"/>
                 </a:solidFill>
                 <a:latin typeface="Calibri"/>
               </a:rPr>
-              <a:t>Welcome — five minutes to open the container</a:t>
-            </a:r>
-          </a:p>
-          <a:p>
-            <a:pPr marL="342900" indent="-342900">
+              <a:t>Welcome and centering</a:t>
+            </a:r>
+          </a:p>
+          <a:p>
+            <a:pPr>
               <a:spcAft>
-                <a:spcPts val="650"/>
+                <a:spcPts val="500"/>
               </a:spcAft>
             </a:pPr>
             <a:r>
-              <a:rPr sz="2400" b="1" i="0">
+              <a:rPr sz="2800" b="1">
                 <a:solidFill>
                   <a:srgbClr val="97BC62"/>
                 </a:solidFill>
@@ -7691,23 +7555,23 @@
               <a:t>2   </a:t>
             </a:r>
             <a:r>
-              <a:rPr sz="2400" b="0" i="0">
+              <a:rPr sz="2800">
                 <a:solidFill>
                   <a:srgbClr val="222B22"/>
                 </a:solidFill>
                 <a:latin typeface="Calibri"/>
               </a:rPr>
-              <a:t>Phones silenced and put away</a:t>
-            </a:r>
-          </a:p>
-          <a:p>
-            <a:pPr marL="342900" indent="-342900">
+              <a:t>Week 13 completion</a:t>
+            </a:r>
+          </a:p>
+          <a:p>
+            <a:pPr>
               <a:spcAft>
-                <a:spcPts val="650"/>
+                <a:spcPts val="500"/>
               </a:spcAft>
             </a:pPr>
             <a:r>
-              <a:rPr sz="2400" b="1" i="0">
+              <a:rPr sz="2800" b="1">
                 <a:solidFill>
                   <a:srgbClr val="97BC62"/>
                 </a:solidFill>
@@ -7716,23 +7580,23 @@
               <a:t>3   </a:t>
             </a:r>
             <a:r>
-              <a:rPr sz="2400" b="0" i="0">
+              <a:rPr sz="2800">
                 <a:solidFill>
                   <a:srgbClr val="222B22"/>
                 </a:solidFill>
                 <a:latin typeface="Calibri"/>
               </a:rPr>
-              <a:t>Stand in a circle</a:t>
-            </a:r>
-          </a:p>
-          <a:p>
-            <a:pPr marL="342900" indent="-342900">
+              <a:t>The long walk — Gal. 6:9</a:t>
+            </a:r>
+          </a:p>
+          <a:p>
+            <a:pPr>
               <a:spcAft>
-                <a:spcPts val="650"/>
+                <a:spcPts val="500"/>
               </a:spcAft>
             </a:pPr>
             <a:r>
-              <a:rPr sz="2400" b="1" i="0">
+              <a:rPr sz="2800" b="1">
                 <a:solidFill>
                   <a:srgbClr val="97BC62"/>
                 </a:solidFill>
@@ -7741,23 +7605,23 @@
               <a:t>4   </a:t>
             </a:r>
             <a:r>
-              <a:rPr sz="2400" b="0" i="0">
+              <a:rPr sz="2800">
                 <a:solidFill>
                   <a:srgbClr val="222B22"/>
                 </a:solidFill>
                 <a:latin typeface="Calibri"/>
               </a:rPr>
-              <a:t>One-word check-in — how you actually are, right now</a:t>
-            </a:r>
-          </a:p>
-          <a:p>
-            <a:pPr marL="342900" indent="-342900">
+              <a:t>The Rhythm Card introduced</a:t>
+            </a:r>
+          </a:p>
+          <a:p>
+            <a:pPr>
               <a:spcAft>
-                <a:spcPts val="650"/>
+                <a:spcPts val="500"/>
               </a:spcAft>
             </a:pPr>
             <a:r>
-              <a:rPr sz="2400" b="1" i="0">
+              <a:rPr sz="2800" b="1">
                 <a:solidFill>
                   <a:srgbClr val="97BC62"/>
                 </a:solidFill>
@@ -7766,23 +7630,23 @@
               <a:t>5   </a:t>
             </a:r>
             <a:r>
-              <a:rPr sz="2400" b="0" i="0">
+              <a:rPr sz="2800">
                 <a:solidFill>
                   <a:srgbClr val="222B22"/>
                 </a:solidFill>
                 <a:latin typeface="Calibri"/>
               </a:rPr>
-              <a:t>Put out / bring in — set something down; bring a blessing in</a:t>
-            </a:r>
-          </a:p>
-          <a:p>
-            <a:pPr marL="342900" indent="-342900">
+              <a:t>Building your Rhythm Card</a:t>
+            </a:r>
+          </a:p>
+          <a:p>
+            <a:pPr>
               <a:spcAft>
-                <a:spcPts val="650"/>
+                <a:spcPts val="500"/>
               </a:spcAft>
             </a:pPr>
             <a:r>
-              <a:rPr sz="2400" b="1" i="0">
+              <a:rPr sz="2800" b="1">
                 <a:solidFill>
                   <a:srgbClr val="97BC62"/>
                 </a:solidFill>
@@ -7791,23 +7655,23 @@
               <a:t>6   </a:t>
             </a:r>
             <a:r>
-              <a:rPr sz="2400" b="0" i="0">
+              <a:rPr sz="2800">
                 <a:solidFill>
                   <a:srgbClr val="222B22"/>
                 </a:solidFill>
                 <a:latin typeface="Calibri"/>
               </a:rPr>
-              <a:t>Spoken commitment: “I am here. I am paying attention. I am willing to be moved.”</a:t>
-            </a:r>
-          </a:p>
-          <a:p>
-            <a:pPr marL="342900" indent="-342900">
+              <a:t>The Four Questions</a:t>
+            </a:r>
+          </a:p>
+          <a:p>
+            <a:pPr>
               <a:spcAft>
-                <a:spcPts val="650"/>
+                <a:spcPts val="500"/>
               </a:spcAft>
             </a:pPr>
             <a:r>
-              <a:rPr sz="2400" b="1" i="0">
+              <a:rPr sz="2800" b="1">
                 <a:solidFill>
                   <a:srgbClr val="97BC62"/>
                 </a:solidFill>
@@ -7816,23 +7680,23 @@
               <a:t>7   </a:t>
             </a:r>
             <a:r>
-              <a:rPr sz="2400" b="0" i="0">
+              <a:rPr sz="2800">
                 <a:solidFill>
                   <a:srgbClr val="222B22"/>
                 </a:solidFill>
                 <a:latin typeface="Calibri"/>
               </a:rPr>
-              <a:t>Opening prayer — “Holy Spirit, you are welcome here. Speak. We are listening.”</a:t>
-            </a:r>
-          </a:p>
-          <a:p>
-            <a:pPr marL="342900" indent="-342900">
+              <a:t>The Leader Feedback Round — both leaders</a:t>
+            </a:r>
+          </a:p>
+          <a:p>
+            <a:pPr>
               <a:spcAft>
-                <a:spcPts val="650"/>
+                <a:spcPts val="500"/>
               </a:spcAft>
             </a:pPr>
             <a:r>
-              <a:rPr sz="2400" b="1" i="0">
+              <a:rPr sz="2800" b="1">
                 <a:solidFill>
                   <a:srgbClr val="97BC62"/>
                 </a:solidFill>
@@ -7841,13 +7705,38 @@
               <a:t>8   </a:t>
             </a:r>
             <a:r>
-              <a:rPr sz="2400" b="0" i="0">
+              <a:rPr sz="2800">
                 <a:solidFill>
                   <a:srgbClr val="222B22"/>
                 </a:solidFill>
                 <a:latin typeface="Calibri"/>
               </a:rPr>
-              <a:t>Sit. Begin.</a:t>
+              <a:t>Between-week practice — the Rhythm Card begins; the Four Questions go home</a:t>
+            </a:r>
+          </a:p>
+          <a:p>
+            <a:pPr>
+              <a:spcAft>
+                <a:spcPts val="500"/>
+              </a:spcAft>
+            </a:pPr>
+            <a:r>
+              <a:rPr sz="2800" b="1">
+                <a:solidFill>
+                  <a:srgbClr val="97BC62"/>
+                </a:solidFill>
+                <a:latin typeface="Calibri"/>
+              </a:rPr>
+              <a:t>9   </a:t>
+            </a:r>
+            <a:r>
+              <a:rPr sz="2800">
+                <a:solidFill>
+                  <a:srgbClr val="222B22"/>
+                </a:solidFill>
+                <a:latin typeface="Calibri"/>
+              </a:rPr>
+              <a:t>Closing container + Aaronic blessing</a:t>
             </a:r>
           </a:p>
         </p:txBody>
@@ -7874,7 +7763,7 @@
           <a:p>
             <a:pPr algn="r"/>
             <a:r>
-              <a:t>187</a:t>
+              <a:t>186</a:t>
             </a:r>
             <a:endParaRPr sz="1000" b="1">
               <a:solidFill>
@@ -7885,6 +7774,42 @@
           </a:p>
         </p:txBody>
       </p:sp>
+      <p:pic>
+        <p:nvPicPr>
+          <p:cNvPr id="31" name="Picture 31" descr="the open container bowl"/>
+          <p:cNvPicPr>
+            <a:picLocks noChangeAspect="1"/>
+          </p:cNvPicPr>
+          <p:nvPr/>
+        </p:nvPicPr>
+        <p:blipFill>
+          <a:blip r:embed="rId3"/>
+          <a:stretch>
+            <a:fillRect/>
+          </a:stretch>
+        </p:blipFill>
+        <p:spPr>
+          <a:xfrm>
+            <a:off x="8001000" y="1554480"/>
+            <a:ext cx="3017520" cy="4526280"/>
+          </a:xfrm>
+          <a:prstGeom prst="rect">
+            <a:avLst/>
+          </a:prstGeom>
+          <a:ln w="76200">
+            <a:solidFill>
+              <a:srgbClr val="FFFFFF"/>
+            </a:solidFill>
+          </a:ln>
+          <a:effectLst>
+            <a:outerShdw blurRad="63500" dist="25400" dir="5400000" rotWithShape="0">
+              <a:srgbClr val="000000">
+                <a:alpha val="35000"/>
+              </a:srgbClr>
+            </a:outerShdw>
+          </a:effectLst>
+        </p:spPr>
+      </p:pic>
     </p:spTree>
   </p:cSld>
   <p:clrMapOvr>
@@ -7973,7 +7898,7 @@
                 </a:solidFill>
                 <a:latin typeface="Cambria"/>
               </a:rPr>
-              <a:t>Week 13 Completion — Finishing the Mission Week</a:t>
+              <a:t>Opening Container — the Eight Steps</a:t>
             </a:r>
           </a:p>
         </p:txBody>
@@ -7998,128 +7923,203 @@
           <a:bodyPr wrap="square" lIns="91440" tIns="91440" rIns="91440" bIns="91440"/>
           <a:lstStyle/>
           <a:p>
-            <a:pPr marL="274320" indent="-274320">
+            <a:pPr marL="342900" indent="-342900">
               <a:spcAft>
-                <a:spcPts val="900"/>
+                <a:spcPts val="650"/>
               </a:spcAft>
             </a:pPr>
             <a:r>
-              <a:rPr sz="2800" b="1" i="0">
+              <a:rPr sz="2400" b="1" i="0">
                 <a:solidFill>
                   <a:srgbClr val="97BC62"/>
                 </a:solidFill>
                 <a:latin typeface="Calibri"/>
               </a:rPr>
-              <a:t>•  </a:t>
-            </a:r>
-            <a:r>
-              <a:rPr sz="2800" b="0" i="0">
+              <a:t>1   </a:t>
+            </a:r>
+            <a:r>
+              <a:rPr sz="2400" b="0" i="0">
                 <a:solidFill>
                   <a:srgbClr val="222B22"/>
                 </a:solidFill>
                 <a:latin typeface="Calibri"/>
               </a:rPr>
-              <a:t>“Before we walk forward, we finish the Mission week” — unfinished downhill answers finish here</a:t>
-            </a:r>
-          </a:p>
-          <a:p>
-            <a:pPr marL="274320" indent="-274320">
+              <a:t>Welcome — five minutes to open the container</a:t>
+            </a:r>
+          </a:p>
+          <a:p>
+            <a:pPr marL="342900" indent="-342900">
               <a:spcAft>
-                <a:spcPts val="900"/>
+                <a:spcPts val="650"/>
               </a:spcAft>
             </a:pPr>
             <a:r>
-              <a:rPr sz="2800" b="1" i="0">
+              <a:rPr sz="2400" b="1" i="0">
                 <a:solidFill>
                   <a:srgbClr val="97BC62"/>
                 </a:solidFill>
                 <a:latin typeface="Calibri"/>
               </a:rPr>
-              <a:t>•  </a:t>
-            </a:r>
-            <a:r>
-              <a:rPr sz="2800" b="0" i="0">
+              <a:t>2   </a:t>
+            </a:r>
+            <a:r>
+              <a:rPr sz="2400" b="0" i="0">
                 <a:solidFill>
                   <a:srgbClr val="222B22"/>
                 </a:solidFill>
                 <a:latin typeface="Calibri"/>
               </a:rPr>
-              <a:t>Two weeks of living with the question usually deepens it — one sentence, now, to the room</a:t>
-            </a:r>
-          </a:p>
-          <a:p>
-            <a:pPr marL="274320" indent="-274320">
+              <a:t>Phones silenced and put away</a:t>
+            </a:r>
+          </a:p>
+          <a:p>
+            <a:pPr marL="342900" indent="-342900">
               <a:spcAft>
-                <a:spcPts val="900"/>
+                <a:spcPts val="650"/>
               </a:spcAft>
             </a:pPr>
             <a:r>
-              <a:rPr sz="2800" b="1" i="0">
+              <a:rPr sz="2400" b="1" i="0">
                 <a:solidFill>
                   <a:srgbClr val="97BC62"/>
                 </a:solidFill>
                 <a:latin typeface="Calibri"/>
               </a:rPr>
-              <a:t>•  </a:t>
-            </a:r>
-            <a:r>
-              <a:rPr sz="2800" b="0" i="0">
+              <a:t>3   </a:t>
+            </a:r>
+            <a:r>
+              <a:rPr sz="2400" b="0" i="0">
                 <a:solidFill>
                   <a:srgbClr val="222B22"/>
                 </a:solidFill>
                 <a:latin typeface="Calibri"/>
               </a:rPr>
-              <a:t>A parent opens the round; teens choose their own depth after — pass-anytime holds</a:t>
-            </a:r>
-          </a:p>
-          <a:p>
-            <a:pPr marL="274320" indent="-274320">
+              <a:t>Stand in a circle</a:t>
+            </a:r>
+          </a:p>
+          <a:p>
+            <a:pPr marL="342900" indent="-342900">
               <a:spcAft>
-                <a:spcPts val="900"/>
+                <a:spcPts val="650"/>
               </a:spcAft>
             </a:pPr>
             <a:r>
-              <a:rPr sz="2800" b="1" i="0">
+              <a:rPr sz="2400" b="1" i="0">
                 <a:solidFill>
                   <a:srgbClr val="97BC62"/>
                 </a:solidFill>
                 <a:latin typeface="Calibri"/>
               </a:rPr>
-              <a:t>•  </a:t>
-            </a:r>
-            <a:r>
-              <a:rPr sz="2800" b="0" i="0">
+              <a:t>4   </a:t>
+            </a:r>
+            <a:r>
+              <a:rPr sz="2400" b="0" i="0">
                 <a:solidFill>
                   <a:srgbClr val="222B22"/>
                 </a:solidFill>
                 <a:latin typeface="Calibri"/>
               </a:rPr>
-              <a:t>The answers carry forward to the Week 21 commissioning</a:t>
-            </a:r>
-          </a:p>
-          <a:p>
-            <a:pPr marL="274320" indent="-274320">
+              <a:t>One-word check-in — how you actually are, right now</a:t>
+            </a:r>
+          </a:p>
+          <a:p>
+            <a:pPr marL="342900" indent="-342900">
               <a:spcAft>
-                <a:spcPts val="900"/>
+                <a:spcPts val="650"/>
               </a:spcAft>
             </a:pPr>
             <a:r>
-              <a:rPr sz="2800" b="1" i="0">
+              <a:rPr sz="2400" b="1" i="0">
                 <a:solidFill>
                   <a:srgbClr val="97BC62"/>
                 </a:solidFill>
                 <a:latin typeface="Calibri"/>
               </a:rPr>
-              <a:t>•  </a:t>
-            </a:r>
-            <a:r>
-              <a:rPr sz="2800" b="0" i="0">
+              <a:t>5   </a:t>
+            </a:r>
+            <a:r>
+              <a:rPr sz="2400" b="0" i="0">
                 <a:solidFill>
                   <a:srgbClr val="222B22"/>
                 </a:solidFill>
                 <a:latin typeface="Calibri"/>
               </a:rPr>
-              <a:t>Practice check: one small action aligned with your downhill mission — ninety seconds, one sentence on what happened</a:t>
+              <a:t>Put out / bring in — set something down; bring a blessing in</a:t>
+            </a:r>
+          </a:p>
+          <a:p>
+            <a:pPr marL="342900" indent="-342900">
+              <a:spcAft>
+                <a:spcPts val="650"/>
+              </a:spcAft>
+            </a:pPr>
+            <a:r>
+              <a:rPr sz="2400" b="1" i="0">
+                <a:solidFill>
+                  <a:srgbClr val="97BC62"/>
+                </a:solidFill>
+                <a:latin typeface="Calibri"/>
+              </a:rPr>
+              <a:t>6   </a:t>
+            </a:r>
+            <a:r>
+              <a:rPr sz="2400" b="0" i="0">
+                <a:solidFill>
+                  <a:srgbClr val="222B22"/>
+                </a:solidFill>
+                <a:latin typeface="Calibri"/>
+              </a:rPr>
+              <a:t>Spoken commitment: “I am here. I am paying attention. I am willing to be moved.”</a:t>
+            </a:r>
+          </a:p>
+          <a:p>
+            <a:pPr marL="342900" indent="-342900">
+              <a:spcAft>
+                <a:spcPts val="650"/>
+              </a:spcAft>
+            </a:pPr>
+            <a:r>
+              <a:rPr sz="2400" b="1" i="0">
+                <a:solidFill>
+                  <a:srgbClr val="97BC62"/>
+                </a:solidFill>
+                <a:latin typeface="Calibri"/>
+              </a:rPr>
+              <a:t>7   </a:t>
+            </a:r>
+            <a:r>
+              <a:rPr sz="2400" b="0" i="0">
+                <a:solidFill>
+                  <a:srgbClr val="222B22"/>
+                </a:solidFill>
+                <a:latin typeface="Calibri"/>
+              </a:rPr>
+              <a:t>Opening prayer — “Holy Spirit, you are welcome here. Speak. We are listening.”</a:t>
+            </a:r>
+          </a:p>
+          <a:p>
+            <a:pPr marL="342900" indent="-342900">
+              <a:spcAft>
+                <a:spcPts val="650"/>
+              </a:spcAft>
+            </a:pPr>
+            <a:r>
+              <a:rPr sz="2400" b="1" i="0">
+                <a:solidFill>
+                  <a:srgbClr val="97BC62"/>
+                </a:solidFill>
+                <a:latin typeface="Calibri"/>
+              </a:rPr>
+              <a:t>8   </a:t>
+            </a:r>
+            <a:r>
+              <a:rPr sz="2400" b="0" i="0">
+                <a:solidFill>
+                  <a:srgbClr val="222B22"/>
+                </a:solidFill>
+                <a:latin typeface="Calibri"/>
+              </a:rPr>
+              <a:t>Sit. Begin.</a:t>
             </a:r>
           </a:p>
         </p:txBody>
@@ -8146,7 +8146,7 @@
           <a:p>
             <a:pPr algn="r"/>
             <a:r>
-              <a:t>188</a:t>
+              <a:t>187</a:t>
             </a:r>
             <a:endParaRPr sz="1000" b="1">
               <a:solidFill>
@@ -8245,7 +8245,7 @@
                 </a:solidFill>
                 <a:latin typeface="Cambria"/>
               </a:rPr>
-              <a:t>The Long Walk — Galatians 6:9</a:t>
+              <a:t>Week 13 Completion — Finishing the Mission Week</a:t>
             </a:r>
           </a:p>
         </p:txBody>
@@ -8258,8 +8258,8 @@
         </p:nvSpPr>
         <p:spPr>
           <a:xfrm>
-            <a:off x="822960" y="1600200"/>
-            <a:ext cx="5669280" cy="4572000"/>
+            <a:off x="822960" y="1554480"/>
+            <a:ext cx="10515600" cy="4892040"/>
           </a:xfrm>
           <a:prstGeom prst="rect">
             <a:avLst/>
@@ -8272,11 +8272,11 @@
           <a:p>
             <a:pPr marL="274320" indent="-274320">
               <a:spcAft>
-                <a:spcPts val="800"/>
+                <a:spcPts val="900"/>
               </a:spcAft>
             </a:pPr>
             <a:r>
-              <a:rPr sz="2000" b="1" i="0">
+              <a:rPr sz="2800" b="1" i="0">
                 <a:solidFill>
                   <a:srgbClr val="97BC62"/>
                 </a:solidFill>
@@ -8285,168 +8285,113 @@
               <a:t>•  </a:t>
             </a:r>
             <a:r>
-              <a:rPr sz="2000" b="0" i="0">
+              <a:rPr sz="2800" b="0" i="0">
                 <a:solidFill>
                   <a:srgbClr val="222B22"/>
                 </a:solidFill>
                 <a:latin typeface="Calibri"/>
               </a:rPr>
-              <a:t>The condition is not “if we feel it.” It is “if we do not give up” — Paul assumes the weariness</a:t>
+              <a:t>“Before we walk forward, we finish the Mission week” — unfinished downhill answers finish here</a:t>
             </a:r>
           </a:p>
           <a:p>
             <a:pPr marL="274320" indent="-274320">
-              <a:spcAft>
-                <a:spcPts val="800"/>
-              </a:spcAft>
-            </a:pPr>
-            <a:r>
-              <a:rPr sz="2000" b="1" i="0">
-                <a:solidFill>
-                  <a:srgbClr val="97BC62"/>
-                </a:solidFill>
-                <a:latin typeface="Calibri"/>
-              </a:rPr>
-              <a:t>•  </a:t>
-            </a:r>
-            <a:r>
-              <a:rPr sz="2000" b="0" i="0">
-                <a:solidFill>
-                  <a:srgbClr val="222B22"/>
-                </a:solidFill>
-                <a:latin typeface="Calibri"/>
-              </a:rPr>
-              <a:t>The reaping is tied to the season, and the season is God's — our part is the not-giving-up</a:t>
-            </a:r>
-          </a:p>
-          <a:p>
-            <a:pPr marL="274320" indent="-274320">
-              <a:spcAft>
-                <a:spcPts val="800"/>
-              </a:spcAft>
-            </a:pPr>
-            <a:r>
-              <a:rPr sz="2000" b="1" i="0">
-                <a:solidFill>
-                  <a:srgbClr val="97BC62"/>
-                </a:solidFill>
-                <a:latin typeface="Calibri"/>
-              </a:rPr>
-              <a:t>•  </a:t>
-            </a:r>
-            <a:r>
-              <a:rPr sz="2000" b="0" i="0">
-                <a:solidFill>
-                  <a:srgbClr val="222B22"/>
-                </a:solidFill>
-                <a:latin typeface="Calibri"/>
-              </a:rPr>
-              <a:t>Nobody white-knuckles their way through years; people with a rhythm walk through years</a:t>
-            </a:r>
-          </a:p>
-          <a:p>
-            <a:pPr marL="274320" indent="-274320">
-              <a:spcAft>
-                <a:spcPts val="800"/>
-              </a:spcAft>
-            </a:pPr>
-            <a:r>
-              <a:rPr sz="2000" b="1" i="0">
-                <a:solidFill>
-                  <a:srgbClr val="97BC62"/>
-                </a:solidFill>
-                <a:latin typeface="Calibri"/>
-              </a:rPr>
-              <a:t>•  </a:t>
-            </a:r>
-            <a:r>
-              <a:rPr sz="2000" b="0" i="0">
-                <a:solidFill>
-                  <a:srgbClr val="222B22"/>
-                </a:solidFill>
-                <a:latin typeface="Calibri"/>
-              </a:rPr>
-              <a:t>The break is coming — what carries the practices across a gap is not momentum; it is a rhythm you built on purpose</a:t>
-            </a:r>
-          </a:p>
-          <a:p>
-            <a:pPr marL="274320" indent="-274320">
-              <a:spcAft>
-                <a:spcPts val="800"/>
-              </a:spcAft>
-            </a:pPr>
-            <a:r>
-              <a:rPr sz="2000" b="1" i="0">
-                <a:solidFill>
-                  <a:srgbClr val="97BC62"/>
-                </a:solidFill>
-                <a:latin typeface="Calibri"/>
-              </a:rPr>
-              <a:t>•  </a:t>
-            </a:r>
-            <a:r>
-              <a:rPr sz="2000" b="0" i="0">
-                <a:solidFill>
-                  <a:srgbClr val="222B22"/>
-                </a:solidFill>
-                <a:latin typeface="Calibri"/>
-              </a:rPr>
-              <a:t>So we build it tonight, before the gap, not after it</a:t>
-            </a:r>
-          </a:p>
-        </p:txBody>
-      </p:sp>
-      <p:sp>
-        <p:nvSpPr>
-          <p:cNvPr id="6" name="TextBox 6"/>
-          <p:cNvSpPr txBox="1"/>
-          <p:nvPr/>
-        </p:nvSpPr>
-        <p:spPr>
-          <a:xfrm>
-            <a:off x="6766560" y="1737360"/>
-            <a:ext cx="4663440" cy="2194560"/>
-          </a:xfrm>
-          <a:prstGeom prst="rect">
-            <a:avLst/>
-          </a:prstGeom>
-          <a:solidFill>
-            <a:srgbClr val="F1F6EC"/>
-          </a:solidFill>
-        </p:spPr>
-        <p:txBody>
-          <a:bodyPr wrap="square" lIns="91440" tIns="91440" rIns="91440" bIns="91440" anchor="ctr"/>
-          <a:lstStyle/>
-          <a:p>
-            <a:pPr>
               <a:spcAft>
                 <a:spcPts val="900"/>
               </a:spcAft>
             </a:pPr>
             <a:r>
-              <a:rPr sz="1200" b="1" i="0">
+              <a:rPr sz="2800" b="1" i="0">
                 <a:solidFill>
                   <a:srgbClr val="97BC62"/>
                 </a:solidFill>
                 <a:latin typeface="Calibri"/>
               </a:rPr>
-              <a:t>GALATIANS 6:9 (ESV)</a:t>
-            </a:r>
-          </a:p>
-          <a:p>
-            <a:pPr>
+              <a:t>•  </a:t>
+            </a:r>
+            <a:r>
+              <a:rPr sz="2800" b="0" i="0">
+                <a:solidFill>
+                  <a:srgbClr val="222B22"/>
+                </a:solidFill>
+                <a:latin typeface="Calibri"/>
+              </a:rPr>
+              <a:t>Two weeks of living with the question usually deepens it — one sentence, now, to the room</a:t>
+            </a:r>
+          </a:p>
+          <a:p>
+            <a:pPr marL="274320" indent="-274320">
               <a:spcAft>
-                <a:spcPts val="600"/>
+                <a:spcPts val="900"/>
               </a:spcAft>
             </a:pPr>
             <a:r>
-              <a:rPr sz="2400" b="0" i="1">
+              <a:rPr sz="2800" b="1" i="0">
+                <a:solidFill>
+                  <a:srgbClr val="97BC62"/>
+                </a:solidFill>
+                <a:latin typeface="Calibri"/>
+              </a:rPr>
+              <a:t>•  </a:t>
+            </a:r>
+            <a:r>
+              <a:rPr sz="2800" b="0" i="0">
                 <a:solidFill>
                   <a:srgbClr val="222B22"/>
                 </a:solidFill>
-                <a:latin typeface="Cambria"/>
-              </a:rPr>
-              <a:t>“And let us not grow weary of doing good, for in due season we will reap, if we do not give up.”</a:t>
+                <a:latin typeface="Calibri"/>
+              </a:rPr>
+              <a:t>A parent opens the round; teens choose their own depth after — pass-anytime holds</a:t>
+            </a:r>
+          </a:p>
+          <a:p>
+            <a:pPr marL="274320" indent="-274320">
+              <a:spcAft>
+                <a:spcPts val="900"/>
+              </a:spcAft>
+            </a:pPr>
+            <a:r>
+              <a:rPr sz="2800" b="1" i="0">
+                <a:solidFill>
+                  <a:srgbClr val="97BC62"/>
+                </a:solidFill>
+                <a:latin typeface="Calibri"/>
+              </a:rPr>
+              <a:t>•  </a:t>
+            </a:r>
+            <a:r>
+              <a:rPr sz="2800" b="0" i="0">
+                <a:solidFill>
+                  <a:srgbClr val="222B22"/>
+                </a:solidFill>
+                <a:latin typeface="Calibri"/>
+              </a:rPr>
+              <a:t>The answers carry forward to the Week 21 commissioning</a:t>
+            </a:r>
+          </a:p>
+          <a:p>
+            <a:pPr marL="274320" indent="-274320">
+              <a:spcAft>
+                <a:spcPts val="900"/>
+              </a:spcAft>
+            </a:pPr>
+            <a:r>
+              <a:rPr sz="2800" b="1" i="0">
+                <a:solidFill>
+                  <a:srgbClr val="97BC62"/>
+                </a:solidFill>
+                <a:latin typeface="Calibri"/>
+              </a:rPr>
+              <a:t>•  </a:t>
+            </a:r>
+            <a:r>
+              <a:rPr sz="2800" b="0" i="0">
+                <a:solidFill>
+                  <a:srgbClr val="222B22"/>
+                </a:solidFill>
+                <a:latin typeface="Calibri"/>
+              </a:rPr>
+              <a:t>Practice check: one small action aligned with your downhill mission — ninety seconds, one sentence on what happened</a:t>
             </a:r>
           </a:p>
         </p:txBody>
@@ -8473,7 +8418,7 @@
           <a:p>
             <a:pPr algn="r"/>
             <a:r>
-              <a:t>189</a:t>
+              <a:t>188</a:t>
             </a:r>
             <a:endParaRPr sz="1000" b="1">
               <a:solidFill>
@@ -8572,7 +8517,7 @@
                 </a:solidFill>
                 <a:latin typeface="Cambria"/>
               </a:rPr>
-              <a:t>The Rhythm Card Introduced</a:t>
+              <a:t>The Long Walk — Galatians 6:9</a:t>
             </a:r>
           </a:p>
         </p:txBody>
@@ -8585,8 +8530,8 @@
         </p:nvSpPr>
         <p:spPr>
           <a:xfrm>
-            <a:off x="822960" y="1554480"/>
-            <a:ext cx="10515600" cy="4892040"/>
+            <a:off x="822960" y="1600200"/>
+            <a:ext cx="5669280" cy="4572000"/>
           </a:xfrm>
           <a:prstGeom prst="rect">
             <a:avLst/>
@@ -8599,11 +8544,11 @@
           <a:p>
             <a:pPr marL="274320" indent="-274320">
               <a:spcAft>
-                <a:spcPts val="750"/>
+                <a:spcPts val="800"/>
               </a:spcAft>
             </a:pPr>
             <a:r>
-              <a:rPr sz="2200" b="1" i="0">
+              <a:rPr sz="2000" b="1" i="0">
                 <a:solidFill>
                   <a:srgbClr val="97BC62"/>
                 </a:solidFill>
@@ -8612,23 +8557,23 @@
               <a:t>•  </a:t>
             </a:r>
             <a:r>
-              <a:rPr sz="2200" b="0" i="0">
+              <a:rPr sz="2000" b="0" i="0">
                 <a:solidFill>
                   <a:srgbClr val="222B22"/>
                 </a:solidFill>
                 <a:latin typeface="Calibri"/>
               </a:rPr>
-              <a:t>The whole series folded into one page — you have already received every practice on this card</a:t>
+              <a:t>The condition is not “if we feel it.” It is “if we do not give up” — Paul assumes the weariness</a:t>
             </a:r>
           </a:p>
           <a:p>
             <a:pPr marL="274320" indent="-274320">
               <a:spcAft>
-                <a:spcPts val="750"/>
+                <a:spcPts val="800"/>
               </a:spcAft>
             </a:pPr>
             <a:r>
-              <a:rPr sz="2200" b="1" i="0">
+              <a:rPr sz="2000" b="1" i="0">
                 <a:solidFill>
                   <a:srgbClr val="97BC62"/>
                 </a:solidFill>
@@ -8637,23 +8582,23 @@
               <a:t>•  </a:t>
             </a:r>
             <a:r>
-              <a:rPr sz="2200" b="0" i="0">
+              <a:rPr sz="2000" b="0" i="0">
                 <a:solidFill>
                   <a:srgbClr val="222B22"/>
                 </a:solidFill>
                 <a:latin typeface="Calibri"/>
               </a:rPr>
-              <a:t>Daily — the morning question, the evening journal note, PROAPT if the season allows</a:t>
+              <a:t>The reaping is tied to the season, and the season is God's — our part is the not-giving-up</a:t>
             </a:r>
           </a:p>
           <a:p>
             <a:pPr marL="274320" indent="-274320">
               <a:spcAft>
-                <a:spcPts val="750"/>
+                <a:spcPts val="800"/>
               </a:spcAft>
             </a:pPr>
             <a:r>
-              <a:rPr sz="2200" b="1" i="0">
+              <a:rPr sz="2000" b="1" i="0">
                 <a:solidFill>
                   <a:srgbClr val="97BC62"/>
                 </a:solidFill>
@@ -8662,23 +8607,23 @@
               <a:t>•  </a:t>
             </a:r>
             <a:r>
-              <a:rPr sz="2200" b="0" i="0">
+              <a:rPr sz="2000" b="0" i="0">
                 <a:solidFill>
                   <a:srgbClr val="222B22"/>
                 </a:solidFill>
                 <a:latin typeface="Calibri"/>
               </a:rPr>
-              <a:t>Weekly — one specific person who knows what you are working on, and a sabbath rhythm</a:t>
+              <a:t>Nobody white-knuckles their way through years; people with a rhythm walk through years</a:t>
             </a:r>
           </a:p>
           <a:p>
             <a:pPr marL="274320" indent="-274320">
               <a:spcAft>
-                <a:spcPts val="750"/>
+                <a:spcPts val="800"/>
               </a:spcAft>
             </a:pPr>
             <a:r>
-              <a:rPr sz="2200" b="1" i="0">
+              <a:rPr sz="2000" b="1" i="0">
                 <a:solidFill>
                   <a:srgbClr val="97BC62"/>
                 </a:solidFill>
@@ -8687,23 +8632,23 @@
               <a:t>•  </a:t>
             </a:r>
             <a:r>
-              <a:rPr sz="2200" b="0" i="0">
+              <a:rPr sz="2000" b="0" i="0">
                 <a:solidFill>
                   <a:srgbClr val="222B22"/>
                 </a:solidFill>
                 <a:latin typeface="Calibri"/>
               </a:rPr>
-              <a:t>Monthly — a clearing time and a Four-Connects review. Seasonally — the deeper work</a:t>
+              <a:t>The break is coming — what carries the practices across a gap is not momentum; it is a rhythm you built on purpose</a:t>
             </a:r>
           </a:p>
           <a:p>
             <a:pPr marL="274320" indent="-274320">
               <a:spcAft>
-                <a:spcPts val="750"/>
+                <a:spcPts val="800"/>
               </a:spcAft>
             </a:pPr>
             <a:r>
-              <a:rPr sz="2200" b="1" i="0">
+              <a:rPr sz="2000" b="1" i="0">
                 <a:solidFill>
                   <a:srgbClr val="97BC62"/>
                 </a:solidFill>
@@ -8712,38 +8657,68 @@
               <a:t>•  </a:t>
             </a:r>
             <a:r>
-              <a:rPr sz="2200" b="0" i="0">
+              <a:rPr sz="2000" b="0" i="0">
                 <a:solidFill>
                   <a:srgbClr val="222B22"/>
                 </a:solidFill>
                 <a:latin typeface="Calibri"/>
               </a:rPr>
-              <a:t>One rule for the build: “write the rhythm you will actually keep, not the one that impresses you”</a:t>
-            </a:r>
-          </a:p>
-          <a:p>
-            <a:pPr marL="274320" indent="-274320">
+              <a:t>So we build it tonight, before the gap, not after it</a:t>
+            </a:r>
+          </a:p>
+        </p:txBody>
+      </p:sp>
+      <p:sp>
+        <p:nvSpPr>
+          <p:cNvPr id="6" name="TextBox 6"/>
+          <p:cNvSpPr txBox="1"/>
+          <p:nvPr/>
+        </p:nvSpPr>
+        <p:spPr>
+          <a:xfrm>
+            <a:off x="6766560" y="1737360"/>
+            <a:ext cx="4663440" cy="2194560"/>
+          </a:xfrm>
+          <a:prstGeom prst="rect">
+            <a:avLst/>
+          </a:prstGeom>
+          <a:solidFill>
+            <a:srgbClr val="F1F6EC"/>
+          </a:solidFill>
+        </p:spPr>
+        <p:txBody>
+          <a:bodyPr wrap="square" lIns="91440" tIns="91440" rIns="91440" bIns="91440" anchor="ctr"/>
+          <a:lstStyle/>
+          <a:p>
+            <a:pPr>
               <a:spcAft>
-                <a:spcPts val="750"/>
+                <a:spcPts val="900"/>
               </a:spcAft>
             </a:pPr>
             <a:r>
-              <a:rPr sz="2200" b="1" i="0">
+              <a:rPr sz="1200" b="1" i="0">
                 <a:solidFill>
                   <a:srgbClr val="97BC62"/>
                 </a:solidFill>
                 <a:latin typeface="Calibri"/>
               </a:rPr>
-              <a:t>•  </a:t>
-            </a:r>
-            <a:r>
-              <a:rPr sz="2200" b="0" i="0">
+              <a:t>GALATIANS 6:9 (ESV)</a:t>
+            </a:r>
+          </a:p>
+          <a:p>
+            <a:pPr>
+              <a:spcAft>
+                <a:spcPts val="600"/>
+              </a:spcAft>
+            </a:pPr>
+            <a:r>
+              <a:rPr sz="2400" b="0" i="1">
                 <a:solidFill>
                   <a:srgbClr val="222B22"/>
                 </a:solidFill>
-                <a:latin typeface="Calibri"/>
-              </a:rPr>
-              <a:t>The starter plan begins with two practices totaling six minutes a day — six honest minutes is a real rhythm</a:t>
+                <a:latin typeface="Cambria"/>
+              </a:rPr>
+              <a:t>“And let us not grow weary of doing good, for in due season we will reap, if we do not give up.”</a:t>
             </a:r>
           </a:p>
         </p:txBody>
@@ -8770,7 +8745,7 @@
           <a:p>
             <a:pPr algn="r"/>
             <a:r>
-              <a:t>190</a:t>
+              <a:t>189</a:t>
             </a:r>
             <a:endParaRPr sz="1000" b="1">
               <a:solidFill>
@@ -8869,21 +8844,21 @@
                 </a:solidFill>
                 <a:latin typeface="Cambria"/>
               </a:rPr>
-              <a:t>A Rhythm You Can See — One Morning Flow</a:t>
-            </a:r>
-          </a:p>
-        </p:txBody>
-      </p:sp>
-      <p:sp>
-        <p:nvSpPr>
-          <p:cNvPr id="90" name="SlideNum"/>
+              <a:t>The Rhythm Card Introduced</a:t>
+            </a:r>
+          </a:p>
+        </p:txBody>
+      </p:sp>
+      <p:sp>
+        <p:nvSpPr>
+          <p:cNvPr id="4" name="TextBox 4"/>
           <p:cNvSpPr txBox="1"/>
           <p:nvPr/>
         </p:nvSpPr>
         <p:spPr>
           <a:xfrm>
-            <a:off x="11384280" y="6446520"/>
-            <a:ext cx="640080" cy="292608"/>
+            <a:off x="822960" y="1554480"/>
+            <a:ext cx="10515600" cy="4892040"/>
           </a:xfrm>
           <a:prstGeom prst="rect">
             <a:avLst/>
@@ -8891,12 +8866,183 @@
           <a:noFill/>
         </p:spPr>
         <p:txBody>
+          <a:bodyPr wrap="square" lIns="91440" tIns="91440" rIns="91440" bIns="91440"/>
+          <a:lstStyle/>
+          <a:p>
+            <a:pPr marL="274320" indent="-274320">
+              <a:spcAft>
+                <a:spcPts val="750"/>
+              </a:spcAft>
+            </a:pPr>
+            <a:r>
+              <a:rPr sz="2200" b="1" i="0">
+                <a:solidFill>
+                  <a:srgbClr val="97BC62"/>
+                </a:solidFill>
+                <a:latin typeface="Calibri"/>
+              </a:rPr>
+              <a:t>•  </a:t>
+            </a:r>
+            <a:r>
+              <a:rPr sz="2200" b="0" i="0">
+                <a:solidFill>
+                  <a:srgbClr val="222B22"/>
+                </a:solidFill>
+                <a:latin typeface="Calibri"/>
+              </a:rPr>
+              <a:t>The whole series folded into one page — you have already received every practice on this card</a:t>
+            </a:r>
+          </a:p>
+          <a:p>
+            <a:pPr marL="274320" indent="-274320">
+              <a:spcAft>
+                <a:spcPts val="750"/>
+              </a:spcAft>
+            </a:pPr>
+            <a:r>
+              <a:rPr sz="2200" b="1" i="0">
+                <a:solidFill>
+                  <a:srgbClr val="97BC62"/>
+                </a:solidFill>
+                <a:latin typeface="Calibri"/>
+              </a:rPr>
+              <a:t>•  </a:t>
+            </a:r>
+            <a:r>
+              <a:rPr sz="2200" b="0" i="0">
+                <a:solidFill>
+                  <a:srgbClr val="222B22"/>
+                </a:solidFill>
+                <a:latin typeface="Calibri"/>
+              </a:rPr>
+              <a:t>Daily — the morning question, the evening journal note, PROAPT if the season allows</a:t>
+            </a:r>
+          </a:p>
+          <a:p>
+            <a:pPr marL="274320" indent="-274320">
+              <a:spcAft>
+                <a:spcPts val="750"/>
+              </a:spcAft>
+            </a:pPr>
+            <a:r>
+              <a:rPr sz="2200" b="1" i="0">
+                <a:solidFill>
+                  <a:srgbClr val="97BC62"/>
+                </a:solidFill>
+                <a:latin typeface="Calibri"/>
+              </a:rPr>
+              <a:t>•  </a:t>
+            </a:r>
+            <a:r>
+              <a:rPr sz="2200" b="0" i="0">
+                <a:solidFill>
+                  <a:srgbClr val="222B22"/>
+                </a:solidFill>
+                <a:latin typeface="Calibri"/>
+              </a:rPr>
+              <a:t>Weekly — one specific person who knows what you are working on, and a sabbath rhythm</a:t>
+            </a:r>
+          </a:p>
+          <a:p>
+            <a:pPr marL="274320" indent="-274320">
+              <a:spcAft>
+                <a:spcPts val="750"/>
+              </a:spcAft>
+            </a:pPr>
+            <a:r>
+              <a:rPr sz="2200" b="1" i="0">
+                <a:solidFill>
+                  <a:srgbClr val="97BC62"/>
+                </a:solidFill>
+                <a:latin typeface="Calibri"/>
+              </a:rPr>
+              <a:t>•  </a:t>
+            </a:r>
+            <a:r>
+              <a:rPr sz="2200" b="0" i="0">
+                <a:solidFill>
+                  <a:srgbClr val="222B22"/>
+                </a:solidFill>
+                <a:latin typeface="Calibri"/>
+              </a:rPr>
+              <a:t>Monthly — a clearing time and a Four-Connects review. Seasonally — the deeper work</a:t>
+            </a:r>
+          </a:p>
+          <a:p>
+            <a:pPr marL="274320" indent="-274320">
+              <a:spcAft>
+                <a:spcPts val="750"/>
+              </a:spcAft>
+            </a:pPr>
+            <a:r>
+              <a:rPr sz="2200" b="1" i="0">
+                <a:solidFill>
+                  <a:srgbClr val="97BC62"/>
+                </a:solidFill>
+                <a:latin typeface="Calibri"/>
+              </a:rPr>
+              <a:t>•  </a:t>
+            </a:r>
+            <a:r>
+              <a:rPr sz="2200" b="0" i="0">
+                <a:solidFill>
+                  <a:srgbClr val="222B22"/>
+                </a:solidFill>
+                <a:latin typeface="Calibri"/>
+              </a:rPr>
+              <a:t>One rule for the build: “write the rhythm you will actually keep, not the one that impresses you”</a:t>
+            </a:r>
+          </a:p>
+          <a:p>
+            <a:pPr marL="274320" indent="-274320">
+              <a:spcAft>
+                <a:spcPts val="750"/>
+              </a:spcAft>
+            </a:pPr>
+            <a:r>
+              <a:rPr sz="2200" b="1" i="0">
+                <a:solidFill>
+                  <a:srgbClr val="97BC62"/>
+                </a:solidFill>
+                <a:latin typeface="Calibri"/>
+              </a:rPr>
+              <a:t>•  </a:t>
+            </a:r>
+            <a:r>
+              <a:rPr sz="2200" b="0" i="0">
+                <a:solidFill>
+                  <a:srgbClr val="222B22"/>
+                </a:solidFill>
+                <a:latin typeface="Calibri"/>
+              </a:rPr>
+              <a:t>The starter plan begins with two practices totaling six minutes a day — six honest minutes is a real rhythm</a:t>
+            </a:r>
+          </a:p>
+        </p:txBody>
+      </p:sp>
+      <p:sp>
+        <p:nvSpPr>
+          <p:cNvPr id="90" name="SlideNum"/>
+          <p:cNvSpPr txBox="1"/>
+          <p:nvPr/>
+        </p:nvSpPr>
+        <p:spPr>
+          <a:xfrm>
+            <a:off x="11384280" y="6446520"/>
+            <a:ext cx="640080" cy="292608"/>
+          </a:xfrm>
+          <a:prstGeom prst="rect">
+            <a:avLst/>
+          </a:prstGeom>
+          <a:noFill/>
+        </p:spPr>
+        <p:txBody>
           <a:bodyPr wrap="none" lIns="0" tIns="0" rIns="45720" bIns="0" anchor="ctr"/>
           <a:lstStyle/>
           <a:p>
             <a:pPr algn="r"/>
             <a:r>
-              <a:t>191</a:t>
+              <a:t>190</a:t>
             </a:r>
             <a:endParaRPr sz="1000" b="1">
               <a:solidFill>
@@ -8904,315 +9050,6 @@
               </a:solidFill>
               <a:latin typeface="Calibri"/>
             </a:endParaRPr>
-          </a:p>
-        </p:txBody>
-      </p:sp>
-      <p:pic>
-        <p:nvPicPr>
-          <p:cNvPr id="100" name="Flow 1" descr="a bench above an evening valley"/>
-          <p:cNvPicPr>
-            <a:picLocks noChangeAspect="1"/>
-          </p:cNvPicPr>
-          <p:nvPr/>
-        </p:nvPicPr>
-        <p:blipFill>
-          <a:blip r:embed="rId3"/>
-          <a:stretch>
-            <a:fillRect/>
-          </a:stretch>
-        </p:blipFill>
-        <p:spPr>
-          <a:xfrm>
-            <a:off x="822960" y="1691640"/>
-            <a:ext cx="2450592" cy="3264408"/>
-          </a:xfrm>
-          <a:prstGeom prst="rect">
-            <a:avLst/>
-          </a:prstGeom>
-          <a:ln w="76200">
-            <a:solidFill>
-              <a:srgbClr val="FFFFFF"/>
-            </a:solidFill>
-          </a:ln>
-          <a:effectLst>
-            <a:outerShdw blurRad="63500" dist="25400" dir="5400000" rotWithShape="0">
-              <a:srgbClr val="000000">
-                <a:alpha val="35000"/>
-              </a:srgbClr>
-            </a:outerShdw>
-          </a:effectLst>
-        </p:spPr>
-      </p:pic>
-      <p:sp>
-        <p:nvSpPr>
-          <p:cNvPr id="110" name="Cap 1"/>
-          <p:cNvSpPr txBox="1"/>
-          <p:nvPr/>
-        </p:nvSpPr>
-        <p:spPr>
-          <a:xfrm>
-            <a:off x="822960" y="5047488"/>
-            <a:ext cx="2450592" cy="365760"/>
-          </a:xfrm>
-          <a:prstGeom prst="rect">
-            <a:avLst/>
-          </a:prstGeom>
-          <a:noFill/>
-        </p:spPr>
-        <p:txBody>
-          <a:bodyPr wrap="square"/>
-          <a:lstStyle/>
-          <a:p>
-            <a:pPr algn="ctr"/>
-            <a:r>
-              <a:rPr sz="1800" b="1">
-                <a:solidFill>
-                  <a:srgbClr val="97BC62"/>
-                </a:solidFill>
-                <a:latin typeface="Calibri"/>
-              </a:rPr>
-              <a:t>GROUNDED</a:t>
-            </a:r>
-          </a:p>
-        </p:txBody>
-      </p:sp>
-      <p:pic>
-        <p:nvPicPr>
-          <p:cNvPr id="101" name="Flow 2" descr="an open Bible beside a quiet chair"/>
-          <p:cNvPicPr>
-            <a:picLocks noChangeAspect="1"/>
-          </p:cNvPicPr>
-          <p:nvPr/>
-        </p:nvPicPr>
-        <p:blipFill>
-          <a:blip r:embed="rId4"/>
-          <a:stretch>
-            <a:fillRect/>
-          </a:stretch>
-        </p:blipFill>
-        <p:spPr>
-          <a:xfrm>
-            <a:off x="3502152" y="1691640"/>
-            <a:ext cx="2450592" cy="3264408"/>
-          </a:xfrm>
-          <a:prstGeom prst="rect">
-            <a:avLst/>
-          </a:prstGeom>
-          <a:ln w="76200">
-            <a:solidFill>
-              <a:srgbClr val="FFFFFF"/>
-            </a:solidFill>
-          </a:ln>
-          <a:effectLst>
-            <a:outerShdw blurRad="63500" dist="25400" dir="5400000" rotWithShape="0">
-              <a:srgbClr val="000000">
-                <a:alpha val="35000"/>
-              </a:srgbClr>
-            </a:outerShdw>
-          </a:effectLst>
-        </p:spPr>
-      </p:pic>
-      <p:sp>
-        <p:nvSpPr>
-          <p:cNvPr id="111" name="Cap 2"/>
-          <p:cNvSpPr txBox="1"/>
-          <p:nvPr/>
-        </p:nvSpPr>
-        <p:spPr>
-          <a:xfrm>
-            <a:off x="3502152" y="5047488"/>
-            <a:ext cx="2450592" cy="365760"/>
-          </a:xfrm>
-          <a:prstGeom prst="rect">
-            <a:avLst/>
-          </a:prstGeom>
-          <a:noFill/>
-        </p:spPr>
-        <p:txBody>
-          <a:bodyPr wrap="square"/>
-          <a:lstStyle/>
-          <a:p>
-            <a:pPr algn="ctr"/>
-            <a:r>
-              <a:rPr sz="1800" b="1">
-                <a:solidFill>
-                  <a:srgbClr val="97BC62"/>
-                </a:solidFill>
-                <a:latin typeface="Calibri"/>
-              </a:rPr>
-              <a:t>LISTENING</a:t>
-            </a:r>
-          </a:p>
-        </p:txBody>
-      </p:sp>
-      <p:pic>
-        <p:nvPicPr>
-          <p:cNvPr id="102" name="Flow 3" descr="rings widening on still water"/>
-          <p:cNvPicPr>
-            <a:picLocks noChangeAspect="1"/>
-          </p:cNvPicPr>
-          <p:nvPr/>
-        </p:nvPicPr>
-        <p:blipFill>
-          <a:blip r:embed="rId5"/>
-          <a:stretch>
-            <a:fillRect/>
-          </a:stretch>
-        </p:blipFill>
-        <p:spPr>
-          <a:xfrm>
-            <a:off x="6181344" y="1691640"/>
-            <a:ext cx="2450592" cy="3264408"/>
-          </a:xfrm>
-          <a:prstGeom prst="rect">
-            <a:avLst/>
-          </a:prstGeom>
-          <a:ln w="76200">
-            <a:solidFill>
-              <a:srgbClr val="FFFFFF"/>
-            </a:solidFill>
-          </a:ln>
-          <a:effectLst>
-            <a:outerShdw blurRad="63500" dist="25400" dir="5400000" rotWithShape="0">
-              <a:srgbClr val="000000">
-                <a:alpha val="35000"/>
-              </a:srgbClr>
-            </a:outerShdw>
-          </a:effectLst>
-        </p:spPr>
-      </p:pic>
-      <p:sp>
-        <p:nvSpPr>
-          <p:cNvPr id="112" name="Cap 3"/>
-          <p:cNvSpPr txBox="1"/>
-          <p:nvPr/>
-        </p:nvSpPr>
-        <p:spPr>
-          <a:xfrm>
-            <a:off x="6181344" y="5047488"/>
-            <a:ext cx="2450592" cy="365760"/>
-          </a:xfrm>
-          <a:prstGeom prst="rect">
-            <a:avLst/>
-          </a:prstGeom>
-          <a:noFill/>
-        </p:spPr>
-        <p:txBody>
-          <a:bodyPr wrap="square"/>
-          <a:lstStyle/>
-          <a:p>
-            <a:pPr algn="ctr"/>
-            <a:r>
-              <a:rPr sz="1800" b="1">
-                <a:solidFill>
-                  <a:srgbClr val="97BC62"/>
-                </a:solidFill>
-                <a:latin typeface="Calibri"/>
-              </a:rPr>
-              <a:t>CHANGED, RIPPLING</a:t>
-            </a:r>
-          </a:p>
-        </p:txBody>
-      </p:sp>
-      <p:pic>
-        <p:nvPicPr>
-          <p:cNvPr id="103" name="Flow 4" descr="a hiker leaping between two rocks"/>
-          <p:cNvPicPr>
-            <a:picLocks noChangeAspect="1"/>
-          </p:cNvPicPr>
-          <p:nvPr/>
-        </p:nvPicPr>
-        <p:blipFill>
-          <a:blip r:embed="rId6"/>
-          <a:stretch>
-            <a:fillRect/>
-          </a:stretch>
-        </p:blipFill>
-        <p:spPr>
-          <a:xfrm>
-            <a:off x="8860536" y="1691640"/>
-            <a:ext cx="2450592" cy="3264408"/>
-          </a:xfrm>
-          <a:prstGeom prst="rect">
-            <a:avLst/>
-          </a:prstGeom>
-          <a:ln w="76200">
-            <a:solidFill>
-              <a:srgbClr val="FFFFFF"/>
-            </a:solidFill>
-          </a:ln>
-          <a:effectLst>
-            <a:outerShdw blurRad="63500" dist="25400" dir="5400000" rotWithShape="0">
-              <a:srgbClr val="000000">
-                <a:alpha val="35000"/>
-              </a:srgbClr>
-            </a:outerShdw>
-          </a:effectLst>
-        </p:spPr>
-      </p:pic>
-      <p:sp>
-        <p:nvSpPr>
-          <p:cNvPr id="113" name="Cap 4"/>
-          <p:cNvSpPr txBox="1"/>
-          <p:nvPr/>
-        </p:nvSpPr>
-        <p:spPr>
-          <a:xfrm>
-            <a:off x="8860536" y="5047488"/>
-            <a:ext cx="2450592" cy="365760"/>
-          </a:xfrm>
-          <a:prstGeom prst="rect">
-            <a:avLst/>
-          </a:prstGeom>
-          <a:noFill/>
-        </p:spPr>
-        <p:txBody>
-          <a:bodyPr wrap="square"/>
-          <a:lstStyle/>
-          <a:p>
-            <a:pPr algn="ctr"/>
-            <a:r>
-              <a:rPr sz="1800" b="1">
-                <a:solidFill>
-                  <a:srgbClr val="97BC62"/>
-                </a:solidFill>
-                <a:latin typeface="Calibri"/>
-              </a:rPr>
-              <a:t>LEAPING</a:t>
-            </a:r>
-          </a:p>
-        </p:txBody>
-      </p:sp>
-      <p:sp>
-        <p:nvSpPr>
-          <p:cNvPr id="120" name="FlowLine"/>
-          <p:cNvSpPr txBox="1"/>
-          <p:nvPr/>
-        </p:nvSpPr>
-        <p:spPr>
-          <a:xfrm>
-            <a:off x="822960" y="5623560"/>
-            <a:ext cx="10515600" cy="731520"/>
-          </a:xfrm>
-          <a:prstGeom prst="rect">
-            <a:avLst/>
-          </a:prstGeom>
-          <a:noFill/>
-        </p:spPr>
-        <p:txBody>
-          <a:bodyPr wrap="square"/>
-          <a:lstStyle/>
-          <a:p>
-            <a:pPr algn="l"/>
-            <a:r>
-              <a:rPr sz="1800" i="1">
-                <a:solidFill>
-                  <a:srgbClr val="222B22"/>
-                </a:solidFill>
-                <a:latin typeface="Calibri"/>
-              </a:rPr>
-              <a:t>The founder’s own morning flow — four images, one motto, kept for years. Yours will look different. The journal has a page waiting for it.</a:t>
-            </a:r>
           </a:p>
         </p:txBody>
       </p:sp>
@@ -9304,21 +9141,21 @@
                 </a:solidFill>
                 <a:latin typeface="Cambria"/>
               </a:rPr>
-              <a:t>Building Your Rhythm Card</a:t>
-            </a:r>
-          </a:p>
-        </p:txBody>
-      </p:sp>
-      <p:sp>
-        <p:nvSpPr>
-          <p:cNvPr id="4" name="TextBox 4"/>
+              <a:t>A Rhythm You Can See — One Morning Flow</a:t>
+            </a:r>
+          </a:p>
+        </p:txBody>
+      </p:sp>
+      <p:sp>
+        <p:nvSpPr>
+          <p:cNvPr id="90" name="SlideNum"/>
           <p:cNvSpPr txBox="1"/>
           <p:nvPr/>
         </p:nvSpPr>
         <p:spPr>
           <a:xfrm>
-            <a:off x="822960" y="1554480"/>
-            <a:ext cx="10515600" cy="4892040"/>
+            <a:off x="11384280" y="6446520"/>
+            <a:ext cx="640080" cy="292608"/>
           </a:xfrm>
           <a:prstGeom prst="rect">
             <a:avLst/>
@@ -9326,158 +9163,12 @@
           <a:noFill/>
         </p:spPr>
         <p:txBody>
-          <a:bodyPr wrap="square" lIns="91440" tIns="91440" rIns="91440" bIns="91440"/>
-          <a:lstStyle/>
-          <a:p>
-            <a:pPr marL="274320" indent="-274320">
-              <a:spcAft>
-                <a:spcPts val="900"/>
-              </a:spcAft>
-            </a:pPr>
-            <a:r>
-              <a:rPr sz="2400" b="1" i="0">
-                <a:solidFill>
-                  <a:srgbClr val="97BC62"/>
-                </a:solidFill>
-                <a:latin typeface="Calibri"/>
-              </a:rPr>
-              <a:t>•  </a:t>
-            </a:r>
-            <a:r>
-              <a:rPr sz="2400" b="0" i="0">
-                <a:solidFill>
-                  <a:srgbClr val="222B22"/>
-                </a:solidFill>
-                <a:latin typeface="Calibri"/>
-              </a:rPr>
-              <a:t>Twenty minutes in pairs — in your own handwriting, on the build sheet</a:t>
-            </a:r>
-          </a:p>
-          <a:p>
-            <a:pPr marL="274320" indent="-274320">
-              <a:spcAft>
-                <a:spcPts val="900"/>
-              </a:spcAft>
-            </a:pPr>
-            <a:r>
-              <a:rPr sz="2400" b="1" i="0">
-                <a:solidFill>
-                  <a:srgbClr val="97BC62"/>
-                </a:solidFill>
-                <a:latin typeface="Calibri"/>
-              </a:rPr>
-              <a:t>•  </a:t>
-            </a:r>
-            <a:r>
-              <a:rPr sz="2400" b="0" i="0">
-                <a:solidFill>
-                  <a:srgbClr val="222B22"/>
-                </a:solidFill>
-                <a:latin typeface="Calibri"/>
-              </a:rPr>
-              <a:t>Specific beats vague — “morning question, 6:50, kitchen table, before my phone” is a rhythm</a:t>
-            </a:r>
-          </a:p>
-          <a:p>
-            <a:pPr marL="274320" indent="-274320">
-              <a:spcAft>
-                <a:spcPts val="900"/>
-              </a:spcAft>
-            </a:pPr>
-            <a:r>
-              <a:rPr sz="2400" b="1" i="0">
-                <a:solidFill>
-                  <a:srgbClr val="97BC62"/>
-                </a:solidFill>
-                <a:latin typeface="Calibri"/>
-              </a:rPr>
-              <a:t>•  </a:t>
-            </a:r>
-            <a:r>
-              <a:rPr sz="2400" b="0" i="0">
-                <a:solidFill>
-                  <a:srgbClr val="222B22"/>
-                </a:solidFill>
-                <a:latin typeface="Calibri"/>
-              </a:rPr>
-              <a:t>The weekly partner line is the most important line on the sheet — name an actual person</a:t>
-            </a:r>
-          </a:p>
-          <a:p>
-            <a:pPr marL="274320" indent="-274320">
-              <a:spcAft>
-                <a:spcPts val="900"/>
-              </a:spcAft>
-            </a:pPr>
-            <a:r>
-              <a:rPr sz="2400" b="1" i="0">
-                <a:solidFill>
-                  <a:srgbClr val="97BC62"/>
-                </a:solidFill>
-                <a:latin typeface="Calibri"/>
-              </a:rPr>
-              <a:t>•  </a:t>
-            </a:r>
-            <a:r>
-              <a:rPr sz="2400" b="0" i="0">
-                <a:solidFill>
-                  <a:srgbClr val="222B22"/>
-                </a:solidFill>
-                <a:latin typeface="Calibri"/>
-              </a:rPr>
-              <a:t>Build down, not up — which two practices survive exam season? Start there; the card lets you add later</a:t>
-            </a:r>
-          </a:p>
-          <a:p>
-            <a:pPr marL="274320" indent="-274320">
-              <a:spcAft>
-                <a:spcPts val="900"/>
-              </a:spcAft>
-            </a:pPr>
-            <a:r>
-              <a:rPr sz="2400" b="1" i="0">
-                <a:solidFill>
-                  <a:srgbClr val="97BC62"/>
-                </a:solidFill>
-                <a:latin typeface="Calibri"/>
-              </a:rPr>
-              <a:t>•  </a:t>
-            </a:r>
-            <a:r>
-              <a:rPr sz="2400" b="0" i="0">
-                <a:solidFill>
-                  <a:srgbClr val="222B22"/>
-                </a:solidFill>
-                <a:latin typeface="Calibri"/>
-              </a:rPr>
-              <a:t>Close: each participant reads their daily line aloud to the pair — a parent first; pass-anytime holds</a:t>
-            </a:r>
-          </a:p>
-        </p:txBody>
-      </p:sp>
-      <p:sp>
-        <p:nvSpPr>
-          <p:cNvPr id="90" name="SlideNum"/>
-          <p:cNvSpPr txBox="1"/>
-          <p:nvPr/>
-        </p:nvSpPr>
-        <p:spPr>
-          <a:xfrm>
-            <a:off x="11384280" y="6446520"/>
-            <a:ext cx="640080" cy="292608"/>
-          </a:xfrm>
-          <a:prstGeom prst="rect">
-            <a:avLst/>
-          </a:prstGeom>
-          <a:noFill/>
-        </p:spPr>
-        <p:txBody>
           <a:bodyPr wrap="none" lIns="0" tIns="0" rIns="45720" bIns="0" anchor="ctr"/>
           <a:lstStyle/>
           <a:p>
             <a:pPr algn="r"/>
             <a:r>
-              <a:t>192</a:t>
+              <a:t>191</a:t>
             </a:r>
             <a:endParaRPr sz="1000" b="1">
               <a:solidFill>
@@ -9485,6 +9176,315 @@
               </a:solidFill>
               <a:latin typeface="Calibri"/>
             </a:endParaRPr>
+          </a:p>
+        </p:txBody>
+      </p:sp>
+      <p:pic>
+        <p:nvPicPr>
+          <p:cNvPr id="100" name="Flow 1" descr="a bench above an evening valley"/>
+          <p:cNvPicPr>
+            <a:picLocks noChangeAspect="1"/>
+          </p:cNvPicPr>
+          <p:nvPr/>
+        </p:nvPicPr>
+        <p:blipFill>
+          <a:blip r:embed="rId3"/>
+          <a:stretch>
+            <a:fillRect/>
+          </a:stretch>
+        </p:blipFill>
+        <p:spPr>
+          <a:xfrm>
+            <a:off x="822960" y="1691640"/>
+            <a:ext cx="2450592" cy="3264408"/>
+          </a:xfrm>
+          <a:prstGeom prst="rect">
+            <a:avLst/>
+          </a:prstGeom>
+          <a:ln w="76200">
+            <a:solidFill>
+              <a:srgbClr val="FFFFFF"/>
+            </a:solidFill>
+          </a:ln>
+          <a:effectLst>
+            <a:outerShdw blurRad="63500" dist="25400" dir="5400000" rotWithShape="0">
+              <a:srgbClr val="000000">
+                <a:alpha val="35000"/>
+              </a:srgbClr>
+            </a:outerShdw>
+          </a:effectLst>
+        </p:spPr>
+      </p:pic>
+      <p:sp>
+        <p:nvSpPr>
+          <p:cNvPr id="110" name="Cap 1"/>
+          <p:cNvSpPr txBox="1"/>
+          <p:nvPr/>
+        </p:nvSpPr>
+        <p:spPr>
+          <a:xfrm>
+            <a:off x="822960" y="5047488"/>
+            <a:ext cx="2450592" cy="365760"/>
+          </a:xfrm>
+          <a:prstGeom prst="rect">
+            <a:avLst/>
+          </a:prstGeom>
+          <a:noFill/>
+        </p:spPr>
+        <p:txBody>
+          <a:bodyPr wrap="square"/>
+          <a:lstStyle/>
+          <a:p>
+            <a:pPr algn="ctr"/>
+            <a:r>
+              <a:rPr sz="1800" b="1">
+                <a:solidFill>
+                  <a:srgbClr val="97BC62"/>
+                </a:solidFill>
+                <a:latin typeface="Calibri"/>
+              </a:rPr>
+              <a:t>GROUNDED</a:t>
+            </a:r>
+          </a:p>
+        </p:txBody>
+      </p:sp>
+      <p:pic>
+        <p:nvPicPr>
+          <p:cNvPr id="101" name="Flow 2" descr="an open Bible beside a quiet chair"/>
+          <p:cNvPicPr>
+            <a:picLocks noChangeAspect="1"/>
+          </p:cNvPicPr>
+          <p:nvPr/>
+        </p:nvPicPr>
+        <p:blipFill>
+          <a:blip r:embed="rId4"/>
+          <a:stretch>
+            <a:fillRect/>
+          </a:stretch>
+        </p:blipFill>
+        <p:spPr>
+          <a:xfrm>
+            <a:off x="3502152" y="1691640"/>
+            <a:ext cx="2450592" cy="3264408"/>
+          </a:xfrm>
+          <a:prstGeom prst="rect">
+            <a:avLst/>
+          </a:prstGeom>
+          <a:ln w="76200">
+            <a:solidFill>
+              <a:srgbClr val="FFFFFF"/>
+            </a:solidFill>
+          </a:ln>
+          <a:effectLst>
+            <a:outerShdw blurRad="63500" dist="25400" dir="5400000" rotWithShape="0">
+              <a:srgbClr val="000000">
+                <a:alpha val="35000"/>
+              </a:srgbClr>
+            </a:outerShdw>
+          </a:effectLst>
+        </p:spPr>
+      </p:pic>
+      <p:sp>
+        <p:nvSpPr>
+          <p:cNvPr id="111" name="Cap 2"/>
+          <p:cNvSpPr txBox="1"/>
+          <p:nvPr/>
+        </p:nvSpPr>
+        <p:spPr>
+          <a:xfrm>
+            <a:off x="3502152" y="5047488"/>
+            <a:ext cx="2450592" cy="365760"/>
+          </a:xfrm>
+          <a:prstGeom prst="rect">
+            <a:avLst/>
+          </a:prstGeom>
+          <a:noFill/>
+        </p:spPr>
+        <p:txBody>
+          <a:bodyPr wrap="square"/>
+          <a:lstStyle/>
+          <a:p>
+            <a:pPr algn="ctr"/>
+            <a:r>
+              <a:rPr sz="1800" b="1">
+                <a:solidFill>
+                  <a:srgbClr val="97BC62"/>
+                </a:solidFill>
+                <a:latin typeface="Calibri"/>
+              </a:rPr>
+              <a:t>LISTENING</a:t>
+            </a:r>
+          </a:p>
+        </p:txBody>
+      </p:sp>
+      <p:pic>
+        <p:nvPicPr>
+          <p:cNvPr id="102" name="Flow 3" descr="rings widening on still water"/>
+          <p:cNvPicPr>
+            <a:picLocks noChangeAspect="1"/>
+          </p:cNvPicPr>
+          <p:nvPr/>
+        </p:nvPicPr>
+        <p:blipFill>
+          <a:blip r:embed="rId5"/>
+          <a:stretch>
+            <a:fillRect/>
+          </a:stretch>
+        </p:blipFill>
+        <p:spPr>
+          <a:xfrm>
+            <a:off x="6181344" y="1691640"/>
+            <a:ext cx="2450592" cy="3264408"/>
+          </a:xfrm>
+          <a:prstGeom prst="rect">
+            <a:avLst/>
+          </a:prstGeom>
+          <a:ln w="76200">
+            <a:solidFill>
+              <a:srgbClr val="FFFFFF"/>
+            </a:solidFill>
+          </a:ln>
+          <a:effectLst>
+            <a:outerShdw blurRad="63500" dist="25400" dir="5400000" rotWithShape="0">
+              <a:srgbClr val="000000">
+                <a:alpha val="35000"/>
+              </a:srgbClr>
+            </a:outerShdw>
+          </a:effectLst>
+        </p:spPr>
+      </p:pic>
+      <p:sp>
+        <p:nvSpPr>
+          <p:cNvPr id="112" name="Cap 3"/>
+          <p:cNvSpPr txBox="1"/>
+          <p:nvPr/>
+        </p:nvSpPr>
+        <p:spPr>
+          <a:xfrm>
+            <a:off x="6181344" y="5047488"/>
+            <a:ext cx="2450592" cy="365760"/>
+          </a:xfrm>
+          <a:prstGeom prst="rect">
+            <a:avLst/>
+          </a:prstGeom>
+          <a:noFill/>
+        </p:spPr>
+        <p:txBody>
+          <a:bodyPr wrap="square"/>
+          <a:lstStyle/>
+          <a:p>
+            <a:pPr algn="ctr"/>
+            <a:r>
+              <a:rPr sz="1800" b="1">
+                <a:solidFill>
+                  <a:srgbClr val="97BC62"/>
+                </a:solidFill>
+                <a:latin typeface="Calibri"/>
+              </a:rPr>
+              <a:t>CHANGED, RIPPLING</a:t>
+            </a:r>
+          </a:p>
+        </p:txBody>
+      </p:sp>
+      <p:pic>
+        <p:nvPicPr>
+          <p:cNvPr id="103" name="Flow 4" descr="a hiker leaping between two rocks"/>
+          <p:cNvPicPr>
+            <a:picLocks noChangeAspect="1"/>
+          </p:cNvPicPr>
+          <p:nvPr/>
+        </p:nvPicPr>
+        <p:blipFill>
+          <a:blip r:embed="rId6"/>
+          <a:stretch>
+            <a:fillRect/>
+          </a:stretch>
+        </p:blipFill>
+        <p:spPr>
+          <a:xfrm>
+            <a:off x="8860536" y="1691640"/>
+            <a:ext cx="2450592" cy="3264408"/>
+          </a:xfrm>
+          <a:prstGeom prst="rect">
+            <a:avLst/>
+          </a:prstGeom>
+          <a:ln w="76200">
+            <a:solidFill>
+              <a:srgbClr val="FFFFFF"/>
+            </a:solidFill>
+          </a:ln>
+          <a:effectLst>
+            <a:outerShdw blurRad="63500" dist="25400" dir="5400000" rotWithShape="0">
+              <a:srgbClr val="000000">
+                <a:alpha val="35000"/>
+              </a:srgbClr>
+            </a:outerShdw>
+          </a:effectLst>
+        </p:spPr>
+      </p:pic>
+      <p:sp>
+        <p:nvSpPr>
+          <p:cNvPr id="113" name="Cap 4"/>
+          <p:cNvSpPr txBox="1"/>
+          <p:nvPr/>
+        </p:nvSpPr>
+        <p:spPr>
+          <a:xfrm>
+            <a:off x="8860536" y="5047488"/>
+            <a:ext cx="2450592" cy="365760"/>
+          </a:xfrm>
+          <a:prstGeom prst="rect">
+            <a:avLst/>
+          </a:prstGeom>
+          <a:noFill/>
+        </p:spPr>
+        <p:txBody>
+          <a:bodyPr wrap="square"/>
+          <a:lstStyle/>
+          <a:p>
+            <a:pPr algn="ctr"/>
+            <a:r>
+              <a:rPr sz="1800" b="1">
+                <a:solidFill>
+                  <a:srgbClr val="97BC62"/>
+                </a:solidFill>
+                <a:latin typeface="Calibri"/>
+              </a:rPr>
+              <a:t>LEAPING</a:t>
+            </a:r>
+          </a:p>
+        </p:txBody>
+      </p:sp>
+      <p:sp>
+        <p:nvSpPr>
+          <p:cNvPr id="120" name="FlowLine"/>
+          <p:cNvSpPr txBox="1"/>
+          <p:nvPr/>
+        </p:nvSpPr>
+        <p:spPr>
+          <a:xfrm>
+            <a:off x="822960" y="5623560"/>
+            <a:ext cx="10515600" cy="731520"/>
+          </a:xfrm>
+          <a:prstGeom prst="rect">
+            <a:avLst/>
+          </a:prstGeom>
+          <a:noFill/>
+        </p:spPr>
+        <p:txBody>
+          <a:bodyPr wrap="square"/>
+          <a:lstStyle/>
+          <a:p>
+            <a:pPr algn="l"/>
+            <a:r>
+              <a:rPr sz="1800" i="1">
+                <a:solidFill>
+                  <a:srgbClr val="222B22"/>
+                </a:solidFill>
+                <a:latin typeface="Calibri"/>
+              </a:rPr>
+              <a:t>The founder’s own morning flow — four images, one motto, kept for years. Yours will look different. The journal has a page waiting for it.</a:t>
+            </a:r>
           </a:p>
         </p:txBody>
       </p:sp>

--- a/_implementation-notes/evening-series/FotH Evening Session 15 Slides DRAFT v1.pptx
+++ b/_implementation-notes/evening-series/FotH Evening Session 15 Slides DRAFT v1.pptx
@@ -7369,7 +7369,7 @@
           <p:nvPr/>
         </p:nvPicPr>
         <p:blipFill>
-          <a:blip r:embed="rId4"/>
+          <a:blip r:embed="rId5"/>
           <a:stretch>
             <a:fillRect/>
           </a:stretch>

--- a/_implementation-notes/evening-series/FotH Evening Session 15 Slides DRAFT v1.pptx
+++ b/_implementation-notes/evening-series/FotH Evening Session 15 Slides DRAFT v1.pptx
@@ -5117,7 +5117,7 @@
           <a:p>
             <a:pPr algn="r"/>
             <a:r>
-              <a:t>192</a:t>
+              <a:t>221</a:t>
             </a:r>
             <a:endParaRPr sz="1000" b="1">
               <a:solidFill>
@@ -5485,7 +5485,7 @@
           <a:p>
             <a:pPr algn="r"/>
             <a:r>
-              <a:t>193</a:t>
+              <a:t>222</a:t>
             </a:r>
             <a:endParaRPr sz="1000" b="1">
               <a:solidFill>
@@ -5782,7 +5782,7 @@
           <a:p>
             <a:pPr algn="r"/>
             <a:r>
-              <a:t>194</a:t>
+              <a:t>223</a:t>
             </a:r>
             <a:endParaRPr sz="1000" b="1">
               <a:solidFill>
@@ -6227,7 +6227,7 @@
           <a:p>
             <a:pPr algn="r"/>
             <a:r>
-              <a:t>195</a:t>
+              <a:t>224</a:t>
             </a:r>
             <a:endParaRPr sz="1000" b="1">
               <a:solidFill>
@@ -6499,7 +6499,7 @@
           <a:p>
             <a:pPr algn="r"/>
             <a:r>
-              <a:t>196</a:t>
+              <a:t>225</a:t>
             </a:r>
             <a:endParaRPr sz="1000" b="1">
               <a:solidFill>
@@ -6727,7 +6727,7 @@
           <a:p>
             <a:pPr algn="r"/>
             <a:r>
-              <a:t>197</a:t>
+              <a:t>226</a:t>
             </a:r>
             <a:endParaRPr sz="1000" b="1">
               <a:solidFill>
@@ -6919,7 +6919,7 @@
           <a:p>
             <a:pPr algn="r"/>
             <a:r>
-              <a:t>197a</a:t>
+              <a:t>227</a:t>
             </a:r>
             <a:endParaRPr sz="1000" b="1">
               <a:solidFill>
@@ -7132,7 +7132,7 @@
           <a:p>
             <a:pPr algn="r"/>
             <a:r>
-              <a:t>185</a:t>
+              <a:t>213</a:t>
             </a:r>
             <a:endParaRPr sz="1000" b="1">
               <a:solidFill>
@@ -7349,7 +7349,7 @@
           <a:p>
             <a:pPr algn="r"/>
             <a:r>
-              <a:t>185a</a:t>
+              <a:t>214</a:t>
             </a:r>
             <a:endParaRPr sz="1000" b="1">
               <a:solidFill>
@@ -7763,7 +7763,7 @@
           <a:p>
             <a:pPr algn="r"/>
             <a:r>
-              <a:t>186</a:t>
+              <a:t>215</a:t>
             </a:r>
             <a:endParaRPr sz="1000" b="1">
               <a:solidFill>
@@ -8146,7 +8146,7 @@
           <a:p>
             <a:pPr algn="r"/>
             <a:r>
-              <a:t>187</a:t>
+              <a:t>216</a:t>
             </a:r>
             <a:endParaRPr sz="1000" b="1">
               <a:solidFill>
@@ -8418,7 +8418,7 @@
           <a:p>
             <a:pPr algn="r"/>
             <a:r>
-              <a:t>188</a:t>
+              <a:t>217</a:t>
             </a:r>
             <a:endParaRPr sz="1000" b="1">
               <a:solidFill>
@@ -8745,7 +8745,7 @@
           <a:p>
             <a:pPr algn="r"/>
             <a:r>
-              <a:t>189</a:t>
+              <a:t>218</a:t>
             </a:r>
             <a:endParaRPr sz="1000" b="1">
               <a:solidFill>
@@ -9042,7 +9042,7 @@
           <a:p>
             <a:pPr algn="r"/>
             <a:r>
-              <a:t>190</a:t>
+              <a:t>219</a:t>
             </a:r>
             <a:endParaRPr sz="1000" b="1">
               <a:solidFill>
@@ -9168,7 +9168,7 @@
           <a:p>
             <a:pPr algn="r"/>
             <a:r>
-              <a:t>191</a:t>
+              <a:t>220</a:t>
             </a:r>
             <a:endParaRPr sz="1000" b="1">
               <a:solidFill>

--- a/_implementation-notes/evening-series/FotH Evening Session 15 Slides DRAFT v1.pptx
+++ b/_implementation-notes/evening-series/FotH Evening Session 15 Slides DRAFT v1.pptx
@@ -7369,7 +7369,7 @@
           <p:nvPr/>
         </p:nvPicPr>
         <p:blipFill>
-          <a:blip r:embed="rId5"/>
+          <a:blip r:embed="rId6"/>
           <a:stretch>
             <a:fillRect/>
           </a:stretch>

--- a/_implementation-notes/evening-series/FotH Evening Session 15 Slides DRAFT v1.pptx
+++ b/_implementation-notes/evening-series/FotH Evening Session 15 Slides DRAFT v1.pptx
@@ -1239,7 +1239,7 @@
           <a:p>
             <a:r>
               <a:rPr lang="en-US" sz="1200"/>
-              <a:t>GUARD: For some families the breaks ARE the dry season — name that warmly from the front; leadsanions watch who flinches when it is named.</a:t>
+              <a:t>GUARD: For some families the breaks ARE the dry season — name that warmly from the front; Lead Companions watch who flinches when it is named.</a:t>
             </a:r>
           </a:p>
         </p:txBody>

--- a/_implementation-notes/evening-series/FotH Evening Session 15 Slides DRAFT v1.pptx
+++ b/_implementation-notes/evening-series/FotH Evening Session 15 Slides DRAFT v1.pptx
@@ -5117,7 +5117,7 @@
           <a:p>
             <a:pPr algn="r"/>
             <a:r>
-              <a:t>221</a:t>
+              <a:t>222</a:t>
             </a:r>
             <a:endParaRPr sz="1000" b="1">
               <a:solidFill>
@@ -5485,7 +5485,7 @@
           <a:p>
             <a:pPr algn="r"/>
             <a:r>
-              <a:t>222</a:t>
+              <a:t>223</a:t>
             </a:r>
             <a:endParaRPr sz="1000" b="1">
               <a:solidFill>
@@ -5782,7 +5782,7 @@
           <a:p>
             <a:pPr algn="r"/>
             <a:r>
-              <a:t>223</a:t>
+              <a:t>224</a:t>
             </a:r>
             <a:endParaRPr sz="1000" b="1">
               <a:solidFill>
@@ -6227,7 +6227,7 @@
           <a:p>
             <a:pPr algn="r"/>
             <a:r>
-              <a:t>224</a:t>
+              <a:t>225</a:t>
             </a:r>
             <a:endParaRPr sz="1000" b="1">
               <a:solidFill>
@@ -6499,7 +6499,7 @@
           <a:p>
             <a:pPr algn="r"/>
             <a:r>
-              <a:t>225</a:t>
+              <a:t>226</a:t>
             </a:r>
             <a:endParaRPr sz="1000" b="1">
               <a:solidFill>
@@ -6727,7 +6727,7 @@
           <a:p>
             <a:pPr algn="r"/>
             <a:r>
-              <a:t>226</a:t>
+              <a:t>227</a:t>
             </a:r>
             <a:endParaRPr sz="1000" b="1">
               <a:solidFill>
@@ -6919,7 +6919,7 @@
           <a:p>
             <a:pPr algn="r"/>
             <a:r>
-              <a:t>227</a:t>
+              <a:t>228</a:t>
             </a:r>
             <a:endParaRPr sz="1000" b="1">
               <a:solidFill>
@@ -7132,7 +7132,7 @@
           <a:p>
             <a:pPr algn="r"/>
             <a:r>
-              <a:t>213</a:t>
+              <a:t>214</a:t>
             </a:r>
             <a:endParaRPr sz="1000" b="1">
               <a:solidFill>
@@ -7349,7 +7349,7 @@
           <a:p>
             <a:pPr algn="r"/>
             <a:r>
-              <a:t>214</a:t>
+              <a:t>215</a:t>
             </a:r>
             <a:endParaRPr sz="1000" b="1">
               <a:solidFill>
@@ -7763,7 +7763,7 @@
           <a:p>
             <a:pPr algn="r"/>
             <a:r>
-              <a:t>215</a:t>
+              <a:t>216</a:t>
             </a:r>
             <a:endParaRPr sz="1000" b="1">
               <a:solidFill>
@@ -8146,7 +8146,7 @@
           <a:p>
             <a:pPr algn="r"/>
             <a:r>
-              <a:t>216</a:t>
+              <a:t>217</a:t>
             </a:r>
             <a:endParaRPr sz="1000" b="1">
               <a:solidFill>
@@ -8418,7 +8418,7 @@
           <a:p>
             <a:pPr algn="r"/>
             <a:r>
-              <a:t>217</a:t>
+              <a:t>218</a:t>
             </a:r>
             <a:endParaRPr sz="1000" b="1">
               <a:solidFill>
@@ -8745,7 +8745,7 @@
           <a:p>
             <a:pPr algn="r"/>
             <a:r>
-              <a:t>218</a:t>
+              <a:t>219</a:t>
             </a:r>
             <a:endParaRPr sz="1000" b="1">
               <a:solidFill>
@@ -9042,7 +9042,7 @@
           <a:p>
             <a:pPr algn="r"/>
             <a:r>
-              <a:t>219</a:t>
+              <a:t>220</a:t>
             </a:r>
             <a:endParaRPr sz="1000" b="1">
               <a:solidFill>
@@ -9168,7 +9168,7 @@
           <a:p>
             <a:pPr algn="r"/>
             <a:r>
-              <a:t>220</a:t>
+              <a:t>221</a:t>
             </a:r>
             <a:endParaRPr sz="1000" b="1">
               <a:solidFill>

--- a/_implementation-notes/evening-series/FotH Evening Session 15 Slides DRAFT v1.pptx
+++ b/_implementation-notes/evening-series/FotH Evening Session 15 Slides DRAFT v1.pptx
@@ -1586,14 +1586,17 @@
           <a:lstStyle/>
           <a:p>
             <a:r>
-              <a:rPr lang="en-US" sz="1200"/>
               <a:t>S15 · 8:28–8:30 · LEAD: CONTAINER HOLDER (CiF opens, Lead Companion closes)</a:t>
             </a:r>
           </a:p>
           <a:p>
             <a:r>
-              <a:rPr lang="en-US" sz="1200"/>
               <a:t>BEATS: 1. Practice, two pieces: for the willing, the four questions at home — the guards are on the card in their hand; for everyone, run the Rhythm Card as built and journal where it held and slipped — no guilt-engine. 2. The returning rule: miss a day, begin again on the next available day; returning, not streaks. 3. Name what happened today: a rhythm built by your own hand, and some houses about to have their most honest conversation in years. 4. Aaronic blessing — the senior speaks it, their last as a Companion-in-Formation.</a:t>
+            </a:r>
+          </a:p>
+          <a:p>
+            <a:r>
+              <a:t>BLESSINGS: eyes on the person, not the screen — nothing to read; say what is on your heart for them, specific and short.</a:t>
             </a:r>
           </a:p>
         </p:txBody>
@@ -6088,7 +6091,7 @@
                 </a:solidFill>
                 <a:latin typeface="Calibri"/>
               </a:rPr>
-              <a:t>Blessings — specific, witnessed, short</a:t>
+              <a:t>Blessings — eyes on the person, not the screen: say what is on your heart for them. Specific, witnessed, short</a:t>
             </a:r>
           </a:p>
           <a:p>

--- a/_implementation-notes/evening-series/FotH Evening Session 15 Slides DRAFT v1.pptx
+++ b/_implementation-notes/evening-series/FotH Evening Session 15 Slides DRAFT v1.pptx
@@ -5120,7 +5120,7 @@
           <a:p>
             <a:pPr algn="r"/>
             <a:r>
-              <a:t>222</a:t>
+              <a:t>223</a:t>
             </a:r>
             <a:endParaRPr sz="1000" b="1">
               <a:solidFill>
@@ -5488,7 +5488,7 @@
           <a:p>
             <a:pPr algn="r"/>
             <a:r>
-              <a:t>223</a:t>
+              <a:t>224</a:t>
             </a:r>
             <a:endParaRPr sz="1000" b="1">
               <a:solidFill>
@@ -5785,7 +5785,7 @@
           <a:p>
             <a:pPr algn="r"/>
             <a:r>
-              <a:t>224</a:t>
+              <a:t>225</a:t>
             </a:r>
             <a:endParaRPr sz="1000" b="1">
               <a:solidFill>
@@ -6230,7 +6230,7 @@
           <a:p>
             <a:pPr algn="r"/>
             <a:r>
-              <a:t>225</a:t>
+              <a:t>226</a:t>
             </a:r>
             <a:endParaRPr sz="1000" b="1">
               <a:solidFill>
@@ -6502,7 +6502,7 @@
           <a:p>
             <a:pPr algn="r"/>
             <a:r>
-              <a:t>226</a:t>
+              <a:t>227</a:t>
             </a:r>
             <a:endParaRPr sz="1000" b="1">
               <a:solidFill>
@@ -6730,7 +6730,7 @@
           <a:p>
             <a:pPr algn="r"/>
             <a:r>
-              <a:t>227</a:t>
+              <a:t>228</a:t>
             </a:r>
             <a:endParaRPr sz="1000" b="1">
               <a:solidFill>
@@ -6922,7 +6922,7 @@
           <a:p>
             <a:pPr algn="r"/>
             <a:r>
-              <a:t>228</a:t>
+              <a:t>229</a:t>
             </a:r>
             <a:endParaRPr sz="1000" b="1">
               <a:solidFill>
@@ -7135,7 +7135,7 @@
           <a:p>
             <a:pPr algn="r"/>
             <a:r>
-              <a:t>214</a:t>
+              <a:t>215</a:t>
             </a:r>
             <a:endParaRPr sz="1000" b="1">
               <a:solidFill>
@@ -7352,7 +7352,7 @@
           <a:p>
             <a:pPr algn="r"/>
             <a:r>
-              <a:t>215</a:t>
+              <a:t>216</a:t>
             </a:r>
             <a:endParaRPr sz="1000" b="1">
               <a:solidFill>
@@ -7766,7 +7766,7 @@
           <a:p>
             <a:pPr algn="r"/>
             <a:r>
-              <a:t>216</a:t>
+              <a:t>217</a:t>
             </a:r>
             <a:endParaRPr sz="1000" b="1">
               <a:solidFill>
@@ -8149,7 +8149,7 @@
           <a:p>
             <a:pPr algn="r"/>
             <a:r>
-              <a:t>217</a:t>
+              <a:t>218</a:t>
             </a:r>
             <a:endParaRPr sz="1000" b="1">
               <a:solidFill>
@@ -8421,7 +8421,7 @@
           <a:p>
             <a:pPr algn="r"/>
             <a:r>
-              <a:t>218</a:t>
+              <a:t>219</a:t>
             </a:r>
             <a:endParaRPr sz="1000" b="1">
               <a:solidFill>
@@ -8748,7 +8748,7 @@
           <a:p>
             <a:pPr algn="r"/>
             <a:r>
-              <a:t>219</a:t>
+              <a:t>220</a:t>
             </a:r>
             <a:endParaRPr sz="1000" b="1">
               <a:solidFill>
@@ -9045,7 +9045,7 @@
           <a:p>
             <a:pPr algn="r"/>
             <a:r>
-              <a:t>220</a:t>
+              <a:t>221</a:t>
             </a:r>
             <a:endParaRPr sz="1000" b="1">
               <a:solidFill>
@@ -9171,7 +9171,7 @@
           <a:p>
             <a:pPr algn="r"/>
             <a:r>
-              <a:t>221</a:t>
+              <a:t>222</a:t>
             </a:r>
             <a:endParaRPr sz="1000" b="1">
               <a:solidFill>

--- a/_implementation-notes/evening-series/FotH Evening Session 15 Slides DRAFT v1.pptx
+++ b/_implementation-notes/evening-series/FotH Evening Session 15 Slides DRAFT v1.pptx
@@ -786,7 +786,7 @@
           <a:lstStyle/>
           <a:p>
             <a:r>
-              <a:t>S15 · WELCOME · LEAD: CONTAINER HOLDER · GROUNDING — every session opens on this map</a:t>
+              <a:t>E11 · WELCOME · LEAD: CONTAINER HOLDER · GROUNDING — every session opens on this map</a:t>
             </a:r>
           </a:p>
           <a:p>
@@ -796,7 +796,7 @@
           </a:p>
           <a:p>
             <a:r>
-              <a:t>1. Locate tonight on the map, plainly: Session 15 gathers the whole map into a rhythm — all four Connects, sustained. Each connection makes the next one real (Matt. 22:37–40).</a:t>
+              <a:t>1. Locate tonight on the map, plainly: Evening 11 gathers the whole map into a rhythm — all four Connects, sustained. Each connection makes the next one real (Matt. 22:37–40).</a:t>
             </a:r>
           </a:p>
           <a:p>
@@ -857,7 +857,7 @@
           <a:lstStyle/>
           <a:p>
             <a:r>
-              <a:t>S15 · COMMISSIONING · LEAD: CONTENT PRESENTER</a:t>
+              <a:t>E11 · COMMISSIONING · LEAD: CONTENT PRESENTER</a:t>
             </a:r>
           </a:p>
           <a:p>
@@ -928,7 +928,7 @@
           <a:lstStyle/>
           <a:p>
             <a:r>
-              <a:t>S15 · COMMISSIONING · LEAD: CONTENT PRESENTER</a:t>
+              <a:t>E11 · COMMISSIONING · LEAD: CONTENT PRESENTER</a:t>
             </a:r>
           </a:p>
           <a:p>
@@ -994,13 +994,11 @@
           <a:lstStyle/>
           <a:p>
             <a:r>
-              <a:rPr lang="en-US" sz="1200"/>
-              <a:t>S15 · pre-session · DIVIDER</a:t>
-            </a:r>
-          </a:p>
-          <a:p>
-            <a:r>
-              <a:rPr lang="en-US" sz="1200"/>
+              <a:t>E11 · pre-session · DIVIDER</a:t>
+            </a:r>
+          </a:p>
+          <a:p>
+            <a:r>
               <a:t>On screen through dinner and as the circle forms. Greet at the door — the slide holds the room.</a:t>
             </a:r>
           </a:p>
@@ -1047,19 +1045,16 @@
           <a:lstStyle/>
           <a:p>
             <a:r>
-              <a:rPr lang="en-US" sz="1200"/>
-              <a:t>S15 · 7:00–7:08 · LEAD: CONTAINER HOLDER · TEEN-LED (CiF)</a:t>
-            </a:r>
-          </a:p>
-          <a:p>
-            <a:r>
-              <a:rPr lang="en-US" sz="1200"/>
-              <a:t>BEATS: 1. The Companion-in-Formation carries today's rhythm arc — their fourth and final lead before Week 22; the Four Questions block belongs to the Lead Companion by design. 2. Frame the night: fourteen weeks of practices stop being something we come to and become something we carry — build your own rhythm in your own handwriting; then the parents receive the bravest homework of the series. 3. Name the gap warmly: the break is coming; momentum does not survive gaps — a rhythm does.</a:t>
-            </a:r>
-          </a:p>
-          <a:p>
-            <a:r>
-              <a:rPr lang="en-US" sz="1200"/>
+              <a:t>E11 · 7:00–7:08 · LEAD: CONTAINER HOLDER · TEEN-LED (CiF)</a:t>
+            </a:r>
+          </a:p>
+          <a:p>
+            <a:r>
+              <a:t>BEATS: 1. The Companion-in-Formation carries today's rhythm arc — their fourth and final lead before Evening 17; the Four Questions block belongs to the Lead Companion by design. 2. Frame the night: fourteen weeks of practices stop being something we come to and become something we carry — build your own rhythm in your own handwriting; then the parents receive the bravest homework of the series. 3. Name the gap warmly: the break is coming; momentum does not survive gaps — a rhythm does.</a:t>
+            </a:r>
+          </a:p>
+          <a:p>
+            <a:r>
               <a:t>CUES: The Lead Companion sits where the senior can find their eyes all night.</a:t>
             </a:r>
           </a:p>
@@ -1106,12 +1101,12 @@
           <a:lstStyle/>
           <a:p>
             <a:r>
-              <a:t>S15 · 7:00–7:08 · LEAD: CONTAINER HOLDER · TEEN-LED (CiF, from memory)</a:t>
-            </a:r>
-          </a:p>
-          <a:p>
-            <a:r>
-              <a:t>BEATS: 1. The senior opens from memory: blessing first, then the container — Safe, Present, Clear, Intentional, same as every week. 2. Two things today: your rhythm, your handwriting; then four questions for the parents. 3. Unhurried — this is their ninth or tenth container rep, and Week 22 will ask for it in public.</a:t>
+              <a:t>E11 · 7:00–7:08 · LEAD: CONTAINER HOLDER · TEEN-LED (CiF, from memory)</a:t>
+            </a:r>
+          </a:p>
+          <a:p>
+            <a:r>
+              <a:t>BEATS: 1. The senior opens from memory: blessing first, then the container — Safe, Present, Clear, Intentional, same as every week. 2. Two things today: your rhythm, your handwriting; then four questions for the parents. 3. Unhurried — this is their ninth or tenth container rep, and Evening 17 will ask for it in public.</a:t>
             </a:r>
           </a:p>
           <a:p>
@@ -1167,19 +1162,16 @@
           <a:lstStyle/>
           <a:p>
             <a:r>
-              <a:rPr lang="en-US" sz="1200"/>
-              <a:t>S15 · 7:25–7:29 · LEAD: CONTENT PRESENTER (Lead Companion)</a:t>
-            </a:r>
-          </a:p>
-          <a:p>
-            <a:r>
-              <a:rPr lang="en-US" sz="1200"/>
-              <a:t>BEATS: 1. Finish the Mission week: anyone whose downhill answer was unfinished, or has changed shape since — one sentence, now, to the room. 2. Receive each without commentary; the answers carry forward to the Week 21 commissioning. 3. Then the practice check, ninety seconds: one sentence on the one small action.</a:t>
-            </a:r>
-          </a:p>
-          <a:p>
-            <a:r>
-              <a:rPr lang="en-US" sz="1200"/>
+              <a:t>E11 · 7:25–7:29 · LEAD: CONTENT PRESENTER (Lead Companion)</a:t>
+            </a:r>
+          </a:p>
+          <a:p>
+            <a:r>
+              <a:t>BEATS: 1. Finish the Mission week: anyone whose downhill answer was unfinished, or has changed shape since — one sentence, now, to the room. 2. Receive each without commentary; the answers carry forward to the Evening 16 commissioning. 3. Then the practice check, ninety seconds: one sentence on the one small action.</a:t>
+            </a:r>
+          </a:p>
+          <a:p>
+            <a:r>
               <a:t>CUES: The arranged parent starts the round (Run Card) — never a cold call on a teen; teens choose their depth; pass anytime.</a:t>
             </a:r>
           </a:p>
@@ -1226,19 +1218,16 @@
           <a:lstStyle/>
           <a:p>
             <a:r>
-              <a:rPr lang="en-US" sz="1200"/>
-              <a:t>S15 · 7:29–7:36 · LEAD: CONTENT PRESENTER · TEEN-LED (CiF)</a:t>
-            </a:r>
-          </a:p>
-          <a:p>
-            <a:r>
-              <a:rPr lang="en-US" sz="1200"/>
+              <a:t>E11 · 7:29–7:36 · LEAD: CONTENT PRESENTER · TEEN-LED (CiF)</a:t>
+            </a:r>
+          </a:p>
+          <a:p>
+            <a:r>
               <a:t>BEATS: 1. Read Galatians 6:9 slowly. 2. Teach it: Paul assumes the weariness; the condition is not giving up; the season is His — the not-giving-up is ours. Nobody white-knuckles through years; people with a rhythm walk through years. 3. Name the break plainly: for twelve weeks the room carried the practices; over the break there is no evenings. What crosses a gap is not momentum — it is a rhythm built on purpose, today, before the gap.</a:t>
             </a:r>
           </a:p>
           <a:p>
             <a:r>
-              <a:rPr lang="en-US" sz="1200"/>
               <a:t>GUARD: For some families the breaks ARE the dry season — name that warmly from the front; Lead Companions watch who flinches when it is named.</a:t>
             </a:r>
           </a:p>
@@ -1285,13 +1274,11 @@
           <a:lstStyle/>
           <a:p>
             <a:r>
-              <a:rPr lang="en-US" sz="1200"/>
-              <a:t>S15 · 7:36–7:39 · LEAD: CONTENT PRESENTER · TEEN-LED (CiF)</a:t>
-            </a:r>
-          </a:p>
-          <a:p>
-            <a:r>
-              <a:rPr lang="en-US" sz="1200"/>
+              <a:t>E11 · 7:36–7:39 · LEAD: CONTENT PRESENTER · TEEN-LED (CiF)</a:t>
+            </a:r>
+          </a:p>
+          <a:p>
+            <a:r>
               <a:t>BEATS: 1. Rhythm Cards out of the folders: Daily (morning question, evening note, PROAPT if the season allows), Weekly (one named person, a sabbath rhythm), Monthly (clearing time, Four-Connects review), Seasonally. Nothing new — you are choosing what you actually take with you. 2. State the honesty rule; it is the whole exercise: write the rhythm you will actually keep, not the one that impresses you. 3. The starter floor is two practices, six minutes a day — six honest minutes is a real rhythm. 4. After the founder's morning-flow moment (next slide), send the pairs: families together, own handwriting. Go.</a:t>
             </a:r>
           </a:p>
@@ -1338,19 +1325,16 @@
           <a:lstStyle/>
           <a:p>
             <a:r>
-              <a:rPr lang="en-US" sz="1200"/>
-              <a:t>S15 · 7:36–7:39 · LEAD: CONTENT PRESENTER (90 seconds inside the card intro)</a:t>
-            </a:r>
-          </a:p>
-          <a:p>
-            <a:r>
-              <a:rPr lang="en-US" sz="1200"/>
+              <a:t>E11 · 7:36–7:39 · LEAD: CONTENT PRESENTER (90 seconds inside the card intro)</a:t>
+            </a:r>
+          </a:p>
+          <a:p>
+            <a:r>
               <a:t>BEATS: 1. Show where a kept card can go — four images, prayed in the same order every morning for years. 2. Walk them: a bench above an evening valley — drawn into God, grounded; a quiet chair with an open Bible — listening for His voice today; rings widening on still water — being changed, ripples reaching people never traced; a hiker mid-leap rock to rock — into the day, certain at each point. Grounding. Hearing. Changing. Leaping. 3. The invitation — never an assignment: as you keep your card, watch for your own four images; the journal has a page waiting.</a:t>
             </a:r>
           </a:p>
           <a:p>
             <a:r>
-              <a:rPr lang="en-US" sz="1200"/>
               <a:t>SUB: These are John's images and John's morning flow, kept for years — present them AS his: this is our founder's rhythm; nobody assigned him these pictures — they became his by keeping them. Do not claim it as yours. Then the invitation stands unchanged.</a:t>
             </a:r>
           </a:p>
@@ -1397,25 +1381,21 @@
           <a:lstStyle/>
           <a:p>
             <a:r>
-              <a:rPr lang="en-US" sz="1200"/>
-              <a:t>S15 · 7:39–7:58 · LEAD: CONTENT PRESENTER · FAMILY PAIRS</a:t>
-            </a:r>
-          </a:p>
-          <a:p>
-            <a:r>
-              <a:rPr lang="en-US" sz="1200"/>
+              <a:t>E11 · 7:39–7:58 · LEAD: CONTENT PRESENTER · FAMILY PAIRS</a:t>
+            </a:r>
+          </a:p>
+          <a:p>
+            <a:r>
               <a:t>BEATS: 1. Everyone builds H15.2 in their own handwriting — never typed, never filled in for anyone; families build side by side. 2. Coach specificity: 'morning question, 6:50, kitchen table, before my phone' is a rhythm; a wish is not. 3. Coach DOWN, not up: which two survive exam season? Start there — the card lets you add later. 4. The weekly-partner line is the most important line on the sheet: an actual name. 5. Close with each person reading their daily line aloud to the pair.</a:t>
             </a:r>
           </a:p>
           <a:p>
             <a:r>
-              <a:rPr lang="en-US" sz="1200"/>
               <a:t>CUES: A parent reads first — arranged ahead (Run Card), never a cold call on a teen; pass anytime.</a:t>
             </a:r>
           </a:p>
           <a:p>
             <a:r>
-              <a:rPr lang="en-US" sz="1200"/>
               <a:t>GUARD: A blank weekly line usually means 'nobody would want the job' — don't fix it in the pair; note it for follow-up. Anything heavy goes to the adult after the pair closes.</a:t>
             </a:r>
           </a:p>
@@ -1462,25 +1442,21 @@
           <a:lstStyle/>
           <a:p>
             <a:r>
-              <a:rPr lang="en-US" sz="1200"/>
-              <a:t>S15 · 7:58–8:20 · LEAD: CONTENT PRESENTER · LEAD COMPANION (senior sits as a member)</a:t>
-            </a:r>
-          </a:p>
-          <a:p>
-            <a:r>
-              <a:rPr lang="en-US" sz="1200"/>
+              <a:t>E11 · 7:58–8:20 · LEAD: CONTENT PRESENTER · LEAD COMPANION (senior sits as a member)</a:t>
+            </a:r>
+          </a:p>
+          <a:p>
+            <a:r>
               <a:t>BEATS: 1. Four questions on the board, in order, aloud — H15.3 has them exact. 2. Name the rehearsal: the weekly feedback round trained this posture. 3. The story (SUB). 4. Commission the willing; the card home in a parent's hand.</a:t>
             </a:r>
           </a:p>
           <a:p>
             <a:r>
-              <a:rPr lang="en-US" sz="1200"/>
               <a:t>GUARD: Willing-only BOTH directions — pass is a full answer at home; alarm on a teen's face = repeat the guard 1:1 before they leave. Receive without defending; never punish an answer later; not ready means wait. Invisible by default — no audits. A letter counts; 'not yet' counts. Abuse or self-harm = Section 6. If it lands on someone mid-block, the second adult moves to them; keep presenting.</a:t>
             </a:r>
           </a:p>
           <a:p>
             <a:r>
-              <a:rPr lang="en-US" sz="1200"/>
               <a:t>SUB: The block ends in the founder's own story of asking these at home. Summarize that John has done this himself — he never once regretted asking — or tell your own if you truly have one. Never claim his.</a:t>
             </a:r>
           </a:p>
@@ -1527,19 +1503,16 @@
           <a:lstStyle/>
           <a:p>
             <a:r>
-              <a:rPr lang="en-US" sz="1200"/>
-              <a:t>S15 · 8:24–8:28 · LEAD: BOTH LEADERS</a:t>
-            </a:r>
-          </a:p>
-          <a:p>
-            <a:r>
-              <a:rPr lang="en-US" sz="1200"/>
-              <a:t>BEATS: 1. The senior answers first — went well, do differently, what I'd tell someone teaching this. 2. The Lead Companion answers the two questions for the parts they carried. 3. The room, same two questions — two or three voices each. 4. Close by naming one thing the team watched grow across all four of the senior's leads — and say aloud that the room just heard what this round has been rehearsing all along. It sets the table for Week 22.</a:t>
-            </a:r>
-          </a:p>
-          <a:p>
-            <a:r>
-              <a:rPr lang="en-US" sz="1200"/>
+              <a:t>E11 · 8:24–8:28 · LEAD: BOTH LEADERS</a:t>
+            </a:r>
+          </a:p>
+          <a:p>
+            <a:r>
+              <a:t>BEATS: 1. The senior answers first — went well, do differently, what I'd tell someone teaching this. 2. The Lead Companion answers the two questions for the parts they carried. 3. The room, same two questions — two or three voices each. 4. Close by naming one thing the team watched grow across all four of the senior's leads — and say aloud that the room just heard what this round has been rehearsing all along. It sets the table for Evening 17.</a:t>
+            </a:r>
+          </a:p>
+          <a:p>
+            <a:r>
               <a:t>GUARD: Receive without defending — 'thank you' is the whole response.</a:t>
             </a:r>
           </a:p>
@@ -1586,7 +1559,7 @@
           <a:lstStyle/>
           <a:p>
             <a:r>
-              <a:t>S15 · 8:28–8:30 · LEAD: CONTAINER HOLDER (CiF opens, Lead Companion closes)</a:t>
+              <a:t>E11 · 8:28–8:30 · LEAD: CONTAINER HOLDER (CiF opens, Lead Companion closes)</a:t>
             </a:r>
           </a:p>
           <a:p>
@@ -1642,19 +1615,16 @@
           <a:lstStyle/>
           <a:p>
             <a:r>
-              <a:rPr lang="en-US" sz="1200"/>
-              <a:t>S15 · 8:28–8:30 · LEAD: CONTAINER HOLDER</a:t>
-            </a:r>
-          </a:p>
-          <a:p>
-            <a:r>
-              <a:rPr lang="en-US" sz="1200"/>
+              <a:t>E11 · 8:28–8:30 · LEAD: CONTAINER HOLDER</a:t>
+            </a:r>
+          </a:p>
+          <a:p>
+            <a:r>
               <a:t>BEATS: 1. The Four Questions, willing only: unhurried, no audience, phone away, one person at a time; married parents also ask their spouse, separately. 2. Run the Rhythm Card as built — the break is its first field test. 3. One journal line a day: where it held, where it slipped — slips are data, not verdicts; nobody collects the journal. 4. The returning rule: begin again on the next available day.</a:t>
             </a:r>
           </a:p>
           <a:p>
             <a:r>
-              <a:rPr lang="en-US" sz="1200"/>
               <a:t>GUARD: 'Not yet' is a full answer for everyone, and next week's check-in audits nothing.</a:t>
             </a:r>
           </a:p>
@@ -7037,7 +7007,7 @@
                 </a:solidFill>
                 <a:latin typeface="Calibri"/>
               </a:rPr>
-              <a:t>SESSION 15</a:t>
+              <a:t>EVENING 11</a:t>
             </a:r>
           </a:p>
           <a:p>
@@ -7307,7 +7277,7 @@
                 </a:solidFill>
                 <a:latin typeface="Calibri"/>
               </a:rPr>
-              <a:t>Session 15 gathers the whole map into a rhythm — </a:t>
+              <a:t>Evening 11 gathers the whole map into a rhythm — </a:t>
             </a:r>
             <a:r>
               <a:rPr sz="1800" b="1">
@@ -7491,7 +7461,7 @@
                 </a:solidFill>
                 <a:latin typeface="Cambria"/>
               </a:rPr>
-              <a:t>Session 15 — Tonight’s Road</a:t>
+              <a:t>Evening 11 — Tonight’s Road</a:t>
             </a:r>
           </a:p>
         </p:txBody>
@@ -7564,7 +7534,7 @@
                 </a:solidFill>
                 <a:latin typeface="Calibri"/>
               </a:rPr>
-              <a:t>Week 13 completion</a:t>
+              <a:t>Evening 10 completion</a:t>
             </a:r>
           </a:p>
           <a:p>
@@ -8248,7 +8218,7 @@
                 </a:solidFill>
                 <a:latin typeface="Cambria"/>
               </a:rPr>
-              <a:t>Week 13 Completion — Finishing the Mission Week</a:t>
+              <a:t>Evening 10 Completion — Finishing the Mission Week</a:t>
             </a:r>
           </a:p>
         </p:txBody>
@@ -8369,7 +8339,7 @@
                 </a:solidFill>
                 <a:latin typeface="Calibri"/>
               </a:rPr>
-              <a:t>The answers carry forward to the Week 21 commissioning</a:t>
+              <a:t>The answers carry forward to the Evening 16 commissioning</a:t>
             </a:r>
           </a:p>
           <a:p>

--- a/_implementation-notes/evening-series/FotH Evening Session 15 Slides DRAFT v1.pptx
+++ b/_implementation-notes/evening-series/FotH Evening Session 15 Slides DRAFT v1.pptx
@@ -1223,7 +1223,7 @@
           </a:p>
           <a:p>
             <a:r>
-              <a:t>BEATS: 1. Read Galatians 6:9 slowly. 2. Teach it: Paul assumes the weariness; the condition is not giving up; the season is His — the not-giving-up is ours. Nobody white-knuckles through years; people with a rhythm walk through years. 3. Name the break plainly: for twelve weeks the room carried the practices; over the break there is no evenings. What crosses a gap is not momentum — it is a rhythm built on purpose, today, before the gap.</a:t>
+              <a:t>BEATS: 1. Read Galatians 6:9 slowly. 2. Teach it: Paul assumes the weariness; the condition is not giving up; the season is His — the not-giving-up is ours. Nobody white-knuckles through years; people with a rhythm walk through years. 3. Name the break plainly: for these evenings the room carried the practices; over the break there are no evenings. If no holiday break falls before this evening, the break is simply the two weeks since we last met; the evening form runs this test at every return. What crosses a gap is not momentum — it is a rhythm built on purpose, today, before the gap.</a:t>
             </a:r>
           </a:p>
           <a:p>
